--- a/web-presentation/pdf-exports/Week3-Session1-NLP.pptx
+++ b/web-presentation/pdf-exports/Week3-Session1-NLP.pptx
@@ -58,7 +58,6 @@
     <p:sldId id="306" r:id="rId57"/>
     <p:sldId id="307" r:id="rId58"/>
     <p:sldId id="308" r:id="rId59"/>
-    <p:sldId id="309" r:id="rId60"/>
   </p:sldIdLst>
   <p:sldSz cx="12191695" cy="6858000" type="screen4x3"/>
   <p:notesSz cx="6858000" cy="9144000"/>
@@ -4352,7 +4351,7 @@
                 <a:ea typeface="DIN Next LT W23"/>
                 <a:cs typeface="DIN Next LT W23"/>
               </a:rPr>
-              <a:t>10  /  54</a:t>
+              <a:t>10  /  53</a:t>
             </a:r>
           </a:p>
         </p:txBody>
@@ -5169,7 +5168,7 @@
                 <a:ea typeface="DIN Next LT W23"/>
                 <a:cs typeface="DIN Next LT W23"/>
               </a:rPr>
-              <a:t>11  /  54</a:t>
+              <a:t>11  /  53</a:t>
             </a:r>
           </a:p>
         </p:txBody>
@@ -5606,7 +5605,7 @@
                 <a:ea typeface="DIN Next LT W23"/>
                 <a:cs typeface="DIN Next LT W23"/>
               </a:rPr>
-              <a:t>12  /  54</a:t>
+              <a:t>12  /  53</a:t>
             </a:r>
           </a:p>
         </p:txBody>
@@ -6355,7 +6354,7 @@
                 <a:ea typeface="DIN Next LT W23"/>
                 <a:cs typeface="DIN Next LT W23"/>
               </a:rPr>
-              <a:t>13  /  54</a:t>
+              <a:t>13  /  53</a:t>
             </a:r>
           </a:p>
         </p:txBody>
@@ -6792,7 +6791,7 @@
                 <a:ea typeface="DIN Next LT W23"/>
                 <a:cs typeface="DIN Next LT W23"/>
               </a:rPr>
-              <a:t>14  /  54</a:t>
+              <a:t>14  /  53</a:t>
             </a:r>
           </a:p>
         </p:txBody>
@@ -7470,7 +7469,7 @@
                 <a:ea typeface="DIN Next LT W23"/>
                 <a:cs typeface="DIN Next LT W23"/>
               </a:rPr>
-              <a:t>15  /  54</a:t>
+              <a:t>15  /  53</a:t>
             </a:r>
           </a:p>
         </p:txBody>
@@ -7907,7 +7906,7 @@
                 <a:ea typeface="DIN Next LT W23"/>
                 <a:cs typeface="DIN Next LT W23"/>
               </a:rPr>
-              <a:t>16  /  54</a:t>
+              <a:t>16  /  53</a:t>
             </a:r>
           </a:p>
         </p:txBody>
@@ -8422,7 +8421,7 @@
                 <a:ea typeface="DIN Next LT W23"/>
                 <a:cs typeface="DIN Next LT W23"/>
               </a:rPr>
-              <a:t>17  /  54</a:t>
+              <a:t>17  /  53</a:t>
             </a:r>
           </a:p>
         </p:txBody>
@@ -9112,7 +9111,7 @@
                 <a:ea typeface="DIN Next LT W23"/>
                 <a:cs typeface="DIN Next LT W23"/>
               </a:rPr>
-              <a:t>18  /  54</a:t>
+              <a:t>18  /  53</a:t>
             </a:r>
           </a:p>
         </p:txBody>
@@ -9549,7 +9548,7 @@
                 <a:ea typeface="DIN Next LT W23"/>
                 <a:cs typeface="DIN Next LT W23"/>
               </a:rPr>
-              <a:t>19  /  54</a:t>
+              <a:t>19  /  53</a:t>
             </a:r>
           </a:p>
         </p:txBody>
@@ -11468,7 +11467,7 @@
                 <a:ea typeface="DIN Next LT W23"/>
                 <a:cs typeface="DIN Next LT W23"/>
               </a:rPr>
-              <a:t>02  /  54</a:t>
+              <a:t>02  /  53</a:t>
             </a:r>
           </a:p>
         </p:txBody>
@@ -12057,7 +12056,7 @@
                 <a:ea typeface="DIN Next LT W23"/>
                 <a:cs typeface="DIN Next LT W23"/>
               </a:rPr>
-              <a:t>20  /  54</a:t>
+              <a:t>20  /  53</a:t>
             </a:r>
           </a:p>
         </p:txBody>
@@ -12735,7 +12734,7 @@
                 <a:ea typeface="DIN Next LT W23"/>
                 <a:cs typeface="DIN Next LT W23"/>
               </a:rPr>
-              <a:t>21  /  54</a:t>
+              <a:t>21  /  53</a:t>
             </a:r>
           </a:p>
         </p:txBody>
@@ -13567,7 +13566,7 @@
                 <a:ea typeface="DIN Next LT W23"/>
                 <a:cs typeface="DIN Next LT W23"/>
               </a:rPr>
-              <a:t>22  /  54</a:t>
+              <a:t>22  /  53</a:t>
             </a:r>
           </a:p>
         </p:txBody>
@@ -14004,7 +14003,7 @@
                 <a:ea typeface="DIN Next LT W23"/>
                 <a:cs typeface="DIN Next LT W23"/>
               </a:rPr>
-              <a:t>23  /  54</a:t>
+              <a:t>23  /  53</a:t>
             </a:r>
           </a:p>
         </p:txBody>
@@ -14593,7 +14592,7 @@
                 <a:ea typeface="DIN Next LT W23"/>
                 <a:cs typeface="DIN Next LT W23"/>
               </a:rPr>
-              <a:t>24  /  54</a:t>
+              <a:t>24  /  53</a:t>
             </a:r>
           </a:p>
         </p:txBody>
@@ -15342,7 +15341,7 @@
                 <a:ea typeface="DIN Next LT W23"/>
                 <a:cs typeface="DIN Next LT W23"/>
               </a:rPr>
-              <a:t>25  /  54</a:t>
+              <a:t>25  /  53</a:t>
             </a:r>
           </a:p>
         </p:txBody>
@@ -15931,7 +15930,7 @@
                 <a:ea typeface="DIN Next LT W23"/>
                 <a:cs typeface="DIN Next LT W23"/>
               </a:rPr>
-              <a:t>26  /  54</a:t>
+              <a:t>26  /  53</a:t>
             </a:r>
           </a:p>
         </p:txBody>
@@ -16516,7 +16515,7 @@
                 <a:ea typeface="DIN Next LT W23"/>
                 <a:cs typeface="DIN Next LT W23"/>
               </a:rPr>
-              <a:t>27  /  54</a:t>
+              <a:t>27  /  53</a:t>
             </a:r>
           </a:p>
         </p:txBody>
@@ -17068,7 +17067,7 @@
                 <a:ea typeface="DIN Next LT W23"/>
                 <a:cs typeface="DIN Next LT W23"/>
               </a:rPr>
-              <a:t>28  /  54</a:t>
+              <a:t>28  /  53</a:t>
             </a:r>
           </a:p>
         </p:txBody>
@@ -17727,7 +17726,7 @@
                 <a:ea typeface="DIN Next LT W23"/>
                 <a:cs typeface="DIN Next LT W23"/>
               </a:rPr>
-              <a:t>29  /  54</a:t>
+              <a:t>29  /  53</a:t>
             </a:r>
           </a:p>
         </p:txBody>
@@ -18683,7 +18682,7 @@
                 <a:ea typeface="DIN Next LT W23"/>
                 <a:cs typeface="DIN Next LT W23"/>
               </a:rPr>
-              <a:t>03  /  54</a:t>
+              <a:t>03  /  53</a:t>
             </a:r>
           </a:p>
         </p:txBody>
@@ -19305,7 +19304,7 @@
                 <a:ea typeface="DIN Next LT W23"/>
                 <a:cs typeface="DIN Next LT W23"/>
               </a:rPr>
-              <a:t>30  /  54</a:t>
+              <a:t>30  /  53</a:t>
             </a:r>
           </a:p>
         </p:txBody>
@@ -19936,7 +19935,7 @@
                 <a:ea typeface="DIN Next LT W23"/>
                 <a:cs typeface="DIN Next LT W23"/>
               </a:rPr>
-              <a:t>31  /  54</a:t>
+              <a:t>31  /  53</a:t>
             </a:r>
           </a:p>
         </p:txBody>
@@ -20488,7 +20487,7 @@
                 <a:ea typeface="DIN Next LT W23"/>
                 <a:cs typeface="DIN Next LT W23"/>
               </a:rPr>
-              <a:t>32  /  54</a:t>
+              <a:t>32  /  53</a:t>
             </a:r>
           </a:p>
         </p:txBody>
@@ -20988,7 +20987,7 @@
                 <a:ea typeface="DIN Next LT W23"/>
                 <a:cs typeface="DIN Next LT W23"/>
               </a:rPr>
-              <a:t>33  /  54</a:t>
+              <a:t>33  /  53</a:t>
             </a:r>
           </a:p>
         </p:txBody>
@@ -21647,7 +21646,7 @@
                 <a:ea typeface="DIN Next LT W23"/>
                 <a:cs typeface="DIN Next LT W23"/>
               </a:rPr>
-              <a:t>34  /  54</a:t>
+              <a:t>34  /  53</a:t>
             </a:r>
           </a:p>
         </p:txBody>
@@ -22442,7 +22441,7 @@
                 <a:ea typeface="DIN Next LT W23"/>
                 <a:cs typeface="DIN Next LT W23"/>
               </a:rPr>
-              <a:t>35  /  54</a:t>
+              <a:t>35  /  53</a:t>
             </a:r>
           </a:p>
         </p:txBody>
@@ -22691,7 +22690,7 @@
                 <a:ea typeface="DIN Next LT W23"/>
                 <a:cs typeface="DIN Next LT W23"/>
               </a:rPr>
-              <a:t>Architecture Layers</a:t>
+              <a:t>Words as vectors in embedding space</a:t>
             </a:r>
           </a:p>
         </p:txBody>
@@ -22705,7 +22704,7 @@
         <p:spPr>
           <a:xfrm>
             <a:off x="548640" y="1993392"/>
-            <a:ext cx="320040" cy="571500"/>
+            <a:ext cx="320040" cy="537210"/>
           </a:xfrm>
           <a:prstGeom prst="rect">
             <a:avLst/>
@@ -22720,7 +22719,7 @@
           <a:p>
             <a:pPr algn="l"/>
             <a:r>
-              <a:rPr sz="1400" b="0">
+              <a:rPr sz="1300" b="0">
                 <a:solidFill>
                   <a:srgbClr val="9E59CD"/>
                 </a:solidFill>
@@ -22742,7 +22741,7 @@
         <p:spPr>
           <a:xfrm>
             <a:off x="914400" y="1993392"/>
-            <a:ext cx="9875519" cy="571500"/>
+            <a:ext cx="4754879" cy="537210"/>
           </a:xfrm>
           <a:prstGeom prst="rect">
             <a:avLst/>
@@ -22757,7 +22756,7 @@
           <a:p>
             <a:pPr algn="l"/>
             <a:r>
-              <a:rPr sz="1400" b="0">
+              <a:rPr sz="1300" b="0">
                 <a:solidFill>
                   <a:srgbClr val="121018"/>
                 </a:solidFill>
@@ -22778,8 +22777,8 @@
         </p:nvSpPr>
         <p:spPr>
           <a:xfrm>
-            <a:off x="548640" y="2656332"/>
-            <a:ext cx="320040" cy="571500"/>
+            <a:off x="548640" y="2622042"/>
+            <a:ext cx="320040" cy="537210"/>
           </a:xfrm>
           <a:prstGeom prst="rect">
             <a:avLst/>
@@ -22794,7 +22793,7 @@
           <a:p>
             <a:pPr algn="l"/>
             <a:r>
-              <a:rPr sz="1400" b="0">
+              <a:rPr sz="1300" b="0">
                 <a:solidFill>
                   <a:srgbClr val="9E59CD"/>
                 </a:solidFill>
@@ -22815,8 +22814,8 @@
         </p:nvSpPr>
         <p:spPr>
           <a:xfrm>
-            <a:off x="914400" y="2656332"/>
-            <a:ext cx="9875519" cy="571500"/>
+            <a:off x="914400" y="2622042"/>
+            <a:ext cx="4754879" cy="537210"/>
           </a:xfrm>
           <a:prstGeom prst="rect">
             <a:avLst/>
@@ -22831,7 +22830,7 @@
           <a:p>
             <a:pPr algn="l"/>
             <a:r>
-              <a:rPr sz="1400" b="0">
+              <a:rPr sz="1300" b="0">
                 <a:solidFill>
                   <a:srgbClr val="121018"/>
                 </a:solidFill>
@@ -22846,229 +22845,77 @@
       </p:sp>
       <p:sp>
         <p:nvSpPr>
-          <p:cNvPr id="12" name="TextBox 11"/>
-          <p:cNvSpPr txBox="1"/>
-          <p:nvPr/>
-        </p:nvSpPr>
-        <p:spPr>
-          <a:xfrm>
-            <a:off x="548640" y="3319272"/>
-            <a:ext cx="320040" cy="571500"/>
-          </a:xfrm>
-          <a:prstGeom prst="rect">
-            <a:avLst/>
-          </a:prstGeom>
-          <a:noFill/>
-        </p:spPr>
-        <p:txBody>
-          <a:bodyPr wrap="square" anchor="t">
-            <a:spAutoFit/>
-          </a:bodyPr>
-          <a:lstStyle/>
-          <a:p>
-            <a:pPr algn="l"/>
-            <a:r>
-              <a:rPr sz="1400" b="0">
-                <a:solidFill>
-                  <a:srgbClr val="9E59CD"/>
-                </a:solidFill>
-                <a:latin typeface="DIN Next LT W23"/>
-                <a:ea typeface="DIN Next LT W23"/>
-                <a:cs typeface="DIN Next LT W23"/>
-              </a:rPr>
-              <a:t>–</a:t>
-            </a:r>
-          </a:p>
-        </p:txBody>
-      </p:sp>
-      <p:sp>
-        <p:nvSpPr>
-          <p:cNvPr id="13" name="TextBox 12"/>
-          <p:cNvSpPr txBox="1"/>
-          <p:nvPr/>
-        </p:nvSpPr>
-        <p:spPr>
-          <a:xfrm>
-            <a:off x="914400" y="3319272"/>
-            <a:ext cx="9875519" cy="571500"/>
-          </a:xfrm>
-          <a:prstGeom prst="rect">
-            <a:avLst/>
-          </a:prstGeom>
-          <a:noFill/>
-        </p:spPr>
-        <p:txBody>
-          <a:bodyPr wrap="square" anchor="t">
-            <a:spAutoFit/>
-          </a:bodyPr>
-          <a:lstStyle/>
-          <a:p>
-            <a:pPr algn="l"/>
-            <a:r>
-              <a:rPr sz="1400" b="0">
-                <a:solidFill>
-                  <a:srgbClr val="121018"/>
-                </a:solidFill>
-                <a:latin typeface="DIN Next LT W23"/>
-                <a:ea typeface="DIN Next LT W23"/>
-                <a:cs typeface="DIN Next LT W23"/>
-              </a:rPr>
-              <a:t>Token/base embedding layer maps input ids to dense vectors.</a:t>
-            </a:r>
-          </a:p>
-        </p:txBody>
-      </p:sp>
-      <p:sp>
-        <p:nvSpPr>
-          <p:cNvPr id="14" name="TextBox 13"/>
-          <p:cNvSpPr txBox="1"/>
-          <p:nvPr/>
-        </p:nvSpPr>
-        <p:spPr>
-          <a:xfrm>
-            <a:off x="548640" y="3982211"/>
-            <a:ext cx="320040" cy="571500"/>
-          </a:xfrm>
-          <a:prstGeom prst="rect">
-            <a:avLst/>
-          </a:prstGeom>
-          <a:noFill/>
-        </p:spPr>
-        <p:txBody>
-          <a:bodyPr wrap="square" anchor="t">
-            <a:spAutoFit/>
-          </a:bodyPr>
-          <a:lstStyle/>
-          <a:p>
-            <a:pPr algn="l"/>
-            <a:r>
-              <a:rPr sz="1400" b="0">
-                <a:solidFill>
-                  <a:srgbClr val="9E59CD"/>
-                </a:solidFill>
-                <a:latin typeface="DIN Next LT W23"/>
-                <a:ea typeface="DIN Next LT W23"/>
-                <a:cs typeface="DIN Next LT W23"/>
-              </a:rPr>
-              <a:t>–</a:t>
-            </a:r>
-          </a:p>
-        </p:txBody>
-      </p:sp>
-      <p:sp>
-        <p:nvSpPr>
-          <p:cNvPr id="15" name="TextBox 14"/>
-          <p:cNvSpPr txBox="1"/>
-          <p:nvPr/>
-        </p:nvSpPr>
-        <p:spPr>
-          <a:xfrm>
-            <a:off x="914400" y="3982211"/>
-            <a:ext cx="9875519" cy="571500"/>
-          </a:xfrm>
-          <a:prstGeom prst="rect">
-            <a:avLst/>
-          </a:prstGeom>
-          <a:noFill/>
-        </p:spPr>
-        <p:txBody>
-          <a:bodyPr wrap="square" anchor="t">
-            <a:spAutoFit/>
-          </a:bodyPr>
-          <a:lstStyle/>
-          <a:p>
-            <a:pPr algn="l"/>
-            <a:r>
-              <a:rPr sz="1400" b="0">
-                <a:solidFill>
-                  <a:srgbClr val="121018"/>
-                </a:solidFill>
-                <a:latin typeface="DIN Next LT W23"/>
-                <a:ea typeface="DIN Next LT W23"/>
-                <a:cs typeface="DIN Next LT W23"/>
-              </a:rPr>
-              <a:t>Context encoder layers (often Transformer blocks) enrich each token with sequence context.</a:t>
-            </a:r>
-          </a:p>
-        </p:txBody>
-      </p:sp>
-      <p:sp>
-        <p:nvSpPr>
-          <p:cNvPr id="16" name="TextBox 15"/>
-          <p:cNvSpPr txBox="1"/>
-          <p:nvPr/>
-        </p:nvSpPr>
-        <p:spPr>
-          <a:xfrm>
-            <a:off x="548640" y="4645152"/>
-            <a:ext cx="320040" cy="571500"/>
-          </a:xfrm>
-          <a:prstGeom prst="rect">
-            <a:avLst/>
-          </a:prstGeom>
-          <a:noFill/>
-        </p:spPr>
-        <p:txBody>
-          <a:bodyPr wrap="square" anchor="t">
-            <a:spAutoFit/>
-          </a:bodyPr>
-          <a:lstStyle/>
-          <a:p>
-            <a:pPr algn="l"/>
-            <a:r>
-              <a:rPr sz="1400" b="0">
-                <a:solidFill>
-                  <a:srgbClr val="9E59CD"/>
-                </a:solidFill>
-                <a:latin typeface="DIN Next LT W23"/>
-                <a:ea typeface="DIN Next LT W23"/>
-                <a:cs typeface="DIN Next LT W23"/>
-              </a:rPr>
-              <a:t>–</a:t>
-            </a:r>
-          </a:p>
-        </p:txBody>
-      </p:sp>
-      <p:sp>
-        <p:nvSpPr>
-          <p:cNvPr id="17" name="TextBox 16"/>
-          <p:cNvSpPr txBox="1"/>
-          <p:nvPr/>
-        </p:nvSpPr>
-        <p:spPr>
-          <a:xfrm>
-            <a:off x="914400" y="4645152"/>
-            <a:ext cx="9875519" cy="571500"/>
-          </a:xfrm>
-          <a:prstGeom prst="rect">
-            <a:avLst/>
-          </a:prstGeom>
-          <a:noFill/>
-        </p:spPr>
-        <p:txBody>
-          <a:bodyPr wrap="square" anchor="t">
-            <a:spAutoFit/>
-          </a:bodyPr>
-          <a:lstStyle/>
-          <a:p>
-            <a:pPr algn="l"/>
-            <a:r>
-              <a:rPr sz="1400" b="0">
-                <a:solidFill>
-                  <a:srgbClr val="121018"/>
-                </a:solidFill>
-                <a:latin typeface="DIN Next LT W23"/>
-                <a:ea typeface="DIN Next LT W23"/>
-                <a:cs typeface="DIN Next LT W23"/>
-              </a:rPr>
-              <a:t>Task head uses contextual features for prediction.</a:t>
-            </a:r>
-          </a:p>
-        </p:txBody>
-      </p:sp>
-      <p:sp>
-        <p:nvSpPr>
-          <p:cNvPr id="18" name="Rectangle 17"/>
+          <p:cNvPr id="12" name="Rounded Rectangle 11"/>
+          <p:cNvSpPr/>
+          <p:nvPr/>
+        </p:nvSpPr>
+        <p:spPr>
+          <a:xfrm>
+            <a:off x="6537960" y="2011680"/>
+            <a:ext cx="4983480" cy="3794760"/>
+          </a:xfrm>
+          <a:prstGeom prst="roundRect">
+            <a:avLst>
+              <a:gd name="adj" fmla="val 10000"/>
+            </a:avLst>
+          </a:prstGeom>
+          <a:solidFill>
+            <a:srgbClr val="EEE8FA"/>
+          </a:solidFill>
+          <a:ln>
+            <a:noFill/>
+          </a:ln>
+          <a:effectLst/>
+        </p:spPr>
+        <p:style>
+          <a:lnRef idx="1">
+            <a:schemeClr val="accent1"/>
+          </a:lnRef>
+          <a:fillRef idx="3">
+            <a:schemeClr val="accent1"/>
+          </a:fillRef>
+          <a:effectRef idx="2">
+            <a:schemeClr val="accent1"/>
+          </a:effectRef>
+          <a:fontRef idx="minor">
+            <a:schemeClr val="lt1"/>
+          </a:fontRef>
+        </p:style>
+        <p:txBody>
+          <a:bodyPr rtlCol="0" anchor="ctr"/>
+          <a:lstStyle/>
+          <a:p>
+            <a:pPr algn="ctr"/>
+          </a:p>
+        </p:txBody>
+      </p:sp>
+      <p:pic>
+        <p:nvPicPr>
+          <p:cNvPr id="13" name="Picture 12" descr="embedding-space.png"/>
+          <p:cNvPicPr>
+            <a:picLocks noChangeAspect="1"/>
+          </p:cNvPicPr>
+          <p:nvPr/>
+        </p:nvPicPr>
+        <p:blipFill>
+          <a:blip r:embed="rId3"/>
+          <a:stretch>
+            <a:fillRect/>
+          </a:stretch>
+        </p:blipFill>
+        <p:spPr>
+          <a:xfrm>
+            <a:off x="6720840" y="2194560"/>
+            <a:ext cx="4617720" cy="2775544"/>
+          </a:xfrm>
+          <a:prstGeom prst="rect">
+            <a:avLst/>
+          </a:prstGeom>
+        </p:spPr>
+      </p:pic>
+      <p:sp>
+        <p:nvSpPr>
+          <p:cNvPr id="14" name="Rectangle 13"/>
           <p:cNvSpPr/>
           <p:nvPr/>
         </p:nvSpPr>
@@ -23112,7 +22959,7 @@
       </p:sp>
       <p:sp>
         <p:nvSpPr>
-          <p:cNvPr id="19" name="TextBox 18"/>
+          <p:cNvPr id="15" name="TextBox 14"/>
           <p:cNvSpPr txBox="1"/>
           <p:nvPr/>
         </p:nvSpPr>
@@ -23149,7 +22996,7 @@
       </p:sp>
       <p:sp>
         <p:nvSpPr>
-          <p:cNvPr id="20" name="TextBox 19"/>
+          <p:cNvPr id="16" name="TextBox 15"/>
           <p:cNvSpPr txBox="1"/>
           <p:nvPr/>
         </p:nvSpPr>
@@ -23179,7 +23026,7 @@
                 <a:ea typeface="DIN Next LT W23"/>
                 <a:cs typeface="DIN Next LT W23"/>
               </a:rPr>
-              <a:t>36  /  54</a:t>
+              <a:t>36  /  53</a:t>
             </a:r>
           </a:p>
         </p:txBody>
@@ -23391,7 +23238,7 @@
                 <a:ea typeface="DIN Next LT W23"/>
                 <a:cs typeface="DIN Next LT W23"/>
               </a:rPr>
-              <a:t>How Contextualized Embeddings Work</a:t>
+              <a:t>RNN Mechanism and Weight Sharing</a:t>
             </a:r>
           </a:p>
         </p:txBody>
@@ -23428,20 +23275,90 @@
                 <a:ea typeface="DIN Next LT W23"/>
                 <a:cs typeface="DIN Next LT W23"/>
               </a:rPr>
-              <a:t>Layer Semantics</a:t>
-            </a:r>
-          </a:p>
-        </p:txBody>
-      </p:sp>
-      <p:sp>
-        <p:nvSpPr>
-          <p:cNvPr id="8" name="TextBox 7"/>
-          <p:cNvSpPr txBox="1"/>
+              <a:t>Same cell, every time step</a:t>
+            </a:r>
+          </a:p>
+        </p:txBody>
+      </p:sp>
+      <p:sp>
+        <p:nvSpPr>
+          <p:cNvPr id="8" name="Rounded Rectangle 7"/>
+          <p:cNvSpPr/>
           <p:nvPr/>
         </p:nvSpPr>
         <p:spPr>
           <a:xfrm>
             <a:off x="548640" y="1993392"/>
+            <a:ext cx="10972800" cy="1417320"/>
+          </a:xfrm>
+          <a:prstGeom prst="roundRect">
+            <a:avLst>
+              <a:gd name="adj" fmla="val 10000"/>
+            </a:avLst>
+          </a:prstGeom>
+          <a:solidFill>
+            <a:srgbClr val="EEE8FA"/>
+          </a:solidFill>
+          <a:ln>
+            <a:noFill/>
+          </a:ln>
+          <a:effectLst/>
+        </p:spPr>
+        <p:style>
+          <a:lnRef idx="1">
+            <a:schemeClr val="accent1"/>
+          </a:lnRef>
+          <a:fillRef idx="3">
+            <a:schemeClr val="accent1"/>
+          </a:fillRef>
+          <a:effectRef idx="2">
+            <a:schemeClr val="accent1"/>
+          </a:effectRef>
+          <a:fontRef idx="minor">
+            <a:schemeClr val="lt1"/>
+          </a:fontRef>
+        </p:style>
+        <p:txBody>
+          <a:bodyPr rtlCol="0" anchor="ctr"/>
+          <a:lstStyle/>
+          <a:p>
+            <a:pPr algn="ctr"/>
+          </a:p>
+        </p:txBody>
+      </p:sp>
+      <p:pic>
+        <p:nvPicPr>
+          <p:cNvPr id="9" name="Picture 8" descr="f-afb3f0f1ce38d5ce.png"/>
+          <p:cNvPicPr>
+            <a:picLocks noChangeAspect="1"/>
+          </p:cNvPicPr>
+          <p:nvPr/>
+        </p:nvPicPr>
+        <p:blipFill>
+          <a:blip r:embed="rId3"/>
+          <a:stretch>
+            <a:fillRect/>
+          </a:stretch>
+        </p:blipFill>
+        <p:spPr>
+          <a:xfrm>
+            <a:off x="2750947" y="2103120"/>
+            <a:ext cx="6568185" cy="868680"/>
+          </a:xfrm>
+          <a:prstGeom prst="rect">
+            <a:avLst/>
+          </a:prstGeom>
+        </p:spPr>
+      </p:pic>
+      <p:sp>
+        <p:nvSpPr>
+          <p:cNvPr id="10" name="TextBox 9"/>
+          <p:cNvSpPr txBox="1"/>
+          <p:nvPr/>
+        </p:nvSpPr>
+        <p:spPr>
+          <a:xfrm>
+            <a:off x="548640" y="3520440"/>
             <a:ext cx="320040" cy="384048"/>
           </a:xfrm>
           <a:prstGeom prst="rect">
@@ -23457,7 +23374,7 @@
           <a:p>
             <a:pPr algn="l"/>
             <a:r>
-              <a:rPr sz="1500" b="0">
+              <a:rPr sz="1300" b="0">
                 <a:solidFill>
                   <a:srgbClr val="9E59CD"/>
                 </a:solidFill>
@@ -23472,13 +23389,13 @@
       </p:sp>
       <p:sp>
         <p:nvSpPr>
-          <p:cNvPr id="9" name="TextBox 8"/>
-          <p:cNvSpPr txBox="1"/>
-          <p:nvPr/>
-        </p:nvSpPr>
-        <p:spPr>
-          <a:xfrm>
-            <a:off x="914400" y="1993392"/>
+          <p:cNvPr id="11" name="TextBox 10"/>
+          <p:cNvSpPr txBox="1"/>
+          <p:nvPr/>
+        </p:nvSpPr>
+        <p:spPr>
+          <a:xfrm>
+            <a:off x="914400" y="3520440"/>
             <a:ext cx="9875519" cy="384048"/>
           </a:xfrm>
           <a:prstGeom prst="rect">
@@ -23494,7 +23411,7 @@
           <a:p>
             <a:pPr algn="l"/>
             <a:r>
-              <a:rPr sz="1500" b="0">
+              <a:rPr sz="1300" b="0">
                 <a:solidFill>
                   <a:srgbClr val="121018"/>
                 </a:solidFill>
@@ -23502,20 +23419,20 @@
                 <a:ea typeface="DIN Next LT W23"/>
                 <a:cs typeface="DIN Next LT W23"/>
               </a:rPr>
-              <a:t>Lower layers capture local syntax/patterns.</a:t>
-            </a:r>
-          </a:p>
-        </p:txBody>
-      </p:sp>
-      <p:sp>
-        <p:nvSpPr>
-          <p:cNvPr id="10" name="TextBox 9"/>
-          <p:cNvSpPr txBox="1"/>
-          <p:nvPr/>
-        </p:nvSpPr>
-        <p:spPr>
-          <a:xfrm>
-            <a:off x="548640" y="2468880"/>
+              <a:t>At time t, the RNN consumes current input and previous hidden state.</a:t>
+            </a:r>
+          </a:p>
+        </p:txBody>
+      </p:sp>
+      <p:sp>
+        <p:nvSpPr>
+          <p:cNvPr id="12" name="TextBox 11"/>
+          <p:cNvSpPr txBox="1"/>
+          <p:nvPr/>
+        </p:nvSpPr>
+        <p:spPr>
+          <a:xfrm>
+            <a:off x="548640" y="3995928"/>
             <a:ext cx="320040" cy="384048"/>
           </a:xfrm>
           <a:prstGeom prst="rect">
@@ -23531,7 +23448,7 @@
           <a:p>
             <a:pPr algn="l"/>
             <a:r>
-              <a:rPr sz="1500" b="0">
+              <a:rPr sz="1300" b="0">
                 <a:solidFill>
                   <a:srgbClr val="9E59CD"/>
                 </a:solidFill>
@@ -23546,13 +23463,13 @@
       </p:sp>
       <p:sp>
         <p:nvSpPr>
-          <p:cNvPr id="11" name="TextBox 10"/>
-          <p:cNvSpPr txBox="1"/>
-          <p:nvPr/>
-        </p:nvSpPr>
-        <p:spPr>
-          <a:xfrm>
-            <a:off x="914400" y="2468880"/>
+          <p:cNvPr id="13" name="TextBox 12"/>
+          <p:cNvSpPr txBox="1"/>
+          <p:nvPr/>
+        </p:nvSpPr>
+        <p:spPr>
+          <a:xfrm>
+            <a:off x="914400" y="3995928"/>
             <a:ext cx="9875519" cy="384048"/>
           </a:xfrm>
           <a:prstGeom prst="rect">
@@ -23568,7 +23485,7 @@
           <a:p>
             <a:pPr algn="l"/>
             <a:r>
-              <a:rPr sz="1500" b="0">
+              <a:rPr sz="1300" b="0">
                 <a:solidFill>
                   <a:srgbClr val="121018"/>
                 </a:solidFill>
@@ -23576,20 +23493,20 @@
                 <a:ea typeface="DIN Next LT W23"/>
                 <a:cs typeface="DIN Next LT W23"/>
               </a:rPr>
-              <a:t>Middle layers improve sense disambiguation.</a:t>
-            </a:r>
-          </a:p>
-        </p:txBody>
-      </p:sp>
-      <p:sp>
-        <p:nvSpPr>
-          <p:cNvPr id="12" name="TextBox 11"/>
-          <p:cNvSpPr txBox="1"/>
-          <p:nvPr/>
-        </p:nvSpPr>
-        <p:spPr>
-          <a:xfrm>
-            <a:off x="548640" y="2944368"/>
+              <a:t>The same cell and weights are reused at every time step.</a:t>
+            </a:r>
+          </a:p>
+        </p:txBody>
+      </p:sp>
+      <p:sp>
+        <p:nvSpPr>
+          <p:cNvPr id="14" name="TextBox 13"/>
+          <p:cNvSpPr txBox="1"/>
+          <p:nvPr/>
+        </p:nvSpPr>
+        <p:spPr>
+          <a:xfrm>
+            <a:off x="548640" y="4471416"/>
             <a:ext cx="320040" cy="384048"/>
           </a:xfrm>
           <a:prstGeom prst="rect">
@@ -23605,7 +23522,7 @@
           <a:p>
             <a:pPr algn="l"/>
             <a:r>
-              <a:rPr sz="1500" b="0">
+              <a:rPr sz="1300" b="0">
                 <a:solidFill>
                   <a:srgbClr val="9E59CD"/>
                 </a:solidFill>
@@ -23620,13 +23537,13 @@
       </p:sp>
       <p:sp>
         <p:nvSpPr>
-          <p:cNvPr id="13" name="TextBox 12"/>
-          <p:cNvSpPr txBox="1"/>
-          <p:nvPr/>
-        </p:nvSpPr>
-        <p:spPr>
-          <a:xfrm>
-            <a:off x="914400" y="2944368"/>
+          <p:cNvPr id="15" name="TextBox 14"/>
+          <p:cNvSpPr txBox="1"/>
+          <p:nvPr/>
+        </p:nvSpPr>
+        <p:spPr>
+          <a:xfrm>
+            <a:off x="914400" y="4471416"/>
             <a:ext cx="9875519" cy="384048"/>
           </a:xfrm>
           <a:prstGeom prst="rect">
@@ -23642,7 +23559,7 @@
           <a:p>
             <a:pPr algn="l"/>
             <a:r>
-              <a:rPr sz="1500" b="0">
+              <a:rPr sz="1300" b="0">
                 <a:solidFill>
                   <a:srgbClr val="121018"/>
                 </a:solidFill>
@@ -23650,14 +23567,14 @@
                 <a:ea typeface="DIN Next LT W23"/>
                 <a:cs typeface="DIN Next LT W23"/>
               </a:rPr>
-              <a:t>Upper layers capture richer semantics and task-specific signals.</a:t>
-            </a:r>
-          </a:p>
-        </p:txBody>
-      </p:sp>
-      <p:sp>
-        <p:nvSpPr>
-          <p:cNvPr id="14" name="Rectangle 13"/>
+              <a:t>This recurrence captures sequential information in variable-length text.</a:t>
+            </a:r>
+          </a:p>
+        </p:txBody>
+      </p:sp>
+      <p:sp>
+        <p:nvSpPr>
+          <p:cNvPr id="16" name="Rectangle 15"/>
           <p:cNvSpPr/>
           <p:nvPr/>
         </p:nvSpPr>
@@ -23701,7 +23618,7 @@
       </p:sp>
       <p:sp>
         <p:nvSpPr>
-          <p:cNvPr id="15" name="TextBox 14"/>
+          <p:cNvPr id="17" name="TextBox 16"/>
           <p:cNvSpPr txBox="1"/>
           <p:nvPr/>
         </p:nvSpPr>
@@ -23738,7 +23655,7 @@
       </p:sp>
       <p:sp>
         <p:nvSpPr>
-          <p:cNvPr id="16" name="TextBox 15"/>
+          <p:cNvPr id="18" name="TextBox 17"/>
           <p:cNvSpPr txBox="1"/>
           <p:nvPr/>
         </p:nvSpPr>
@@ -23768,7 +23685,7 @@
                 <a:ea typeface="DIN Next LT W23"/>
                 <a:cs typeface="DIN Next LT W23"/>
               </a:rPr>
-              <a:t>37  /  54</a:t>
+              <a:t>37  /  53</a:t>
             </a:r>
           </a:p>
         </p:txBody>
@@ -24031,7 +23948,7 @@
         <p:spPr>
           <a:xfrm>
             <a:off x="548640" y="1993392"/>
-            <a:ext cx="10972800" cy="1417320"/>
+            <a:ext cx="10972800" cy="3977639"/>
           </a:xfrm>
           <a:prstGeom prst="roundRect">
             <a:avLst>
@@ -24070,7 +23987,7 @@
       </p:sp>
       <p:pic>
         <p:nvPicPr>
-          <p:cNvPr id="9" name="Picture 8" descr="f-afb3f0f1ce38d5ce.png"/>
+          <p:cNvPr id="9" name="Picture 8" descr="rnn-unfold.png"/>
           <p:cNvPicPr>
             <a:picLocks noChangeAspect="1"/>
           </p:cNvPicPr>
@@ -24084,8 +24001,8 @@
         </p:blipFill>
         <p:spPr>
           <a:xfrm>
-            <a:off x="2750947" y="2103120"/>
-            <a:ext cx="6568185" cy="868680"/>
+            <a:off x="898663" y="2130552"/>
+            <a:ext cx="10272753" cy="3703320"/>
           </a:xfrm>
           <a:prstGeom prst="rect">
             <a:avLst/>
@@ -24094,229 +24011,7 @@
       </p:pic>
       <p:sp>
         <p:nvSpPr>
-          <p:cNvPr id="10" name="TextBox 9"/>
-          <p:cNvSpPr txBox="1"/>
-          <p:nvPr/>
-        </p:nvSpPr>
-        <p:spPr>
-          <a:xfrm>
-            <a:off x="548640" y="3520440"/>
-            <a:ext cx="320040" cy="384048"/>
-          </a:xfrm>
-          <a:prstGeom prst="rect">
-            <a:avLst/>
-          </a:prstGeom>
-          <a:noFill/>
-        </p:spPr>
-        <p:txBody>
-          <a:bodyPr wrap="square" anchor="t">
-            <a:spAutoFit/>
-          </a:bodyPr>
-          <a:lstStyle/>
-          <a:p>
-            <a:pPr algn="l"/>
-            <a:r>
-              <a:rPr sz="1300" b="0">
-                <a:solidFill>
-                  <a:srgbClr val="9E59CD"/>
-                </a:solidFill>
-                <a:latin typeface="DIN Next LT W23"/>
-                <a:ea typeface="DIN Next LT W23"/>
-                <a:cs typeface="DIN Next LT W23"/>
-              </a:rPr>
-              <a:t>–</a:t>
-            </a:r>
-          </a:p>
-        </p:txBody>
-      </p:sp>
-      <p:sp>
-        <p:nvSpPr>
-          <p:cNvPr id="11" name="TextBox 10"/>
-          <p:cNvSpPr txBox="1"/>
-          <p:nvPr/>
-        </p:nvSpPr>
-        <p:spPr>
-          <a:xfrm>
-            <a:off x="914400" y="3520440"/>
-            <a:ext cx="9875519" cy="384048"/>
-          </a:xfrm>
-          <a:prstGeom prst="rect">
-            <a:avLst/>
-          </a:prstGeom>
-          <a:noFill/>
-        </p:spPr>
-        <p:txBody>
-          <a:bodyPr wrap="square" anchor="t">
-            <a:spAutoFit/>
-          </a:bodyPr>
-          <a:lstStyle/>
-          <a:p>
-            <a:pPr algn="l"/>
-            <a:r>
-              <a:rPr sz="1300" b="0">
-                <a:solidFill>
-                  <a:srgbClr val="121018"/>
-                </a:solidFill>
-                <a:latin typeface="DIN Next LT W23"/>
-                <a:ea typeface="DIN Next LT W23"/>
-                <a:cs typeface="DIN Next LT W23"/>
-              </a:rPr>
-              <a:t>At time t, the RNN consumes current input and previous hidden state.</a:t>
-            </a:r>
-          </a:p>
-        </p:txBody>
-      </p:sp>
-      <p:sp>
-        <p:nvSpPr>
-          <p:cNvPr id="12" name="TextBox 11"/>
-          <p:cNvSpPr txBox="1"/>
-          <p:nvPr/>
-        </p:nvSpPr>
-        <p:spPr>
-          <a:xfrm>
-            <a:off x="548640" y="3995928"/>
-            <a:ext cx="320040" cy="384048"/>
-          </a:xfrm>
-          <a:prstGeom prst="rect">
-            <a:avLst/>
-          </a:prstGeom>
-          <a:noFill/>
-        </p:spPr>
-        <p:txBody>
-          <a:bodyPr wrap="square" anchor="t">
-            <a:spAutoFit/>
-          </a:bodyPr>
-          <a:lstStyle/>
-          <a:p>
-            <a:pPr algn="l"/>
-            <a:r>
-              <a:rPr sz="1300" b="0">
-                <a:solidFill>
-                  <a:srgbClr val="9E59CD"/>
-                </a:solidFill>
-                <a:latin typeface="DIN Next LT W23"/>
-                <a:ea typeface="DIN Next LT W23"/>
-                <a:cs typeface="DIN Next LT W23"/>
-              </a:rPr>
-              <a:t>–</a:t>
-            </a:r>
-          </a:p>
-        </p:txBody>
-      </p:sp>
-      <p:sp>
-        <p:nvSpPr>
-          <p:cNvPr id="13" name="TextBox 12"/>
-          <p:cNvSpPr txBox="1"/>
-          <p:nvPr/>
-        </p:nvSpPr>
-        <p:spPr>
-          <a:xfrm>
-            <a:off x="914400" y="3995928"/>
-            <a:ext cx="9875519" cy="384048"/>
-          </a:xfrm>
-          <a:prstGeom prst="rect">
-            <a:avLst/>
-          </a:prstGeom>
-          <a:noFill/>
-        </p:spPr>
-        <p:txBody>
-          <a:bodyPr wrap="square" anchor="t">
-            <a:spAutoFit/>
-          </a:bodyPr>
-          <a:lstStyle/>
-          <a:p>
-            <a:pPr algn="l"/>
-            <a:r>
-              <a:rPr sz="1300" b="0">
-                <a:solidFill>
-                  <a:srgbClr val="121018"/>
-                </a:solidFill>
-                <a:latin typeface="DIN Next LT W23"/>
-                <a:ea typeface="DIN Next LT W23"/>
-                <a:cs typeface="DIN Next LT W23"/>
-              </a:rPr>
-              <a:t>The same cell and weights are reused at every time step.</a:t>
-            </a:r>
-          </a:p>
-        </p:txBody>
-      </p:sp>
-      <p:sp>
-        <p:nvSpPr>
-          <p:cNvPr id="14" name="TextBox 13"/>
-          <p:cNvSpPr txBox="1"/>
-          <p:nvPr/>
-        </p:nvSpPr>
-        <p:spPr>
-          <a:xfrm>
-            <a:off x="548640" y="4471416"/>
-            <a:ext cx="320040" cy="384048"/>
-          </a:xfrm>
-          <a:prstGeom prst="rect">
-            <a:avLst/>
-          </a:prstGeom>
-          <a:noFill/>
-        </p:spPr>
-        <p:txBody>
-          <a:bodyPr wrap="square" anchor="t">
-            <a:spAutoFit/>
-          </a:bodyPr>
-          <a:lstStyle/>
-          <a:p>
-            <a:pPr algn="l"/>
-            <a:r>
-              <a:rPr sz="1300" b="0">
-                <a:solidFill>
-                  <a:srgbClr val="9E59CD"/>
-                </a:solidFill>
-                <a:latin typeface="DIN Next LT W23"/>
-                <a:ea typeface="DIN Next LT W23"/>
-                <a:cs typeface="DIN Next LT W23"/>
-              </a:rPr>
-              <a:t>–</a:t>
-            </a:r>
-          </a:p>
-        </p:txBody>
-      </p:sp>
-      <p:sp>
-        <p:nvSpPr>
-          <p:cNvPr id="15" name="TextBox 14"/>
-          <p:cNvSpPr txBox="1"/>
-          <p:nvPr/>
-        </p:nvSpPr>
-        <p:spPr>
-          <a:xfrm>
-            <a:off x="914400" y="4471416"/>
-            <a:ext cx="9875519" cy="384048"/>
-          </a:xfrm>
-          <a:prstGeom prst="rect">
-            <a:avLst/>
-          </a:prstGeom>
-          <a:noFill/>
-        </p:spPr>
-        <p:txBody>
-          <a:bodyPr wrap="square" anchor="t">
-            <a:spAutoFit/>
-          </a:bodyPr>
-          <a:lstStyle/>
-          <a:p>
-            <a:pPr algn="l"/>
-            <a:r>
-              <a:rPr sz="1300" b="0">
-                <a:solidFill>
-                  <a:srgbClr val="121018"/>
-                </a:solidFill>
-                <a:latin typeface="DIN Next LT W23"/>
-                <a:ea typeface="DIN Next LT W23"/>
-                <a:cs typeface="DIN Next LT W23"/>
-              </a:rPr>
-              <a:t>This recurrence captures sequential information in variable-length text.</a:t>
-            </a:r>
-          </a:p>
-        </p:txBody>
-      </p:sp>
-      <p:sp>
-        <p:nvSpPr>
-          <p:cNvPr id="16" name="Rectangle 15"/>
+          <p:cNvPr id="10" name="Rectangle 9"/>
           <p:cNvSpPr/>
           <p:nvPr/>
         </p:nvSpPr>
@@ -24360,7 +24055,7 @@
       </p:sp>
       <p:sp>
         <p:nvSpPr>
-          <p:cNvPr id="17" name="TextBox 16"/>
+          <p:cNvPr id="11" name="TextBox 10"/>
           <p:cNvSpPr txBox="1"/>
           <p:nvPr/>
         </p:nvSpPr>
@@ -24397,7 +24092,7 @@
       </p:sp>
       <p:sp>
         <p:nvSpPr>
-          <p:cNvPr id="18" name="TextBox 17"/>
+          <p:cNvPr id="12" name="TextBox 11"/>
           <p:cNvSpPr txBox="1"/>
           <p:nvPr/>
         </p:nvSpPr>
@@ -24427,7 +24122,7 @@
                 <a:ea typeface="DIN Next LT W23"/>
                 <a:cs typeface="DIN Next LT W23"/>
               </a:rPr>
-              <a:t>38  /  54</a:t>
+              <a:t>38  /  53</a:t>
             </a:r>
           </a:p>
         </p:txBody>
@@ -24639,7 +24334,7 @@
                 <a:ea typeface="DIN Next LT W23"/>
                 <a:cs typeface="DIN Next LT W23"/>
               </a:rPr>
-              <a:t>RNN Mechanism and Weight Sharing</a:t>
+              <a:t>Common RNN Input/Output Patterns</a:t>
             </a:r>
           </a:p>
         </p:txBody>
@@ -24676,7 +24371,7 @@
                 <a:ea typeface="DIN Next LT W23"/>
                 <a:cs typeface="DIN Next LT W23"/>
               </a:rPr>
-              <a:t>Same cell, every time step</a:t>
+              <a:t>Where recurrence earns its keep</a:t>
             </a:r>
           </a:p>
         </p:txBody>
@@ -24729,7 +24424,7 @@
       </p:sp>
       <p:pic>
         <p:nvPicPr>
-          <p:cNvPr id="9" name="Picture 8" descr="rnn-unfold.png"/>
+          <p:cNvPr id="9" name="Picture 8" descr="rnn-patterns.png"/>
           <p:cNvPicPr>
             <a:picLocks noChangeAspect="1"/>
           </p:cNvPicPr>
@@ -24753,7 +24448,44 @@
       </p:pic>
       <p:sp>
         <p:nvSpPr>
-          <p:cNvPr id="10" name="Rectangle 9"/>
+          <p:cNvPr id="10" name="TextBox 9"/>
+          <p:cNvSpPr txBox="1"/>
+          <p:nvPr/>
+        </p:nvSpPr>
+        <p:spPr>
+          <a:xfrm>
+            <a:off x="548640" y="6309360"/>
+            <a:ext cx="10972800" cy="228600"/>
+          </a:xfrm>
+          <a:prstGeom prst="rect">
+            <a:avLst/>
+          </a:prstGeom>
+          <a:noFill/>
+        </p:spPr>
+        <p:txBody>
+          <a:bodyPr wrap="square" anchor="t">
+            <a:spAutoFit/>
+          </a:bodyPr>
+          <a:lstStyle/>
+          <a:p>
+            <a:pPr algn="l"/>
+            <a:r>
+              <a:rPr sz="1100" b="0">
+                <a:solidFill>
+                  <a:srgbClr val="5A5470"/>
+                </a:solidFill>
+                <a:latin typeface="DIN Next LT W23"/>
+                <a:ea typeface="DIN Next LT W23"/>
+                <a:cs typeface="DIN Next LT W23"/>
+              </a:rPr>
+              <a:t>Sequence-aware patterns are where recurrent models provide clear value.</a:t>
+            </a:r>
+          </a:p>
+        </p:txBody>
+      </p:sp>
+      <p:sp>
+        <p:nvSpPr>
+          <p:cNvPr id="11" name="Rectangle 10"/>
           <p:cNvSpPr/>
           <p:nvPr/>
         </p:nvSpPr>
@@ -24797,7 +24529,7 @@
       </p:sp>
       <p:sp>
         <p:nvSpPr>
-          <p:cNvPr id="11" name="TextBox 10"/>
+          <p:cNvPr id="12" name="TextBox 11"/>
           <p:cNvSpPr txBox="1"/>
           <p:nvPr/>
         </p:nvSpPr>
@@ -24834,7 +24566,7 @@
       </p:sp>
       <p:sp>
         <p:nvSpPr>
-          <p:cNvPr id="12" name="TextBox 11"/>
+          <p:cNvPr id="13" name="TextBox 12"/>
           <p:cNvSpPr txBox="1"/>
           <p:nvPr/>
         </p:nvSpPr>
@@ -24864,7 +24596,7 @@
                 <a:ea typeface="DIN Next LT W23"/>
                 <a:cs typeface="DIN Next LT W23"/>
               </a:rPr>
-              <a:t>39  /  54</a:t>
+              <a:t>39  /  53</a:t>
             </a:r>
           </a:p>
         </p:txBody>
@@ -25749,7 +25481,7 @@
                 <a:ea typeface="DIN Next LT W23"/>
                 <a:cs typeface="DIN Next LT W23"/>
               </a:rPr>
-              <a:t>04  /  54</a:t>
+              <a:t>04  /  53</a:t>
             </a:r>
           </a:p>
         </p:txBody>
@@ -25763,480 +25495,6 @@
 </file>
 
 <file path=ppt/slides/slide40.xml><?xml version="1.0" encoding="utf-8"?>
-<p:sld xmlns:a="http://schemas.openxmlformats.org/drawingml/2006/main" xmlns:p="http://schemas.openxmlformats.org/presentationml/2006/main" xmlns:r="http://schemas.openxmlformats.org/officeDocument/2006/relationships">
-  <p:cSld>
-    <p:bg>
-      <p:bgPr>
-        <a:solidFill>
-          <a:srgbClr val="FAF8FF"/>
-        </a:solidFill>
-        <a:effectLst/>
-      </p:bgPr>
-    </p:bg>
-    <p:spTree>
-      <p:nvGrpSpPr>
-        <p:cNvPr id="1" name=""/>
-        <p:cNvGrpSpPr/>
-        <p:nvPr/>
-      </p:nvGrpSpPr>
-      <p:grpSpPr/>
-      <p:sp>
-        <p:nvSpPr>
-          <p:cNvPr id="2" name="Rectangle 1"/>
-          <p:cNvSpPr/>
-          <p:nvPr/>
-        </p:nvSpPr>
-        <p:spPr>
-          <a:xfrm>
-            <a:off x="12136831" y="0"/>
-            <a:ext cx="54864" cy="6858000"/>
-          </a:xfrm>
-          <a:prstGeom prst="rect">
-            <a:avLst/>
-          </a:prstGeom>
-          <a:solidFill>
-            <a:srgbClr val="5234B7"/>
-          </a:solidFill>
-          <a:ln>
-            <a:noFill/>
-          </a:ln>
-          <a:effectLst/>
-        </p:spPr>
-        <p:style>
-          <a:lnRef idx="1">
-            <a:schemeClr val="accent1"/>
-          </a:lnRef>
-          <a:fillRef idx="3">
-            <a:schemeClr val="accent1"/>
-          </a:fillRef>
-          <a:effectRef idx="2">
-            <a:schemeClr val="accent1"/>
-          </a:effectRef>
-          <a:fontRef idx="minor">
-            <a:schemeClr val="lt1"/>
-          </a:fontRef>
-        </p:style>
-        <p:txBody>
-          <a:bodyPr rtlCol="0" anchor="ctr"/>
-          <a:lstStyle/>
-          <a:p>
-            <a:pPr algn="ctr"/>
-          </a:p>
-        </p:txBody>
-      </p:sp>
-      <p:pic>
-        <p:nvPicPr>
-          <p:cNvPr id="3" name="Picture 2" descr="etra-wordmark.png"/>
-          <p:cNvPicPr>
-            <a:picLocks noChangeAspect="1"/>
-          </p:cNvPicPr>
-          <p:nvPr/>
-        </p:nvPicPr>
-        <p:blipFill>
-          <a:blip r:embed="rId2"/>
-          <a:stretch>
-            <a:fillRect/>
-          </a:stretch>
-        </p:blipFill>
-        <p:spPr>
-          <a:xfrm>
-            <a:off x="10561320" y="411480"/>
-            <a:ext cx="1206201" cy="320040"/>
-          </a:xfrm>
-          <a:prstGeom prst="rect">
-            <a:avLst/>
-          </a:prstGeom>
-        </p:spPr>
-      </p:pic>
-      <p:sp>
-        <p:nvSpPr>
-          <p:cNvPr id="4" name="TextBox 3"/>
-          <p:cNvSpPr txBox="1"/>
-          <p:nvPr/>
-        </p:nvSpPr>
-        <p:spPr>
-          <a:xfrm>
-            <a:off x="548640" y="438912"/>
-            <a:ext cx="7772400" cy="274320"/>
-          </a:xfrm>
-          <a:prstGeom prst="rect">
-            <a:avLst/>
-          </a:prstGeom>
-          <a:noFill/>
-        </p:spPr>
-        <p:txBody>
-          <a:bodyPr wrap="square" anchor="t">
-            <a:spAutoFit/>
-          </a:bodyPr>
-          <a:lstStyle/>
-          <a:p>
-            <a:pPr algn="l"/>
-            <a:r>
-              <a:rPr sz="1200" b="0">
-                <a:solidFill>
-                  <a:srgbClr val="5A5470"/>
-                </a:solidFill>
-                <a:latin typeface="DIN Next LT W23"/>
-                <a:ea typeface="DIN Next LT W23"/>
-                <a:cs typeface="DIN Next LT W23"/>
-              </a:rPr>
-              <a:t>S08  ·  NLP</a:t>
-            </a:r>
-          </a:p>
-        </p:txBody>
-      </p:sp>
-      <p:sp>
-        <p:nvSpPr>
-          <p:cNvPr id="5" name="Rectangle 4"/>
-          <p:cNvSpPr/>
-          <p:nvPr/>
-        </p:nvSpPr>
-        <p:spPr>
-          <a:xfrm>
-            <a:off x="548640" y="822960"/>
-            <a:ext cx="11064240" cy="10972"/>
-          </a:xfrm>
-          <a:prstGeom prst="rect">
-            <a:avLst/>
-          </a:prstGeom>
-          <a:solidFill>
-            <a:srgbClr val="E4DCF4"/>
-          </a:solidFill>
-          <a:ln>
-            <a:noFill/>
-          </a:ln>
-          <a:effectLst/>
-        </p:spPr>
-        <p:style>
-          <a:lnRef idx="1">
-            <a:schemeClr val="accent1"/>
-          </a:lnRef>
-          <a:fillRef idx="3">
-            <a:schemeClr val="accent1"/>
-          </a:fillRef>
-          <a:effectRef idx="2">
-            <a:schemeClr val="accent1"/>
-          </a:effectRef>
-          <a:fontRef idx="minor">
-            <a:schemeClr val="lt1"/>
-          </a:fontRef>
-        </p:style>
-        <p:txBody>
-          <a:bodyPr rtlCol="0" anchor="ctr"/>
-          <a:lstStyle/>
-          <a:p>
-            <a:pPr algn="ctr"/>
-          </a:p>
-        </p:txBody>
-      </p:sp>
-      <p:sp>
-        <p:nvSpPr>
-          <p:cNvPr id="6" name="TextBox 5"/>
-          <p:cNvSpPr txBox="1"/>
-          <p:nvPr/>
-        </p:nvSpPr>
-        <p:spPr>
-          <a:xfrm>
-            <a:off x="548640" y="1024128"/>
-            <a:ext cx="10241280" cy="566928"/>
-          </a:xfrm>
-          <a:prstGeom prst="rect">
-            <a:avLst/>
-          </a:prstGeom>
-          <a:noFill/>
-        </p:spPr>
-        <p:txBody>
-          <a:bodyPr wrap="square" anchor="t">
-            <a:spAutoFit/>
-          </a:bodyPr>
-          <a:lstStyle/>
-          <a:p>
-            <a:pPr algn="l"/>
-            <a:r>
-              <a:rPr sz="3200" b="1">
-                <a:solidFill>
-                  <a:srgbClr val="5234B7"/>
-                </a:solidFill>
-                <a:latin typeface="DIN Next LT W23"/>
-                <a:ea typeface="DIN Next LT W23"/>
-                <a:cs typeface="DIN Next LT W23"/>
-              </a:rPr>
-              <a:t>Common RNN Input/Output Patterns</a:t>
-            </a:r>
-          </a:p>
-        </p:txBody>
-      </p:sp>
-      <p:sp>
-        <p:nvSpPr>
-          <p:cNvPr id="7" name="TextBox 6"/>
-          <p:cNvSpPr txBox="1"/>
-          <p:nvPr/>
-        </p:nvSpPr>
-        <p:spPr>
-          <a:xfrm>
-            <a:off x="548640" y="1591056"/>
-            <a:ext cx="10241280" cy="310896"/>
-          </a:xfrm>
-          <a:prstGeom prst="rect">
-            <a:avLst/>
-          </a:prstGeom>
-          <a:noFill/>
-        </p:spPr>
-        <p:txBody>
-          <a:bodyPr wrap="square" anchor="t">
-            <a:spAutoFit/>
-          </a:bodyPr>
-          <a:lstStyle/>
-          <a:p>
-            <a:pPr algn="l"/>
-            <a:r>
-              <a:rPr sz="1500" b="0">
-                <a:solidFill>
-                  <a:srgbClr val="5A5470"/>
-                </a:solidFill>
-                <a:latin typeface="DIN Next LT W23"/>
-                <a:ea typeface="DIN Next LT W23"/>
-                <a:cs typeface="DIN Next LT W23"/>
-              </a:rPr>
-              <a:t>Where recurrence earns its keep</a:t>
-            </a:r>
-          </a:p>
-        </p:txBody>
-      </p:sp>
-      <p:sp>
-        <p:nvSpPr>
-          <p:cNvPr id="8" name="Rounded Rectangle 7"/>
-          <p:cNvSpPr/>
-          <p:nvPr/>
-        </p:nvSpPr>
-        <p:spPr>
-          <a:xfrm>
-            <a:off x="548640" y="1993392"/>
-            <a:ext cx="10972800" cy="3977639"/>
-          </a:xfrm>
-          <a:prstGeom prst="roundRect">
-            <a:avLst>
-              <a:gd name="adj" fmla="val 10000"/>
-            </a:avLst>
-          </a:prstGeom>
-          <a:solidFill>
-            <a:srgbClr val="EEE8FA"/>
-          </a:solidFill>
-          <a:ln>
-            <a:noFill/>
-          </a:ln>
-          <a:effectLst/>
-        </p:spPr>
-        <p:style>
-          <a:lnRef idx="1">
-            <a:schemeClr val="accent1"/>
-          </a:lnRef>
-          <a:fillRef idx="3">
-            <a:schemeClr val="accent1"/>
-          </a:fillRef>
-          <a:effectRef idx="2">
-            <a:schemeClr val="accent1"/>
-          </a:effectRef>
-          <a:fontRef idx="minor">
-            <a:schemeClr val="lt1"/>
-          </a:fontRef>
-        </p:style>
-        <p:txBody>
-          <a:bodyPr rtlCol="0" anchor="ctr"/>
-          <a:lstStyle/>
-          <a:p>
-            <a:pPr algn="ctr"/>
-          </a:p>
-        </p:txBody>
-      </p:sp>
-      <p:pic>
-        <p:nvPicPr>
-          <p:cNvPr id="9" name="Picture 8" descr="rnn-patterns.png"/>
-          <p:cNvPicPr>
-            <a:picLocks noChangeAspect="1"/>
-          </p:cNvPicPr>
-          <p:nvPr/>
-        </p:nvPicPr>
-        <p:blipFill>
-          <a:blip r:embed="rId3"/>
-          <a:stretch>
-            <a:fillRect/>
-          </a:stretch>
-        </p:blipFill>
-        <p:spPr>
-          <a:xfrm>
-            <a:off x="898663" y="2130552"/>
-            <a:ext cx="10272753" cy="3703320"/>
-          </a:xfrm>
-          <a:prstGeom prst="rect">
-            <a:avLst/>
-          </a:prstGeom>
-        </p:spPr>
-      </p:pic>
-      <p:sp>
-        <p:nvSpPr>
-          <p:cNvPr id="10" name="TextBox 9"/>
-          <p:cNvSpPr txBox="1"/>
-          <p:nvPr/>
-        </p:nvSpPr>
-        <p:spPr>
-          <a:xfrm>
-            <a:off x="548640" y="6309360"/>
-            <a:ext cx="10972800" cy="228600"/>
-          </a:xfrm>
-          <a:prstGeom prst="rect">
-            <a:avLst/>
-          </a:prstGeom>
-          <a:noFill/>
-        </p:spPr>
-        <p:txBody>
-          <a:bodyPr wrap="square" anchor="t">
-            <a:spAutoFit/>
-          </a:bodyPr>
-          <a:lstStyle/>
-          <a:p>
-            <a:pPr algn="l"/>
-            <a:r>
-              <a:rPr sz="1100" b="0">
-                <a:solidFill>
-                  <a:srgbClr val="5A5470"/>
-                </a:solidFill>
-                <a:latin typeface="DIN Next LT W23"/>
-                <a:ea typeface="DIN Next LT W23"/>
-                <a:cs typeface="DIN Next LT W23"/>
-              </a:rPr>
-              <a:t>Sequence-aware patterns are where recurrent models provide clear value.</a:t>
-            </a:r>
-          </a:p>
-        </p:txBody>
-      </p:sp>
-      <p:sp>
-        <p:nvSpPr>
-          <p:cNvPr id="11" name="Rectangle 10"/>
-          <p:cNvSpPr/>
-          <p:nvPr/>
-        </p:nvSpPr>
-        <p:spPr>
-          <a:xfrm>
-            <a:off x="548640" y="6446520"/>
-            <a:ext cx="11064240" cy="10972"/>
-          </a:xfrm>
-          <a:prstGeom prst="rect">
-            <a:avLst/>
-          </a:prstGeom>
-          <a:solidFill>
-            <a:srgbClr val="5234B7"/>
-          </a:solidFill>
-          <a:ln>
-            <a:noFill/>
-          </a:ln>
-          <a:effectLst/>
-        </p:spPr>
-        <p:style>
-          <a:lnRef idx="1">
-            <a:schemeClr val="accent1"/>
-          </a:lnRef>
-          <a:fillRef idx="3">
-            <a:schemeClr val="accent1"/>
-          </a:fillRef>
-          <a:effectRef idx="2">
-            <a:schemeClr val="accent1"/>
-          </a:effectRef>
-          <a:fontRef idx="minor">
-            <a:schemeClr val="lt1"/>
-          </a:fontRef>
-        </p:style>
-        <p:txBody>
-          <a:bodyPr rtlCol="0" anchor="ctr"/>
-          <a:lstStyle/>
-          <a:p>
-            <a:pPr algn="ctr"/>
-          </a:p>
-        </p:txBody>
-      </p:sp>
-      <p:sp>
-        <p:nvSpPr>
-          <p:cNvPr id="12" name="TextBox 11"/>
-          <p:cNvSpPr txBox="1"/>
-          <p:nvPr/>
-        </p:nvSpPr>
-        <p:spPr>
-          <a:xfrm>
-            <a:off x="548640" y="6510528"/>
-            <a:ext cx="2743200" cy="256032"/>
-          </a:xfrm>
-          <a:prstGeom prst="rect">
-            <a:avLst/>
-          </a:prstGeom>
-          <a:noFill/>
-        </p:spPr>
-        <p:txBody>
-          <a:bodyPr wrap="square" anchor="t">
-            <a:spAutoFit/>
-          </a:bodyPr>
-          <a:lstStyle/>
-          <a:p>
-            <a:pPr algn="l"/>
-            <a:r>
-              <a:rPr sz="1100" b="1">
-                <a:solidFill>
-                  <a:srgbClr val="5234B7"/>
-                </a:solidFill>
-                <a:latin typeface="DIN Next LT W23"/>
-                <a:ea typeface="DIN Next LT W23"/>
-                <a:cs typeface="DIN Next LT W23"/>
-              </a:rPr>
-              <a:t>ETRA</a:t>
-            </a:r>
-          </a:p>
-        </p:txBody>
-      </p:sp>
-      <p:sp>
-        <p:nvSpPr>
-          <p:cNvPr id="13" name="TextBox 12"/>
-          <p:cNvSpPr txBox="1"/>
-          <p:nvPr/>
-        </p:nvSpPr>
-        <p:spPr>
-          <a:xfrm>
-            <a:off x="9601200" y="6510528"/>
-            <a:ext cx="2011680" cy="256032"/>
-          </a:xfrm>
-          <a:prstGeom prst="rect">
-            <a:avLst/>
-          </a:prstGeom>
-          <a:noFill/>
-        </p:spPr>
-        <p:txBody>
-          <a:bodyPr wrap="square" anchor="t">
-            <a:spAutoFit/>
-          </a:bodyPr>
-          <a:lstStyle/>
-          <a:p>
-            <a:pPr algn="r"/>
-            <a:r>
-              <a:rPr sz="1100" b="0">
-                <a:solidFill>
-                  <a:srgbClr val="5A5470"/>
-                </a:solidFill>
-                <a:latin typeface="DIN Next LT W23"/>
-                <a:ea typeface="DIN Next LT W23"/>
-                <a:cs typeface="DIN Next LT W23"/>
-              </a:rPr>
-              <a:t>40  /  54</a:t>
-            </a:r>
-          </a:p>
-        </p:txBody>
-      </p:sp>
-    </p:spTree>
-  </p:cSld>
-  <p:clrMapOvr>
-    <a:masterClrMapping/>
-  </p:clrMapOvr>
-</p:sld>
-</file>
-
-<file path=ppt/slides/slide41.xml><?xml version="1.0" encoding="utf-8"?>
 <p:sld xmlns:a="http://schemas.openxmlformats.org/drawingml/2006/main" xmlns:p="http://schemas.openxmlformats.org/presentationml/2006/main" xmlns:r="http://schemas.openxmlformats.org/officeDocument/2006/relationships">
   <p:cSld>
     <p:bg>
@@ -27055,7 +26313,7 @@
                 <a:ea typeface="DIN Next LT W23"/>
                 <a:cs typeface="DIN Next LT W23"/>
               </a:rPr>
-              <a:t>41  /  54</a:t>
+              <a:t>40  /  53</a:t>
             </a:r>
           </a:p>
         </p:txBody>
@@ -27068,7 +26326,7 @@
 </p:sld>
 </file>
 
-<file path=ppt/slides/slide42.xml><?xml version="1.0" encoding="utf-8"?>
+<file path=ppt/slides/slide41.xml><?xml version="1.0" encoding="utf-8"?>
 <p:sld xmlns:a="http://schemas.openxmlformats.org/drawingml/2006/main" xmlns:p="http://schemas.openxmlformats.org/presentationml/2006/main" xmlns:r="http://schemas.openxmlformats.org/officeDocument/2006/relationships">
   <p:cSld>
     <p:bg>
@@ -27920,7 +27178,596 @@
                 <a:ea typeface="DIN Next LT W23"/>
                 <a:cs typeface="DIN Next LT W23"/>
               </a:rPr>
-              <a:t>42  /  54</a:t>
+              <a:t>41  /  53</a:t>
+            </a:r>
+          </a:p>
+        </p:txBody>
+      </p:sp>
+    </p:spTree>
+  </p:cSld>
+  <p:clrMapOvr>
+    <a:masterClrMapping/>
+  </p:clrMapOvr>
+</p:sld>
+</file>
+
+<file path=ppt/slides/slide42.xml><?xml version="1.0" encoding="utf-8"?>
+<p:sld xmlns:a="http://schemas.openxmlformats.org/drawingml/2006/main" xmlns:p="http://schemas.openxmlformats.org/presentationml/2006/main" xmlns:r="http://schemas.openxmlformats.org/officeDocument/2006/relationships">
+  <p:cSld>
+    <p:bg>
+      <p:bgPr>
+        <a:solidFill>
+          <a:srgbClr val="FAF8FF"/>
+        </a:solidFill>
+        <a:effectLst/>
+      </p:bgPr>
+    </p:bg>
+    <p:spTree>
+      <p:nvGrpSpPr>
+        <p:cNvPr id="1" name=""/>
+        <p:cNvGrpSpPr/>
+        <p:nvPr/>
+      </p:nvGrpSpPr>
+      <p:grpSpPr/>
+      <p:sp>
+        <p:nvSpPr>
+          <p:cNvPr id="2" name="Rectangle 1"/>
+          <p:cNvSpPr/>
+          <p:nvPr/>
+        </p:nvSpPr>
+        <p:spPr>
+          <a:xfrm>
+            <a:off x="12136831" y="0"/>
+            <a:ext cx="54864" cy="6858000"/>
+          </a:xfrm>
+          <a:prstGeom prst="rect">
+            <a:avLst/>
+          </a:prstGeom>
+          <a:solidFill>
+            <a:srgbClr val="5234B7"/>
+          </a:solidFill>
+          <a:ln>
+            <a:noFill/>
+          </a:ln>
+          <a:effectLst/>
+        </p:spPr>
+        <p:style>
+          <a:lnRef idx="1">
+            <a:schemeClr val="accent1"/>
+          </a:lnRef>
+          <a:fillRef idx="3">
+            <a:schemeClr val="accent1"/>
+          </a:fillRef>
+          <a:effectRef idx="2">
+            <a:schemeClr val="accent1"/>
+          </a:effectRef>
+          <a:fontRef idx="minor">
+            <a:schemeClr val="lt1"/>
+          </a:fontRef>
+        </p:style>
+        <p:txBody>
+          <a:bodyPr rtlCol="0" anchor="ctr"/>
+          <a:lstStyle/>
+          <a:p>
+            <a:pPr algn="ctr"/>
+          </a:p>
+        </p:txBody>
+      </p:sp>
+      <p:pic>
+        <p:nvPicPr>
+          <p:cNvPr id="3" name="Picture 2" descr="etra-wordmark.png"/>
+          <p:cNvPicPr>
+            <a:picLocks noChangeAspect="1"/>
+          </p:cNvPicPr>
+          <p:nvPr/>
+        </p:nvPicPr>
+        <p:blipFill>
+          <a:blip r:embed="rId2"/>
+          <a:stretch>
+            <a:fillRect/>
+          </a:stretch>
+        </p:blipFill>
+        <p:spPr>
+          <a:xfrm>
+            <a:off x="10561320" y="411480"/>
+            <a:ext cx="1206201" cy="320040"/>
+          </a:xfrm>
+          <a:prstGeom prst="rect">
+            <a:avLst/>
+          </a:prstGeom>
+        </p:spPr>
+      </p:pic>
+      <p:sp>
+        <p:nvSpPr>
+          <p:cNvPr id="4" name="TextBox 3"/>
+          <p:cNvSpPr txBox="1"/>
+          <p:nvPr/>
+        </p:nvSpPr>
+        <p:spPr>
+          <a:xfrm>
+            <a:off x="548640" y="438912"/>
+            <a:ext cx="7772400" cy="274320"/>
+          </a:xfrm>
+          <a:prstGeom prst="rect">
+            <a:avLst/>
+          </a:prstGeom>
+          <a:noFill/>
+        </p:spPr>
+        <p:txBody>
+          <a:bodyPr wrap="square" anchor="t">
+            <a:spAutoFit/>
+          </a:bodyPr>
+          <a:lstStyle/>
+          <a:p>
+            <a:pPr algn="l"/>
+            <a:r>
+              <a:rPr sz="1200" b="0">
+                <a:solidFill>
+                  <a:srgbClr val="5A5470"/>
+                </a:solidFill>
+                <a:latin typeface="DIN Next LT W23"/>
+                <a:ea typeface="DIN Next LT W23"/>
+                <a:cs typeface="DIN Next LT W23"/>
+              </a:rPr>
+              <a:t>S08  ·  NLP</a:t>
+            </a:r>
+          </a:p>
+        </p:txBody>
+      </p:sp>
+      <p:sp>
+        <p:nvSpPr>
+          <p:cNvPr id="5" name="Rectangle 4"/>
+          <p:cNvSpPr/>
+          <p:nvPr/>
+        </p:nvSpPr>
+        <p:spPr>
+          <a:xfrm>
+            <a:off x="548640" y="822960"/>
+            <a:ext cx="11064240" cy="10972"/>
+          </a:xfrm>
+          <a:prstGeom prst="rect">
+            <a:avLst/>
+          </a:prstGeom>
+          <a:solidFill>
+            <a:srgbClr val="E4DCF4"/>
+          </a:solidFill>
+          <a:ln>
+            <a:noFill/>
+          </a:ln>
+          <a:effectLst/>
+        </p:spPr>
+        <p:style>
+          <a:lnRef idx="1">
+            <a:schemeClr val="accent1"/>
+          </a:lnRef>
+          <a:fillRef idx="3">
+            <a:schemeClr val="accent1"/>
+          </a:fillRef>
+          <a:effectRef idx="2">
+            <a:schemeClr val="accent1"/>
+          </a:effectRef>
+          <a:fontRef idx="minor">
+            <a:schemeClr val="lt1"/>
+          </a:fontRef>
+        </p:style>
+        <p:txBody>
+          <a:bodyPr rtlCol="0" anchor="ctr"/>
+          <a:lstStyle/>
+          <a:p>
+            <a:pPr algn="ctr"/>
+          </a:p>
+        </p:txBody>
+      </p:sp>
+      <p:sp>
+        <p:nvSpPr>
+          <p:cNvPr id="6" name="TextBox 5"/>
+          <p:cNvSpPr txBox="1"/>
+          <p:nvPr/>
+        </p:nvSpPr>
+        <p:spPr>
+          <a:xfrm>
+            <a:off x="548640" y="1024128"/>
+            <a:ext cx="10241280" cy="566928"/>
+          </a:xfrm>
+          <a:prstGeom prst="rect">
+            <a:avLst/>
+          </a:prstGeom>
+          <a:noFill/>
+        </p:spPr>
+        <p:txBody>
+          <a:bodyPr wrap="square" anchor="t">
+            <a:spAutoFit/>
+          </a:bodyPr>
+          <a:lstStyle/>
+          <a:p>
+            <a:pPr algn="l"/>
+            <a:r>
+              <a:rPr sz="3200" b="1">
+                <a:solidFill>
+                  <a:srgbClr val="5234B7"/>
+                </a:solidFill>
+                <a:latin typeface="DIN Next LT W23"/>
+                <a:ea typeface="DIN Next LT W23"/>
+                <a:cs typeface="DIN Next LT W23"/>
+              </a:rPr>
+              <a:t>NLP Seq2Seq for Neural Machine Translation</a:t>
+            </a:r>
+          </a:p>
+        </p:txBody>
+      </p:sp>
+      <p:sp>
+        <p:nvSpPr>
+          <p:cNvPr id="7" name="TextBox 6"/>
+          <p:cNvSpPr txBox="1"/>
+          <p:nvPr/>
+        </p:nvSpPr>
+        <p:spPr>
+          <a:xfrm>
+            <a:off x="548640" y="1591056"/>
+            <a:ext cx="10241280" cy="310896"/>
+          </a:xfrm>
+          <a:prstGeom prst="rect">
+            <a:avLst/>
+          </a:prstGeom>
+          <a:noFill/>
+        </p:spPr>
+        <p:txBody>
+          <a:bodyPr wrap="square" anchor="t">
+            <a:spAutoFit/>
+          </a:bodyPr>
+          <a:lstStyle/>
+          <a:p>
+            <a:pPr algn="l"/>
+            <a:r>
+              <a:rPr sz="1500" b="0">
+                <a:solidFill>
+                  <a:srgbClr val="5A5470"/>
+                </a:solidFill>
+                <a:latin typeface="DIN Next LT W23"/>
+                <a:ea typeface="DIN Next LT W23"/>
+                <a:cs typeface="DIN Next LT W23"/>
+              </a:rPr>
+              <a:t>Encoder-Decoder Modeling, Decoding Strategies, and Evaluation</a:t>
+            </a:r>
+          </a:p>
+        </p:txBody>
+      </p:sp>
+      <p:sp>
+        <p:nvSpPr>
+          <p:cNvPr id="8" name="TextBox 7"/>
+          <p:cNvSpPr txBox="1"/>
+          <p:nvPr/>
+        </p:nvSpPr>
+        <p:spPr>
+          <a:xfrm>
+            <a:off x="548640" y="1993392"/>
+            <a:ext cx="320040" cy="384048"/>
+          </a:xfrm>
+          <a:prstGeom prst="rect">
+            <a:avLst/>
+          </a:prstGeom>
+          <a:noFill/>
+        </p:spPr>
+        <p:txBody>
+          <a:bodyPr wrap="square" anchor="t">
+            <a:spAutoFit/>
+          </a:bodyPr>
+          <a:lstStyle/>
+          <a:p>
+            <a:pPr algn="l"/>
+            <a:r>
+              <a:rPr sz="1500" b="0">
+                <a:solidFill>
+                  <a:srgbClr val="9E59CD"/>
+                </a:solidFill>
+                <a:latin typeface="DIN Next LT W23"/>
+                <a:ea typeface="DIN Next LT W23"/>
+                <a:cs typeface="DIN Next LT W23"/>
+              </a:rPr>
+              <a:t>–</a:t>
+            </a:r>
+          </a:p>
+        </p:txBody>
+      </p:sp>
+      <p:sp>
+        <p:nvSpPr>
+          <p:cNvPr id="9" name="TextBox 8"/>
+          <p:cNvSpPr txBox="1"/>
+          <p:nvPr/>
+        </p:nvSpPr>
+        <p:spPr>
+          <a:xfrm>
+            <a:off x="914400" y="1993392"/>
+            <a:ext cx="9875519" cy="384048"/>
+          </a:xfrm>
+          <a:prstGeom prst="rect">
+            <a:avLst/>
+          </a:prstGeom>
+          <a:noFill/>
+        </p:spPr>
+        <p:txBody>
+          <a:bodyPr wrap="square" anchor="t">
+            <a:spAutoFit/>
+          </a:bodyPr>
+          <a:lstStyle/>
+          <a:p>
+            <a:pPr algn="l"/>
+            <a:r>
+              <a:rPr sz="1500" b="0">
+                <a:solidFill>
+                  <a:srgbClr val="121018"/>
+                </a:solidFill>
+                <a:latin typeface="DIN Next LT W23"/>
+                <a:ea typeface="DIN Next LT W23"/>
+                <a:cs typeface="DIN Next LT W23"/>
+              </a:rPr>
+              <a:t>Seq2Seq maps variable-length input sequences to variable-length outputs.</a:t>
+            </a:r>
+          </a:p>
+        </p:txBody>
+      </p:sp>
+      <p:sp>
+        <p:nvSpPr>
+          <p:cNvPr id="10" name="TextBox 9"/>
+          <p:cNvSpPr txBox="1"/>
+          <p:nvPr/>
+        </p:nvSpPr>
+        <p:spPr>
+          <a:xfrm>
+            <a:off x="548640" y="2468880"/>
+            <a:ext cx="320040" cy="384048"/>
+          </a:xfrm>
+          <a:prstGeom prst="rect">
+            <a:avLst/>
+          </a:prstGeom>
+          <a:noFill/>
+        </p:spPr>
+        <p:txBody>
+          <a:bodyPr wrap="square" anchor="t">
+            <a:spAutoFit/>
+          </a:bodyPr>
+          <a:lstStyle/>
+          <a:p>
+            <a:pPr algn="l"/>
+            <a:r>
+              <a:rPr sz="1500" b="0">
+                <a:solidFill>
+                  <a:srgbClr val="9E59CD"/>
+                </a:solidFill>
+                <a:latin typeface="DIN Next LT W23"/>
+                <a:ea typeface="DIN Next LT W23"/>
+                <a:cs typeface="DIN Next LT W23"/>
+              </a:rPr>
+              <a:t>–</a:t>
+            </a:r>
+          </a:p>
+        </p:txBody>
+      </p:sp>
+      <p:sp>
+        <p:nvSpPr>
+          <p:cNvPr id="11" name="TextBox 10"/>
+          <p:cNvSpPr txBox="1"/>
+          <p:nvPr/>
+        </p:nvSpPr>
+        <p:spPr>
+          <a:xfrm>
+            <a:off x="914400" y="2468880"/>
+            <a:ext cx="9875519" cy="384048"/>
+          </a:xfrm>
+          <a:prstGeom prst="rect">
+            <a:avLst/>
+          </a:prstGeom>
+          <a:noFill/>
+        </p:spPr>
+        <p:txBody>
+          <a:bodyPr wrap="square" anchor="t">
+            <a:spAutoFit/>
+          </a:bodyPr>
+          <a:lstStyle/>
+          <a:p>
+            <a:pPr algn="l"/>
+            <a:r>
+              <a:rPr sz="1500" b="0">
+                <a:solidFill>
+                  <a:srgbClr val="121018"/>
+                </a:solidFill>
+                <a:latin typeface="DIN Next LT W23"/>
+                <a:ea typeface="DIN Next LT W23"/>
+                <a:cs typeface="DIN Next LT W23"/>
+              </a:rPr>
+              <a:t>Encoder-decoder models were foundational for neural machine translation.</a:t>
+            </a:r>
+          </a:p>
+        </p:txBody>
+      </p:sp>
+      <p:sp>
+        <p:nvSpPr>
+          <p:cNvPr id="12" name="TextBox 11"/>
+          <p:cNvSpPr txBox="1"/>
+          <p:nvPr/>
+        </p:nvSpPr>
+        <p:spPr>
+          <a:xfrm>
+            <a:off x="548640" y="2944368"/>
+            <a:ext cx="320040" cy="384048"/>
+          </a:xfrm>
+          <a:prstGeom prst="rect">
+            <a:avLst/>
+          </a:prstGeom>
+          <a:noFill/>
+        </p:spPr>
+        <p:txBody>
+          <a:bodyPr wrap="square" anchor="t">
+            <a:spAutoFit/>
+          </a:bodyPr>
+          <a:lstStyle/>
+          <a:p>
+            <a:pPr algn="l"/>
+            <a:r>
+              <a:rPr sz="1500" b="0">
+                <a:solidFill>
+                  <a:srgbClr val="9E59CD"/>
+                </a:solidFill>
+                <a:latin typeface="DIN Next LT W23"/>
+                <a:ea typeface="DIN Next LT W23"/>
+                <a:cs typeface="DIN Next LT W23"/>
+              </a:rPr>
+              <a:t>–</a:t>
+            </a:r>
+          </a:p>
+        </p:txBody>
+      </p:sp>
+      <p:sp>
+        <p:nvSpPr>
+          <p:cNvPr id="13" name="TextBox 12"/>
+          <p:cNvSpPr txBox="1"/>
+          <p:nvPr/>
+        </p:nvSpPr>
+        <p:spPr>
+          <a:xfrm>
+            <a:off x="914400" y="2944368"/>
+            <a:ext cx="9875519" cy="384048"/>
+          </a:xfrm>
+          <a:prstGeom prst="rect">
+            <a:avLst/>
+          </a:prstGeom>
+          <a:noFill/>
+        </p:spPr>
+        <p:txBody>
+          <a:bodyPr wrap="square" anchor="t">
+            <a:spAutoFit/>
+          </a:bodyPr>
+          <a:lstStyle/>
+          <a:p>
+            <a:pPr algn="l"/>
+            <a:r>
+              <a:rPr sz="1500" b="0">
+                <a:solidFill>
+                  <a:srgbClr val="121018"/>
+                </a:solidFill>
+                <a:latin typeface="DIN Next LT W23"/>
+                <a:ea typeface="DIN Next LT W23"/>
+                <a:cs typeface="DIN Next LT W23"/>
+              </a:rPr>
+              <a:t>This module covers training, decoding, bottlenecks, attention, and metrics.</a:t>
+            </a:r>
+          </a:p>
+        </p:txBody>
+      </p:sp>
+      <p:sp>
+        <p:nvSpPr>
+          <p:cNvPr id="14" name="Rectangle 13"/>
+          <p:cNvSpPr/>
+          <p:nvPr/>
+        </p:nvSpPr>
+        <p:spPr>
+          <a:xfrm>
+            <a:off x="548640" y="6446520"/>
+            <a:ext cx="11064240" cy="10972"/>
+          </a:xfrm>
+          <a:prstGeom prst="rect">
+            <a:avLst/>
+          </a:prstGeom>
+          <a:solidFill>
+            <a:srgbClr val="5234B7"/>
+          </a:solidFill>
+          <a:ln>
+            <a:noFill/>
+          </a:ln>
+          <a:effectLst/>
+        </p:spPr>
+        <p:style>
+          <a:lnRef idx="1">
+            <a:schemeClr val="accent1"/>
+          </a:lnRef>
+          <a:fillRef idx="3">
+            <a:schemeClr val="accent1"/>
+          </a:fillRef>
+          <a:effectRef idx="2">
+            <a:schemeClr val="accent1"/>
+          </a:effectRef>
+          <a:fontRef idx="minor">
+            <a:schemeClr val="lt1"/>
+          </a:fontRef>
+        </p:style>
+        <p:txBody>
+          <a:bodyPr rtlCol="0" anchor="ctr"/>
+          <a:lstStyle/>
+          <a:p>
+            <a:pPr algn="ctr"/>
+          </a:p>
+        </p:txBody>
+      </p:sp>
+      <p:sp>
+        <p:nvSpPr>
+          <p:cNvPr id="15" name="TextBox 14"/>
+          <p:cNvSpPr txBox="1"/>
+          <p:nvPr/>
+        </p:nvSpPr>
+        <p:spPr>
+          <a:xfrm>
+            <a:off x="548640" y="6510528"/>
+            <a:ext cx="2743200" cy="256032"/>
+          </a:xfrm>
+          <a:prstGeom prst="rect">
+            <a:avLst/>
+          </a:prstGeom>
+          <a:noFill/>
+        </p:spPr>
+        <p:txBody>
+          <a:bodyPr wrap="square" anchor="t">
+            <a:spAutoFit/>
+          </a:bodyPr>
+          <a:lstStyle/>
+          <a:p>
+            <a:pPr algn="l"/>
+            <a:r>
+              <a:rPr sz="1100" b="1">
+                <a:solidFill>
+                  <a:srgbClr val="5234B7"/>
+                </a:solidFill>
+                <a:latin typeface="DIN Next LT W23"/>
+                <a:ea typeface="DIN Next LT W23"/>
+                <a:cs typeface="DIN Next LT W23"/>
+              </a:rPr>
+              <a:t>ETRA</a:t>
+            </a:r>
+          </a:p>
+        </p:txBody>
+      </p:sp>
+      <p:sp>
+        <p:nvSpPr>
+          <p:cNvPr id="16" name="TextBox 15"/>
+          <p:cNvSpPr txBox="1"/>
+          <p:nvPr/>
+        </p:nvSpPr>
+        <p:spPr>
+          <a:xfrm>
+            <a:off x="9601200" y="6510528"/>
+            <a:ext cx="2011680" cy="256032"/>
+          </a:xfrm>
+          <a:prstGeom prst="rect">
+            <a:avLst/>
+          </a:prstGeom>
+          <a:noFill/>
+        </p:spPr>
+        <p:txBody>
+          <a:bodyPr wrap="square" anchor="t">
+            <a:spAutoFit/>
+          </a:bodyPr>
+          <a:lstStyle/>
+          <a:p>
+            <a:pPr algn="r"/>
+            <a:r>
+              <a:rPr sz="1100" b="0">
+                <a:solidFill>
+                  <a:srgbClr val="5A5470"/>
+                </a:solidFill>
+                <a:latin typeface="DIN Next LT W23"/>
+                <a:ea typeface="DIN Next LT W23"/>
+                <a:cs typeface="DIN Next LT W23"/>
+              </a:rPr>
+              <a:t>42  /  53</a:t>
             </a:r>
           </a:p>
         </p:txBody>
@@ -28176,229 +28023,77 @@
       </p:sp>
       <p:sp>
         <p:nvSpPr>
-          <p:cNvPr id="8" name="TextBox 7"/>
-          <p:cNvSpPr txBox="1"/>
+          <p:cNvPr id="8" name="Rounded Rectangle 7"/>
+          <p:cNvSpPr/>
           <p:nvPr/>
         </p:nvSpPr>
         <p:spPr>
           <a:xfrm>
             <a:off x="548640" y="1993392"/>
-            <a:ext cx="320040" cy="384048"/>
-          </a:xfrm>
-          <a:prstGeom prst="rect">
-            <a:avLst/>
-          </a:prstGeom>
-          <a:noFill/>
-        </p:spPr>
-        <p:txBody>
-          <a:bodyPr wrap="square" anchor="t">
-            <a:spAutoFit/>
-          </a:bodyPr>
-          <a:lstStyle/>
-          <a:p>
-            <a:pPr algn="l"/>
-            <a:r>
-              <a:rPr sz="1500" b="0">
-                <a:solidFill>
-                  <a:srgbClr val="9E59CD"/>
-                </a:solidFill>
-                <a:latin typeface="DIN Next LT W23"/>
-                <a:ea typeface="DIN Next LT W23"/>
-                <a:cs typeface="DIN Next LT W23"/>
-              </a:rPr>
-              <a:t>–</a:t>
-            </a:r>
-          </a:p>
-        </p:txBody>
-      </p:sp>
-      <p:sp>
-        <p:nvSpPr>
-          <p:cNvPr id="9" name="TextBox 8"/>
-          <p:cNvSpPr txBox="1"/>
-          <p:nvPr/>
-        </p:nvSpPr>
-        <p:spPr>
-          <a:xfrm>
-            <a:off x="914400" y="1993392"/>
-            <a:ext cx="9875519" cy="384048"/>
-          </a:xfrm>
-          <a:prstGeom prst="rect">
-            <a:avLst/>
-          </a:prstGeom>
-          <a:noFill/>
-        </p:spPr>
-        <p:txBody>
-          <a:bodyPr wrap="square" anchor="t">
-            <a:spAutoFit/>
-          </a:bodyPr>
-          <a:lstStyle/>
-          <a:p>
-            <a:pPr algn="l"/>
-            <a:r>
-              <a:rPr sz="1500" b="0">
-                <a:solidFill>
-                  <a:srgbClr val="121018"/>
-                </a:solidFill>
-                <a:latin typeface="DIN Next LT W23"/>
-                <a:ea typeface="DIN Next LT W23"/>
-                <a:cs typeface="DIN Next LT W23"/>
-              </a:rPr>
-              <a:t>Seq2Seq maps variable-length input sequences to variable-length outputs.</a:t>
-            </a:r>
-          </a:p>
-        </p:txBody>
-      </p:sp>
-      <p:sp>
-        <p:nvSpPr>
-          <p:cNvPr id="10" name="TextBox 9"/>
-          <p:cNvSpPr txBox="1"/>
-          <p:nvPr/>
-        </p:nvSpPr>
-        <p:spPr>
-          <a:xfrm>
-            <a:off x="548640" y="2468880"/>
-            <a:ext cx="320040" cy="384048"/>
-          </a:xfrm>
-          <a:prstGeom prst="rect">
-            <a:avLst/>
-          </a:prstGeom>
-          <a:noFill/>
-        </p:spPr>
-        <p:txBody>
-          <a:bodyPr wrap="square" anchor="t">
-            <a:spAutoFit/>
-          </a:bodyPr>
-          <a:lstStyle/>
-          <a:p>
-            <a:pPr algn="l"/>
-            <a:r>
-              <a:rPr sz="1500" b="0">
-                <a:solidFill>
-                  <a:srgbClr val="9E59CD"/>
-                </a:solidFill>
-                <a:latin typeface="DIN Next LT W23"/>
-                <a:ea typeface="DIN Next LT W23"/>
-                <a:cs typeface="DIN Next LT W23"/>
-              </a:rPr>
-              <a:t>–</a:t>
-            </a:r>
-          </a:p>
-        </p:txBody>
-      </p:sp>
-      <p:sp>
-        <p:nvSpPr>
-          <p:cNvPr id="11" name="TextBox 10"/>
-          <p:cNvSpPr txBox="1"/>
-          <p:nvPr/>
-        </p:nvSpPr>
-        <p:spPr>
-          <a:xfrm>
-            <a:off x="914400" y="2468880"/>
-            <a:ext cx="9875519" cy="384048"/>
-          </a:xfrm>
-          <a:prstGeom prst="rect">
-            <a:avLst/>
-          </a:prstGeom>
-          <a:noFill/>
-        </p:spPr>
-        <p:txBody>
-          <a:bodyPr wrap="square" anchor="t">
-            <a:spAutoFit/>
-          </a:bodyPr>
-          <a:lstStyle/>
-          <a:p>
-            <a:pPr algn="l"/>
-            <a:r>
-              <a:rPr sz="1500" b="0">
-                <a:solidFill>
-                  <a:srgbClr val="121018"/>
-                </a:solidFill>
-                <a:latin typeface="DIN Next LT W23"/>
-                <a:ea typeface="DIN Next LT W23"/>
-                <a:cs typeface="DIN Next LT W23"/>
-              </a:rPr>
-              <a:t>Encoder-decoder models were foundational for neural machine translation.</a:t>
-            </a:r>
-          </a:p>
-        </p:txBody>
-      </p:sp>
-      <p:sp>
-        <p:nvSpPr>
-          <p:cNvPr id="12" name="TextBox 11"/>
-          <p:cNvSpPr txBox="1"/>
-          <p:nvPr/>
-        </p:nvSpPr>
-        <p:spPr>
-          <a:xfrm>
-            <a:off x="548640" y="2944368"/>
-            <a:ext cx="320040" cy="384048"/>
-          </a:xfrm>
-          <a:prstGeom prst="rect">
-            <a:avLst/>
-          </a:prstGeom>
-          <a:noFill/>
-        </p:spPr>
-        <p:txBody>
-          <a:bodyPr wrap="square" anchor="t">
-            <a:spAutoFit/>
-          </a:bodyPr>
-          <a:lstStyle/>
-          <a:p>
-            <a:pPr algn="l"/>
-            <a:r>
-              <a:rPr sz="1500" b="0">
-                <a:solidFill>
-                  <a:srgbClr val="9E59CD"/>
-                </a:solidFill>
-                <a:latin typeface="DIN Next LT W23"/>
-                <a:ea typeface="DIN Next LT W23"/>
-                <a:cs typeface="DIN Next LT W23"/>
-              </a:rPr>
-              <a:t>–</a:t>
-            </a:r>
-          </a:p>
-        </p:txBody>
-      </p:sp>
-      <p:sp>
-        <p:nvSpPr>
-          <p:cNvPr id="13" name="TextBox 12"/>
-          <p:cNvSpPr txBox="1"/>
-          <p:nvPr/>
-        </p:nvSpPr>
-        <p:spPr>
-          <a:xfrm>
-            <a:off x="914400" y="2944368"/>
-            <a:ext cx="9875519" cy="384048"/>
-          </a:xfrm>
-          <a:prstGeom prst="rect">
-            <a:avLst/>
-          </a:prstGeom>
-          <a:noFill/>
-        </p:spPr>
-        <p:txBody>
-          <a:bodyPr wrap="square" anchor="t">
-            <a:spAutoFit/>
-          </a:bodyPr>
-          <a:lstStyle/>
-          <a:p>
-            <a:pPr algn="l"/>
-            <a:r>
-              <a:rPr sz="1500" b="0">
-                <a:solidFill>
-                  <a:srgbClr val="121018"/>
-                </a:solidFill>
-                <a:latin typeface="DIN Next LT W23"/>
-                <a:ea typeface="DIN Next LT W23"/>
-                <a:cs typeface="DIN Next LT W23"/>
-              </a:rPr>
-              <a:t>This module covers training, decoding, bottlenecks, attention, and metrics.</a:t>
-            </a:r>
-          </a:p>
-        </p:txBody>
-      </p:sp>
-      <p:sp>
-        <p:nvSpPr>
-          <p:cNvPr id="14" name="Rectangle 13"/>
+            <a:ext cx="10972800" cy="3977639"/>
+          </a:xfrm>
+          <a:prstGeom prst="roundRect">
+            <a:avLst>
+              <a:gd name="adj" fmla="val 10000"/>
+            </a:avLst>
+          </a:prstGeom>
+          <a:solidFill>
+            <a:srgbClr val="EEE8FA"/>
+          </a:solidFill>
+          <a:ln>
+            <a:noFill/>
+          </a:ln>
+          <a:effectLst/>
+        </p:spPr>
+        <p:style>
+          <a:lnRef idx="1">
+            <a:schemeClr val="accent1"/>
+          </a:lnRef>
+          <a:fillRef idx="3">
+            <a:schemeClr val="accent1"/>
+          </a:fillRef>
+          <a:effectRef idx="2">
+            <a:schemeClr val="accent1"/>
+          </a:effectRef>
+          <a:fontRef idx="minor">
+            <a:schemeClr val="lt1"/>
+          </a:fontRef>
+        </p:style>
+        <p:txBody>
+          <a:bodyPr rtlCol="0" anchor="ctr"/>
+          <a:lstStyle/>
+          <a:p>
+            <a:pPr algn="ctr"/>
+          </a:p>
+        </p:txBody>
+      </p:sp>
+      <p:pic>
+        <p:nvPicPr>
+          <p:cNvPr id="9" name="Picture 8" descr="seq2seq.png"/>
+          <p:cNvPicPr>
+            <a:picLocks noChangeAspect="1"/>
+          </p:cNvPicPr>
+          <p:nvPr/>
+        </p:nvPicPr>
+        <p:blipFill>
+          <a:blip r:embed="rId3"/>
+          <a:stretch>
+            <a:fillRect/>
+          </a:stretch>
+        </p:blipFill>
+        <p:spPr>
+          <a:xfrm>
+            <a:off x="1021201" y="2130552"/>
+            <a:ext cx="10027677" cy="3703320"/>
+          </a:xfrm>
+          <a:prstGeom prst="rect">
+            <a:avLst/>
+          </a:prstGeom>
+        </p:spPr>
+      </p:pic>
+      <p:sp>
+        <p:nvSpPr>
+          <p:cNvPr id="10" name="Rectangle 9"/>
           <p:cNvSpPr/>
           <p:nvPr/>
         </p:nvSpPr>
@@ -28442,7 +28137,7 @@
       </p:sp>
       <p:sp>
         <p:nvSpPr>
-          <p:cNvPr id="15" name="TextBox 14"/>
+          <p:cNvPr id="11" name="TextBox 10"/>
           <p:cNvSpPr txBox="1"/>
           <p:nvPr/>
         </p:nvSpPr>
@@ -28479,7 +28174,7 @@
       </p:sp>
       <p:sp>
         <p:nvSpPr>
-          <p:cNvPr id="16" name="TextBox 15"/>
+          <p:cNvPr id="12" name="TextBox 11"/>
           <p:cNvSpPr txBox="1"/>
           <p:nvPr/>
         </p:nvSpPr>
@@ -28509,7 +28204,7 @@
                 <a:ea typeface="DIN Next LT W23"/>
                 <a:cs typeface="DIN Next LT W23"/>
               </a:rPr>
-              <a:t>43  /  54</a:t>
+              <a:t>43  /  53</a:t>
             </a:r>
           </a:p>
         </p:txBody>
@@ -28721,7 +28416,7 @@
                 <a:ea typeface="DIN Next LT W23"/>
                 <a:cs typeface="DIN Next LT W23"/>
               </a:rPr>
-              <a:t>NLP Seq2Seq for Neural Machine Translation</a:t>
+              <a:t>Inference: Greedy Decoding vs Beam Search</a:t>
             </a:r>
           </a:p>
         </p:txBody>
@@ -28758,7 +28453,7 @@
                 <a:ea typeface="DIN Next LT W23"/>
                 <a:cs typeface="DIN Next LT W23"/>
               </a:rPr>
-              <a:t>Encoder-Decoder Modeling, Decoding Strategies, and Evaluation</a:t>
+              <a:t>Local pick vs shortlist of hypotheses</a:t>
             </a:r>
           </a:p>
         </p:txBody>
@@ -28811,7 +28506,7 @@
       </p:sp>
       <p:pic>
         <p:nvPicPr>
-          <p:cNvPr id="9" name="Picture 8" descr="seq2seq.png"/>
+          <p:cNvPr id="9" name="Picture 8" descr="greedy-vs-beam.png"/>
           <p:cNvPicPr>
             <a:picLocks noChangeAspect="1"/>
           </p:cNvPicPr>
@@ -28825,8 +28520,8 @@
         </p:blipFill>
         <p:spPr>
           <a:xfrm>
-            <a:off x="1021201" y="2130552"/>
-            <a:ext cx="10027677" cy="3703320"/>
+            <a:off x="898663" y="2130552"/>
+            <a:ext cx="10272753" cy="3703320"/>
           </a:xfrm>
           <a:prstGeom prst="rect">
             <a:avLst/>
@@ -28835,7 +28530,44 @@
       </p:pic>
       <p:sp>
         <p:nvSpPr>
-          <p:cNvPr id="10" name="Rectangle 9"/>
+          <p:cNvPr id="10" name="TextBox 9"/>
+          <p:cNvSpPr txBox="1"/>
+          <p:nvPr/>
+        </p:nvSpPr>
+        <p:spPr>
+          <a:xfrm>
+            <a:off x="548640" y="6309360"/>
+            <a:ext cx="10972800" cy="228600"/>
+          </a:xfrm>
+          <a:prstGeom prst="rect">
+            <a:avLst/>
+          </a:prstGeom>
+          <a:noFill/>
+        </p:spPr>
+        <p:txBody>
+          <a:bodyPr wrap="square" anchor="t">
+            <a:spAutoFit/>
+          </a:bodyPr>
+          <a:lstStyle/>
+          <a:p>
+            <a:pPr algn="l"/>
+            <a:r>
+              <a:rPr sz="1100" b="0">
+                <a:solidFill>
+                  <a:srgbClr val="5A5470"/>
+                </a:solidFill>
+                <a:latin typeface="DIN Next LT W23"/>
+                <a:ea typeface="DIN Next LT W23"/>
+                <a:cs typeface="DIN Next LT W23"/>
+              </a:rPr>
+              <a:t>Typical beam sizes are moderate (e.g., 4-10) to balance quality and cost.</a:t>
+            </a:r>
+          </a:p>
+        </p:txBody>
+      </p:sp>
+      <p:sp>
+        <p:nvSpPr>
+          <p:cNvPr id="11" name="Rectangle 10"/>
           <p:cNvSpPr/>
           <p:nvPr/>
         </p:nvSpPr>
@@ -28879,7 +28611,7 @@
       </p:sp>
       <p:sp>
         <p:nvSpPr>
-          <p:cNvPr id="11" name="TextBox 10"/>
+          <p:cNvPr id="12" name="TextBox 11"/>
           <p:cNvSpPr txBox="1"/>
           <p:nvPr/>
         </p:nvSpPr>
@@ -28916,7 +28648,7 @@
       </p:sp>
       <p:sp>
         <p:nvSpPr>
-          <p:cNvPr id="12" name="TextBox 11"/>
+          <p:cNvPr id="13" name="TextBox 12"/>
           <p:cNvSpPr txBox="1"/>
           <p:nvPr/>
         </p:nvSpPr>
@@ -28946,7 +28678,7 @@
                 <a:ea typeface="DIN Next LT W23"/>
                 <a:cs typeface="DIN Next LT W23"/>
               </a:rPr>
-              <a:t>44  /  54</a:t>
+              <a:t>44  /  53</a:t>
             </a:r>
           </a:p>
         </p:txBody>
@@ -28960,480 +28692,6 @@
 </file>
 
 <file path=ppt/slides/slide45.xml><?xml version="1.0" encoding="utf-8"?>
-<p:sld xmlns:a="http://schemas.openxmlformats.org/drawingml/2006/main" xmlns:p="http://schemas.openxmlformats.org/presentationml/2006/main" xmlns:r="http://schemas.openxmlformats.org/officeDocument/2006/relationships">
-  <p:cSld>
-    <p:bg>
-      <p:bgPr>
-        <a:solidFill>
-          <a:srgbClr val="FAF8FF"/>
-        </a:solidFill>
-        <a:effectLst/>
-      </p:bgPr>
-    </p:bg>
-    <p:spTree>
-      <p:nvGrpSpPr>
-        <p:cNvPr id="1" name=""/>
-        <p:cNvGrpSpPr/>
-        <p:nvPr/>
-      </p:nvGrpSpPr>
-      <p:grpSpPr/>
-      <p:sp>
-        <p:nvSpPr>
-          <p:cNvPr id="2" name="Rectangle 1"/>
-          <p:cNvSpPr/>
-          <p:nvPr/>
-        </p:nvSpPr>
-        <p:spPr>
-          <a:xfrm>
-            <a:off x="12136831" y="0"/>
-            <a:ext cx="54864" cy="6858000"/>
-          </a:xfrm>
-          <a:prstGeom prst="rect">
-            <a:avLst/>
-          </a:prstGeom>
-          <a:solidFill>
-            <a:srgbClr val="5234B7"/>
-          </a:solidFill>
-          <a:ln>
-            <a:noFill/>
-          </a:ln>
-          <a:effectLst/>
-        </p:spPr>
-        <p:style>
-          <a:lnRef idx="1">
-            <a:schemeClr val="accent1"/>
-          </a:lnRef>
-          <a:fillRef idx="3">
-            <a:schemeClr val="accent1"/>
-          </a:fillRef>
-          <a:effectRef idx="2">
-            <a:schemeClr val="accent1"/>
-          </a:effectRef>
-          <a:fontRef idx="minor">
-            <a:schemeClr val="lt1"/>
-          </a:fontRef>
-        </p:style>
-        <p:txBody>
-          <a:bodyPr rtlCol="0" anchor="ctr"/>
-          <a:lstStyle/>
-          <a:p>
-            <a:pPr algn="ctr"/>
-          </a:p>
-        </p:txBody>
-      </p:sp>
-      <p:pic>
-        <p:nvPicPr>
-          <p:cNvPr id="3" name="Picture 2" descr="etra-wordmark.png"/>
-          <p:cNvPicPr>
-            <a:picLocks noChangeAspect="1"/>
-          </p:cNvPicPr>
-          <p:nvPr/>
-        </p:nvPicPr>
-        <p:blipFill>
-          <a:blip r:embed="rId2"/>
-          <a:stretch>
-            <a:fillRect/>
-          </a:stretch>
-        </p:blipFill>
-        <p:spPr>
-          <a:xfrm>
-            <a:off x="10561320" y="411480"/>
-            <a:ext cx="1206201" cy="320040"/>
-          </a:xfrm>
-          <a:prstGeom prst="rect">
-            <a:avLst/>
-          </a:prstGeom>
-        </p:spPr>
-      </p:pic>
-      <p:sp>
-        <p:nvSpPr>
-          <p:cNvPr id="4" name="TextBox 3"/>
-          <p:cNvSpPr txBox="1"/>
-          <p:nvPr/>
-        </p:nvSpPr>
-        <p:spPr>
-          <a:xfrm>
-            <a:off x="548640" y="438912"/>
-            <a:ext cx="7772400" cy="274320"/>
-          </a:xfrm>
-          <a:prstGeom prst="rect">
-            <a:avLst/>
-          </a:prstGeom>
-          <a:noFill/>
-        </p:spPr>
-        <p:txBody>
-          <a:bodyPr wrap="square" anchor="t">
-            <a:spAutoFit/>
-          </a:bodyPr>
-          <a:lstStyle/>
-          <a:p>
-            <a:pPr algn="l"/>
-            <a:r>
-              <a:rPr sz="1200" b="0">
-                <a:solidFill>
-                  <a:srgbClr val="5A5470"/>
-                </a:solidFill>
-                <a:latin typeface="DIN Next LT W23"/>
-                <a:ea typeface="DIN Next LT W23"/>
-                <a:cs typeface="DIN Next LT W23"/>
-              </a:rPr>
-              <a:t>S08  ·  NLP</a:t>
-            </a:r>
-          </a:p>
-        </p:txBody>
-      </p:sp>
-      <p:sp>
-        <p:nvSpPr>
-          <p:cNvPr id="5" name="Rectangle 4"/>
-          <p:cNvSpPr/>
-          <p:nvPr/>
-        </p:nvSpPr>
-        <p:spPr>
-          <a:xfrm>
-            <a:off x="548640" y="822960"/>
-            <a:ext cx="11064240" cy="10972"/>
-          </a:xfrm>
-          <a:prstGeom prst="rect">
-            <a:avLst/>
-          </a:prstGeom>
-          <a:solidFill>
-            <a:srgbClr val="E4DCF4"/>
-          </a:solidFill>
-          <a:ln>
-            <a:noFill/>
-          </a:ln>
-          <a:effectLst/>
-        </p:spPr>
-        <p:style>
-          <a:lnRef idx="1">
-            <a:schemeClr val="accent1"/>
-          </a:lnRef>
-          <a:fillRef idx="3">
-            <a:schemeClr val="accent1"/>
-          </a:fillRef>
-          <a:effectRef idx="2">
-            <a:schemeClr val="accent1"/>
-          </a:effectRef>
-          <a:fontRef idx="minor">
-            <a:schemeClr val="lt1"/>
-          </a:fontRef>
-        </p:style>
-        <p:txBody>
-          <a:bodyPr rtlCol="0" anchor="ctr"/>
-          <a:lstStyle/>
-          <a:p>
-            <a:pPr algn="ctr"/>
-          </a:p>
-        </p:txBody>
-      </p:sp>
-      <p:sp>
-        <p:nvSpPr>
-          <p:cNvPr id="6" name="TextBox 5"/>
-          <p:cNvSpPr txBox="1"/>
-          <p:nvPr/>
-        </p:nvSpPr>
-        <p:spPr>
-          <a:xfrm>
-            <a:off x="548640" y="1024128"/>
-            <a:ext cx="10241280" cy="566928"/>
-          </a:xfrm>
-          <a:prstGeom prst="rect">
-            <a:avLst/>
-          </a:prstGeom>
-          <a:noFill/>
-        </p:spPr>
-        <p:txBody>
-          <a:bodyPr wrap="square" anchor="t">
-            <a:spAutoFit/>
-          </a:bodyPr>
-          <a:lstStyle/>
-          <a:p>
-            <a:pPr algn="l"/>
-            <a:r>
-              <a:rPr sz="3200" b="1">
-                <a:solidFill>
-                  <a:srgbClr val="5234B7"/>
-                </a:solidFill>
-                <a:latin typeface="DIN Next LT W23"/>
-                <a:ea typeface="DIN Next LT W23"/>
-                <a:cs typeface="DIN Next LT W23"/>
-              </a:rPr>
-              <a:t>Inference: Greedy Decoding vs Beam Search</a:t>
-            </a:r>
-          </a:p>
-        </p:txBody>
-      </p:sp>
-      <p:sp>
-        <p:nvSpPr>
-          <p:cNvPr id="7" name="TextBox 6"/>
-          <p:cNvSpPr txBox="1"/>
-          <p:nvPr/>
-        </p:nvSpPr>
-        <p:spPr>
-          <a:xfrm>
-            <a:off x="548640" y="1591056"/>
-            <a:ext cx="10241280" cy="310896"/>
-          </a:xfrm>
-          <a:prstGeom prst="rect">
-            <a:avLst/>
-          </a:prstGeom>
-          <a:noFill/>
-        </p:spPr>
-        <p:txBody>
-          <a:bodyPr wrap="square" anchor="t">
-            <a:spAutoFit/>
-          </a:bodyPr>
-          <a:lstStyle/>
-          <a:p>
-            <a:pPr algn="l"/>
-            <a:r>
-              <a:rPr sz="1500" b="0">
-                <a:solidFill>
-                  <a:srgbClr val="5A5470"/>
-                </a:solidFill>
-                <a:latin typeface="DIN Next LT W23"/>
-                <a:ea typeface="DIN Next LT W23"/>
-                <a:cs typeface="DIN Next LT W23"/>
-              </a:rPr>
-              <a:t>Local pick vs shortlist of hypotheses</a:t>
-            </a:r>
-          </a:p>
-        </p:txBody>
-      </p:sp>
-      <p:sp>
-        <p:nvSpPr>
-          <p:cNvPr id="8" name="Rounded Rectangle 7"/>
-          <p:cNvSpPr/>
-          <p:nvPr/>
-        </p:nvSpPr>
-        <p:spPr>
-          <a:xfrm>
-            <a:off x="548640" y="1993392"/>
-            <a:ext cx="10972800" cy="3977639"/>
-          </a:xfrm>
-          <a:prstGeom prst="roundRect">
-            <a:avLst>
-              <a:gd name="adj" fmla="val 10000"/>
-            </a:avLst>
-          </a:prstGeom>
-          <a:solidFill>
-            <a:srgbClr val="EEE8FA"/>
-          </a:solidFill>
-          <a:ln>
-            <a:noFill/>
-          </a:ln>
-          <a:effectLst/>
-        </p:spPr>
-        <p:style>
-          <a:lnRef idx="1">
-            <a:schemeClr val="accent1"/>
-          </a:lnRef>
-          <a:fillRef idx="3">
-            <a:schemeClr val="accent1"/>
-          </a:fillRef>
-          <a:effectRef idx="2">
-            <a:schemeClr val="accent1"/>
-          </a:effectRef>
-          <a:fontRef idx="minor">
-            <a:schemeClr val="lt1"/>
-          </a:fontRef>
-        </p:style>
-        <p:txBody>
-          <a:bodyPr rtlCol="0" anchor="ctr"/>
-          <a:lstStyle/>
-          <a:p>
-            <a:pPr algn="ctr"/>
-          </a:p>
-        </p:txBody>
-      </p:sp>
-      <p:pic>
-        <p:nvPicPr>
-          <p:cNvPr id="9" name="Picture 8" descr="greedy-vs-beam.png"/>
-          <p:cNvPicPr>
-            <a:picLocks noChangeAspect="1"/>
-          </p:cNvPicPr>
-          <p:nvPr/>
-        </p:nvPicPr>
-        <p:blipFill>
-          <a:blip r:embed="rId3"/>
-          <a:stretch>
-            <a:fillRect/>
-          </a:stretch>
-        </p:blipFill>
-        <p:spPr>
-          <a:xfrm>
-            <a:off x="898663" y="2130552"/>
-            <a:ext cx="10272753" cy="3703320"/>
-          </a:xfrm>
-          <a:prstGeom prst="rect">
-            <a:avLst/>
-          </a:prstGeom>
-        </p:spPr>
-      </p:pic>
-      <p:sp>
-        <p:nvSpPr>
-          <p:cNvPr id="10" name="TextBox 9"/>
-          <p:cNvSpPr txBox="1"/>
-          <p:nvPr/>
-        </p:nvSpPr>
-        <p:spPr>
-          <a:xfrm>
-            <a:off x="548640" y="6309360"/>
-            <a:ext cx="10972800" cy="228600"/>
-          </a:xfrm>
-          <a:prstGeom prst="rect">
-            <a:avLst/>
-          </a:prstGeom>
-          <a:noFill/>
-        </p:spPr>
-        <p:txBody>
-          <a:bodyPr wrap="square" anchor="t">
-            <a:spAutoFit/>
-          </a:bodyPr>
-          <a:lstStyle/>
-          <a:p>
-            <a:pPr algn="l"/>
-            <a:r>
-              <a:rPr sz="1100" b="0">
-                <a:solidFill>
-                  <a:srgbClr val="5A5470"/>
-                </a:solidFill>
-                <a:latin typeface="DIN Next LT W23"/>
-                <a:ea typeface="DIN Next LT W23"/>
-                <a:cs typeface="DIN Next LT W23"/>
-              </a:rPr>
-              <a:t>Typical beam sizes are moderate (e.g., 4-10) to balance quality and cost.</a:t>
-            </a:r>
-          </a:p>
-        </p:txBody>
-      </p:sp>
-      <p:sp>
-        <p:nvSpPr>
-          <p:cNvPr id="11" name="Rectangle 10"/>
-          <p:cNvSpPr/>
-          <p:nvPr/>
-        </p:nvSpPr>
-        <p:spPr>
-          <a:xfrm>
-            <a:off x="548640" y="6446520"/>
-            <a:ext cx="11064240" cy="10972"/>
-          </a:xfrm>
-          <a:prstGeom prst="rect">
-            <a:avLst/>
-          </a:prstGeom>
-          <a:solidFill>
-            <a:srgbClr val="5234B7"/>
-          </a:solidFill>
-          <a:ln>
-            <a:noFill/>
-          </a:ln>
-          <a:effectLst/>
-        </p:spPr>
-        <p:style>
-          <a:lnRef idx="1">
-            <a:schemeClr val="accent1"/>
-          </a:lnRef>
-          <a:fillRef idx="3">
-            <a:schemeClr val="accent1"/>
-          </a:fillRef>
-          <a:effectRef idx="2">
-            <a:schemeClr val="accent1"/>
-          </a:effectRef>
-          <a:fontRef idx="minor">
-            <a:schemeClr val="lt1"/>
-          </a:fontRef>
-        </p:style>
-        <p:txBody>
-          <a:bodyPr rtlCol="0" anchor="ctr"/>
-          <a:lstStyle/>
-          <a:p>
-            <a:pPr algn="ctr"/>
-          </a:p>
-        </p:txBody>
-      </p:sp>
-      <p:sp>
-        <p:nvSpPr>
-          <p:cNvPr id="12" name="TextBox 11"/>
-          <p:cNvSpPr txBox="1"/>
-          <p:nvPr/>
-        </p:nvSpPr>
-        <p:spPr>
-          <a:xfrm>
-            <a:off x="548640" y="6510528"/>
-            <a:ext cx="2743200" cy="256032"/>
-          </a:xfrm>
-          <a:prstGeom prst="rect">
-            <a:avLst/>
-          </a:prstGeom>
-          <a:noFill/>
-        </p:spPr>
-        <p:txBody>
-          <a:bodyPr wrap="square" anchor="t">
-            <a:spAutoFit/>
-          </a:bodyPr>
-          <a:lstStyle/>
-          <a:p>
-            <a:pPr algn="l"/>
-            <a:r>
-              <a:rPr sz="1100" b="1">
-                <a:solidFill>
-                  <a:srgbClr val="5234B7"/>
-                </a:solidFill>
-                <a:latin typeface="DIN Next LT W23"/>
-                <a:ea typeface="DIN Next LT W23"/>
-                <a:cs typeface="DIN Next LT W23"/>
-              </a:rPr>
-              <a:t>ETRA</a:t>
-            </a:r>
-          </a:p>
-        </p:txBody>
-      </p:sp>
-      <p:sp>
-        <p:nvSpPr>
-          <p:cNvPr id="13" name="TextBox 12"/>
-          <p:cNvSpPr txBox="1"/>
-          <p:nvPr/>
-        </p:nvSpPr>
-        <p:spPr>
-          <a:xfrm>
-            <a:off x="9601200" y="6510528"/>
-            <a:ext cx="2011680" cy="256032"/>
-          </a:xfrm>
-          <a:prstGeom prst="rect">
-            <a:avLst/>
-          </a:prstGeom>
-          <a:noFill/>
-        </p:spPr>
-        <p:txBody>
-          <a:bodyPr wrap="square" anchor="t">
-            <a:spAutoFit/>
-          </a:bodyPr>
-          <a:lstStyle/>
-          <a:p>
-            <a:pPr algn="r"/>
-            <a:r>
-              <a:rPr sz="1100" b="0">
-                <a:solidFill>
-                  <a:srgbClr val="5A5470"/>
-                </a:solidFill>
-                <a:latin typeface="DIN Next LT W23"/>
-                <a:ea typeface="DIN Next LT W23"/>
-                <a:cs typeface="DIN Next LT W23"/>
-              </a:rPr>
-              <a:t>45  /  54</a:t>
-            </a:r>
-          </a:p>
-        </p:txBody>
-      </p:sp>
-    </p:spTree>
-  </p:cSld>
-  <p:clrMapOvr>
-    <a:masterClrMapping/>
-  </p:clrMapOvr>
-</p:sld>
-</file>
-
-<file path=ppt/slides/slide46.xml><?xml version="1.0" encoding="utf-8"?>
 <p:sld xmlns:a="http://schemas.openxmlformats.org/drawingml/2006/main" xmlns:p="http://schemas.openxmlformats.org/presentationml/2006/main" xmlns:r="http://schemas.openxmlformats.org/officeDocument/2006/relationships">
   <p:cSld>
     <p:bg>
@@ -30180,7 +29438,633 @@
                 <a:ea typeface="DIN Next LT W23"/>
                 <a:cs typeface="DIN Next LT W23"/>
               </a:rPr>
-              <a:t>46  /  54</a:t>
+              <a:t>45  /  53</a:t>
+            </a:r>
+          </a:p>
+        </p:txBody>
+      </p:sp>
+    </p:spTree>
+  </p:cSld>
+  <p:clrMapOvr>
+    <a:masterClrMapping/>
+  </p:clrMapOvr>
+</p:sld>
+</file>
+
+<file path=ppt/slides/slide46.xml><?xml version="1.0" encoding="utf-8"?>
+<p:sld xmlns:a="http://schemas.openxmlformats.org/drawingml/2006/main" xmlns:p="http://schemas.openxmlformats.org/presentationml/2006/main" xmlns:r="http://schemas.openxmlformats.org/officeDocument/2006/relationships">
+  <p:cSld>
+    <p:bg>
+      <p:bgPr>
+        <a:solidFill>
+          <a:srgbClr val="FAF8FF"/>
+        </a:solidFill>
+        <a:effectLst/>
+      </p:bgPr>
+    </p:bg>
+    <p:spTree>
+      <p:nvGrpSpPr>
+        <p:cNvPr id="1" name=""/>
+        <p:cNvGrpSpPr/>
+        <p:nvPr/>
+      </p:nvGrpSpPr>
+      <p:grpSpPr/>
+      <p:sp>
+        <p:nvSpPr>
+          <p:cNvPr id="2" name="Rectangle 1"/>
+          <p:cNvSpPr/>
+          <p:nvPr/>
+        </p:nvSpPr>
+        <p:spPr>
+          <a:xfrm>
+            <a:off x="12136831" y="0"/>
+            <a:ext cx="54864" cy="6858000"/>
+          </a:xfrm>
+          <a:prstGeom prst="rect">
+            <a:avLst/>
+          </a:prstGeom>
+          <a:solidFill>
+            <a:srgbClr val="5234B7"/>
+          </a:solidFill>
+          <a:ln>
+            <a:noFill/>
+          </a:ln>
+          <a:effectLst/>
+        </p:spPr>
+        <p:style>
+          <a:lnRef idx="1">
+            <a:schemeClr val="accent1"/>
+          </a:lnRef>
+          <a:fillRef idx="3">
+            <a:schemeClr val="accent1"/>
+          </a:fillRef>
+          <a:effectRef idx="2">
+            <a:schemeClr val="accent1"/>
+          </a:effectRef>
+          <a:fontRef idx="minor">
+            <a:schemeClr val="lt1"/>
+          </a:fontRef>
+        </p:style>
+        <p:txBody>
+          <a:bodyPr rtlCol="0" anchor="ctr"/>
+          <a:lstStyle/>
+          <a:p>
+            <a:pPr algn="ctr"/>
+          </a:p>
+        </p:txBody>
+      </p:sp>
+      <p:pic>
+        <p:nvPicPr>
+          <p:cNvPr id="3" name="Picture 2" descr="etra-wordmark.png"/>
+          <p:cNvPicPr>
+            <a:picLocks noChangeAspect="1"/>
+          </p:cNvPicPr>
+          <p:nvPr/>
+        </p:nvPicPr>
+        <p:blipFill>
+          <a:blip r:embed="rId2"/>
+          <a:stretch>
+            <a:fillRect/>
+          </a:stretch>
+        </p:blipFill>
+        <p:spPr>
+          <a:xfrm>
+            <a:off x="10561320" y="411480"/>
+            <a:ext cx="1206201" cy="320040"/>
+          </a:xfrm>
+          <a:prstGeom prst="rect">
+            <a:avLst/>
+          </a:prstGeom>
+        </p:spPr>
+      </p:pic>
+      <p:sp>
+        <p:nvSpPr>
+          <p:cNvPr id="4" name="TextBox 3"/>
+          <p:cNvSpPr txBox="1"/>
+          <p:nvPr/>
+        </p:nvSpPr>
+        <p:spPr>
+          <a:xfrm>
+            <a:off x="548640" y="438912"/>
+            <a:ext cx="7772400" cy="274320"/>
+          </a:xfrm>
+          <a:prstGeom prst="rect">
+            <a:avLst/>
+          </a:prstGeom>
+          <a:noFill/>
+        </p:spPr>
+        <p:txBody>
+          <a:bodyPr wrap="square" anchor="t">
+            <a:spAutoFit/>
+          </a:bodyPr>
+          <a:lstStyle/>
+          <a:p>
+            <a:pPr algn="l"/>
+            <a:r>
+              <a:rPr sz="1200" b="0">
+                <a:solidFill>
+                  <a:srgbClr val="5A5470"/>
+                </a:solidFill>
+                <a:latin typeface="DIN Next LT W23"/>
+                <a:ea typeface="DIN Next LT W23"/>
+                <a:cs typeface="DIN Next LT W23"/>
+              </a:rPr>
+              <a:t>S08  ·  NLP</a:t>
+            </a:r>
+          </a:p>
+        </p:txBody>
+      </p:sp>
+      <p:sp>
+        <p:nvSpPr>
+          <p:cNvPr id="5" name="Rectangle 4"/>
+          <p:cNvSpPr/>
+          <p:nvPr/>
+        </p:nvSpPr>
+        <p:spPr>
+          <a:xfrm>
+            <a:off x="548640" y="822960"/>
+            <a:ext cx="11064240" cy="10972"/>
+          </a:xfrm>
+          <a:prstGeom prst="rect">
+            <a:avLst/>
+          </a:prstGeom>
+          <a:solidFill>
+            <a:srgbClr val="E4DCF4"/>
+          </a:solidFill>
+          <a:ln>
+            <a:noFill/>
+          </a:ln>
+          <a:effectLst/>
+        </p:spPr>
+        <p:style>
+          <a:lnRef idx="1">
+            <a:schemeClr val="accent1"/>
+          </a:lnRef>
+          <a:fillRef idx="3">
+            <a:schemeClr val="accent1"/>
+          </a:fillRef>
+          <a:effectRef idx="2">
+            <a:schemeClr val="accent1"/>
+          </a:effectRef>
+          <a:fontRef idx="minor">
+            <a:schemeClr val="lt1"/>
+          </a:fontRef>
+        </p:style>
+        <p:txBody>
+          <a:bodyPr rtlCol="0" anchor="ctr"/>
+          <a:lstStyle/>
+          <a:p>
+            <a:pPr algn="ctr"/>
+          </a:p>
+        </p:txBody>
+      </p:sp>
+      <p:sp>
+        <p:nvSpPr>
+          <p:cNvPr id="6" name="TextBox 5"/>
+          <p:cNvSpPr txBox="1"/>
+          <p:nvPr/>
+        </p:nvSpPr>
+        <p:spPr>
+          <a:xfrm>
+            <a:off x="548640" y="1024128"/>
+            <a:ext cx="10241280" cy="566928"/>
+          </a:xfrm>
+          <a:prstGeom prst="rect">
+            <a:avLst/>
+          </a:prstGeom>
+          <a:noFill/>
+        </p:spPr>
+        <p:txBody>
+          <a:bodyPr wrap="square" anchor="t">
+            <a:spAutoFit/>
+          </a:bodyPr>
+          <a:lstStyle/>
+          <a:p>
+            <a:pPr algn="l"/>
+            <a:r>
+              <a:rPr sz="3200" b="1">
+                <a:solidFill>
+                  <a:srgbClr val="5234B7"/>
+                </a:solidFill>
+                <a:latin typeface="DIN Next LT W23"/>
+                <a:ea typeface="DIN Next LT W23"/>
+                <a:cs typeface="DIN Next LT W23"/>
+              </a:rPr>
+              <a:t>Information Bottleneck in Basic Seq2Seq</a:t>
+            </a:r>
+          </a:p>
+        </p:txBody>
+      </p:sp>
+      <p:sp>
+        <p:nvSpPr>
+          <p:cNvPr id="7" name="TextBox 6"/>
+          <p:cNvSpPr txBox="1"/>
+          <p:nvPr/>
+        </p:nvSpPr>
+        <p:spPr>
+          <a:xfrm>
+            <a:off x="548640" y="1591056"/>
+            <a:ext cx="10241280" cy="310896"/>
+          </a:xfrm>
+          <a:prstGeom prst="rect">
+            <a:avLst/>
+          </a:prstGeom>
+          <a:noFill/>
+        </p:spPr>
+        <p:txBody>
+          <a:bodyPr wrap="square" anchor="t">
+            <a:spAutoFit/>
+          </a:bodyPr>
+          <a:lstStyle/>
+          <a:p>
+            <a:pPr algn="l"/>
+            <a:r>
+              <a:rPr sz="1500" b="0">
+                <a:solidFill>
+                  <a:srgbClr val="5A5470"/>
+                </a:solidFill>
+                <a:latin typeface="DIN Next LT W23"/>
+                <a:ea typeface="DIN Next LT W23"/>
+                <a:cs typeface="DIN Next LT W23"/>
+              </a:rPr>
+              <a:t>One vector cannot carry the whole source</a:t>
+            </a:r>
+          </a:p>
+        </p:txBody>
+      </p:sp>
+      <p:sp>
+        <p:nvSpPr>
+          <p:cNvPr id="8" name="TextBox 7"/>
+          <p:cNvSpPr txBox="1"/>
+          <p:nvPr/>
+        </p:nvSpPr>
+        <p:spPr>
+          <a:xfrm>
+            <a:off x="548640" y="1993392"/>
+            <a:ext cx="320040" cy="384048"/>
+          </a:xfrm>
+          <a:prstGeom prst="rect">
+            <a:avLst/>
+          </a:prstGeom>
+          <a:noFill/>
+        </p:spPr>
+        <p:txBody>
+          <a:bodyPr wrap="square" anchor="t">
+            <a:spAutoFit/>
+          </a:bodyPr>
+          <a:lstStyle/>
+          <a:p>
+            <a:pPr algn="l"/>
+            <a:r>
+              <a:rPr sz="1400" b="0">
+                <a:solidFill>
+                  <a:srgbClr val="9E59CD"/>
+                </a:solidFill>
+                <a:latin typeface="DIN Next LT W23"/>
+                <a:ea typeface="DIN Next LT W23"/>
+                <a:cs typeface="DIN Next LT W23"/>
+              </a:rPr>
+              <a:t>–</a:t>
+            </a:r>
+          </a:p>
+        </p:txBody>
+      </p:sp>
+      <p:sp>
+        <p:nvSpPr>
+          <p:cNvPr id="9" name="TextBox 8"/>
+          <p:cNvSpPr txBox="1"/>
+          <p:nvPr/>
+        </p:nvSpPr>
+        <p:spPr>
+          <a:xfrm>
+            <a:off x="914400" y="1993392"/>
+            <a:ext cx="9875519" cy="384048"/>
+          </a:xfrm>
+          <a:prstGeom prst="rect">
+            <a:avLst/>
+          </a:prstGeom>
+          <a:noFill/>
+        </p:spPr>
+        <p:txBody>
+          <a:bodyPr wrap="square" anchor="t">
+            <a:spAutoFit/>
+          </a:bodyPr>
+          <a:lstStyle/>
+          <a:p>
+            <a:pPr algn="l"/>
+            <a:r>
+              <a:rPr sz="1400" b="0">
+                <a:solidFill>
+                  <a:srgbClr val="121018"/>
+                </a:solidFill>
+                <a:latin typeface="DIN Next LT W23"/>
+                <a:ea typeface="DIN Next LT W23"/>
+                <a:cs typeface="DIN Next LT W23"/>
+              </a:rPr>
+              <a:t>Compressing a full source sentence into one fixed vector can lose detail.</a:t>
+            </a:r>
+          </a:p>
+        </p:txBody>
+      </p:sp>
+      <p:sp>
+        <p:nvSpPr>
+          <p:cNvPr id="10" name="TextBox 9"/>
+          <p:cNvSpPr txBox="1"/>
+          <p:nvPr/>
+        </p:nvSpPr>
+        <p:spPr>
+          <a:xfrm>
+            <a:off x="548640" y="2468880"/>
+            <a:ext cx="320040" cy="384048"/>
+          </a:xfrm>
+          <a:prstGeom prst="rect">
+            <a:avLst/>
+          </a:prstGeom>
+          <a:noFill/>
+        </p:spPr>
+        <p:txBody>
+          <a:bodyPr wrap="square" anchor="t">
+            <a:spAutoFit/>
+          </a:bodyPr>
+          <a:lstStyle/>
+          <a:p>
+            <a:pPr algn="l"/>
+            <a:r>
+              <a:rPr sz="1400" b="0">
+                <a:solidFill>
+                  <a:srgbClr val="9E59CD"/>
+                </a:solidFill>
+                <a:latin typeface="DIN Next LT W23"/>
+                <a:ea typeface="DIN Next LT W23"/>
+                <a:cs typeface="DIN Next LT W23"/>
+              </a:rPr>
+              <a:t>–</a:t>
+            </a:r>
+          </a:p>
+        </p:txBody>
+      </p:sp>
+      <p:sp>
+        <p:nvSpPr>
+          <p:cNvPr id="11" name="TextBox 10"/>
+          <p:cNvSpPr txBox="1"/>
+          <p:nvPr/>
+        </p:nvSpPr>
+        <p:spPr>
+          <a:xfrm>
+            <a:off x="914400" y="2468880"/>
+            <a:ext cx="9875519" cy="384048"/>
+          </a:xfrm>
+          <a:prstGeom prst="rect">
+            <a:avLst/>
+          </a:prstGeom>
+          <a:noFill/>
+        </p:spPr>
+        <p:txBody>
+          <a:bodyPr wrap="square" anchor="t">
+            <a:spAutoFit/>
+          </a:bodyPr>
+          <a:lstStyle/>
+          <a:p>
+            <a:pPr algn="l"/>
+            <a:r>
+              <a:rPr sz="1400" b="0">
+                <a:solidFill>
+                  <a:srgbClr val="121018"/>
+                </a:solidFill>
+                <a:latin typeface="DIN Next LT W23"/>
+                <a:ea typeface="DIN Next LT W23"/>
+                <a:cs typeface="DIN Next LT W23"/>
+              </a:rPr>
+              <a:t>Longer/complex inputs worsen the bottleneck effect.</a:t>
+            </a:r>
+          </a:p>
+        </p:txBody>
+      </p:sp>
+      <p:sp>
+        <p:nvSpPr>
+          <p:cNvPr id="12" name="TextBox 11"/>
+          <p:cNvSpPr txBox="1"/>
+          <p:nvPr/>
+        </p:nvSpPr>
+        <p:spPr>
+          <a:xfrm>
+            <a:off x="548640" y="2944368"/>
+            <a:ext cx="320040" cy="384048"/>
+          </a:xfrm>
+          <a:prstGeom prst="rect">
+            <a:avLst/>
+          </a:prstGeom>
+          <a:noFill/>
+        </p:spPr>
+        <p:txBody>
+          <a:bodyPr wrap="square" anchor="t">
+            <a:spAutoFit/>
+          </a:bodyPr>
+          <a:lstStyle/>
+          <a:p>
+            <a:pPr algn="l"/>
+            <a:r>
+              <a:rPr sz="1400" b="0">
+                <a:solidFill>
+                  <a:srgbClr val="9E59CD"/>
+                </a:solidFill>
+                <a:latin typeface="DIN Next LT W23"/>
+                <a:ea typeface="DIN Next LT W23"/>
+                <a:cs typeface="DIN Next LT W23"/>
+              </a:rPr>
+              <a:t>–</a:t>
+            </a:r>
+          </a:p>
+        </p:txBody>
+      </p:sp>
+      <p:sp>
+        <p:nvSpPr>
+          <p:cNvPr id="13" name="TextBox 12"/>
+          <p:cNvSpPr txBox="1"/>
+          <p:nvPr/>
+        </p:nvSpPr>
+        <p:spPr>
+          <a:xfrm>
+            <a:off x="914400" y="2944368"/>
+            <a:ext cx="9875519" cy="384048"/>
+          </a:xfrm>
+          <a:prstGeom prst="rect">
+            <a:avLst/>
+          </a:prstGeom>
+          <a:noFill/>
+        </p:spPr>
+        <p:txBody>
+          <a:bodyPr wrap="square" anchor="t">
+            <a:spAutoFit/>
+          </a:bodyPr>
+          <a:lstStyle/>
+          <a:p>
+            <a:pPr algn="l"/>
+            <a:r>
+              <a:rPr sz="1400" b="0">
+                <a:solidFill>
+                  <a:srgbClr val="121018"/>
+                </a:solidFill>
+                <a:latin typeface="DIN Next LT W23"/>
+                <a:ea typeface="DIN Next LT W23"/>
+                <a:cs typeface="DIN Next LT W23"/>
+              </a:rPr>
+              <a:t>Decoder needs different source details at different output steps.</a:t>
+            </a:r>
+          </a:p>
+        </p:txBody>
+      </p:sp>
+      <p:sp>
+        <p:nvSpPr>
+          <p:cNvPr id="14" name="TextBox 13"/>
+          <p:cNvSpPr txBox="1"/>
+          <p:nvPr/>
+        </p:nvSpPr>
+        <p:spPr>
+          <a:xfrm>
+            <a:off x="548640" y="5897880"/>
+            <a:ext cx="10972800" cy="274320"/>
+          </a:xfrm>
+          <a:prstGeom prst="rect">
+            <a:avLst/>
+          </a:prstGeom>
+          <a:noFill/>
+        </p:spPr>
+        <p:txBody>
+          <a:bodyPr wrap="square" anchor="t">
+            <a:spAutoFit/>
+          </a:bodyPr>
+          <a:lstStyle/>
+          <a:p>
+            <a:pPr algn="l"/>
+            <a:r>
+              <a:rPr sz="1200" b="0">
+                <a:solidFill>
+                  <a:srgbClr val="5A5470"/>
+                </a:solidFill>
+                <a:latin typeface="DIN Next LT W23"/>
+                <a:ea typeface="DIN Next LT W23"/>
+                <a:cs typeface="DIN Next LT W23"/>
+              </a:rPr>
+              <a:t>This motivates attention over all encoder hidden states.</a:t>
+            </a:r>
+          </a:p>
+        </p:txBody>
+      </p:sp>
+      <p:sp>
+        <p:nvSpPr>
+          <p:cNvPr id="15" name="Rectangle 14"/>
+          <p:cNvSpPr/>
+          <p:nvPr/>
+        </p:nvSpPr>
+        <p:spPr>
+          <a:xfrm>
+            <a:off x="548640" y="6446520"/>
+            <a:ext cx="11064240" cy="10972"/>
+          </a:xfrm>
+          <a:prstGeom prst="rect">
+            <a:avLst/>
+          </a:prstGeom>
+          <a:solidFill>
+            <a:srgbClr val="5234B7"/>
+          </a:solidFill>
+          <a:ln>
+            <a:noFill/>
+          </a:ln>
+          <a:effectLst/>
+        </p:spPr>
+        <p:style>
+          <a:lnRef idx="1">
+            <a:schemeClr val="accent1"/>
+          </a:lnRef>
+          <a:fillRef idx="3">
+            <a:schemeClr val="accent1"/>
+          </a:fillRef>
+          <a:effectRef idx="2">
+            <a:schemeClr val="accent1"/>
+          </a:effectRef>
+          <a:fontRef idx="minor">
+            <a:schemeClr val="lt1"/>
+          </a:fontRef>
+        </p:style>
+        <p:txBody>
+          <a:bodyPr rtlCol="0" anchor="ctr"/>
+          <a:lstStyle/>
+          <a:p>
+            <a:pPr algn="ctr"/>
+          </a:p>
+        </p:txBody>
+      </p:sp>
+      <p:sp>
+        <p:nvSpPr>
+          <p:cNvPr id="16" name="TextBox 15"/>
+          <p:cNvSpPr txBox="1"/>
+          <p:nvPr/>
+        </p:nvSpPr>
+        <p:spPr>
+          <a:xfrm>
+            <a:off x="548640" y="6510528"/>
+            <a:ext cx="2743200" cy="256032"/>
+          </a:xfrm>
+          <a:prstGeom prst="rect">
+            <a:avLst/>
+          </a:prstGeom>
+          <a:noFill/>
+        </p:spPr>
+        <p:txBody>
+          <a:bodyPr wrap="square" anchor="t">
+            <a:spAutoFit/>
+          </a:bodyPr>
+          <a:lstStyle/>
+          <a:p>
+            <a:pPr algn="l"/>
+            <a:r>
+              <a:rPr sz="1100" b="1">
+                <a:solidFill>
+                  <a:srgbClr val="5234B7"/>
+                </a:solidFill>
+                <a:latin typeface="DIN Next LT W23"/>
+                <a:ea typeface="DIN Next LT W23"/>
+                <a:cs typeface="DIN Next LT W23"/>
+              </a:rPr>
+              <a:t>ETRA</a:t>
+            </a:r>
+          </a:p>
+        </p:txBody>
+      </p:sp>
+      <p:sp>
+        <p:nvSpPr>
+          <p:cNvPr id="17" name="TextBox 16"/>
+          <p:cNvSpPr txBox="1"/>
+          <p:nvPr/>
+        </p:nvSpPr>
+        <p:spPr>
+          <a:xfrm>
+            <a:off x="9601200" y="6510528"/>
+            <a:ext cx="2011680" cy="256032"/>
+          </a:xfrm>
+          <a:prstGeom prst="rect">
+            <a:avLst/>
+          </a:prstGeom>
+          <a:noFill/>
+        </p:spPr>
+        <p:txBody>
+          <a:bodyPr wrap="square" anchor="t">
+            <a:spAutoFit/>
+          </a:bodyPr>
+          <a:lstStyle/>
+          <a:p>
+            <a:pPr algn="r"/>
+            <a:r>
+              <a:rPr sz="1100" b="0">
+                <a:solidFill>
+                  <a:srgbClr val="5A5470"/>
+                </a:solidFill>
+                <a:latin typeface="DIN Next LT W23"/>
+                <a:ea typeface="DIN Next LT W23"/>
+                <a:cs typeface="DIN Next LT W23"/>
+              </a:rPr>
+              <a:t>46  /  53</a:t>
             </a:r>
           </a:p>
         </p:txBody>
@@ -30392,7 +30276,7 @@
                 <a:ea typeface="DIN Next LT W23"/>
                 <a:cs typeface="DIN Next LT W23"/>
               </a:rPr>
-              <a:t>Information Bottleneck in Basic Seq2Seq</a:t>
+              <a:t>Attention as the Bottleneck Solution</a:t>
             </a:r>
           </a:p>
         </p:txBody>
@@ -30429,273 +30313,84 @@
                 <a:ea typeface="DIN Next LT W23"/>
                 <a:cs typeface="DIN Next LT W23"/>
               </a:rPr>
-              <a:t>One vector cannot carry the whole source</a:t>
-            </a:r>
-          </a:p>
-        </p:txBody>
-      </p:sp>
-      <p:sp>
-        <p:nvSpPr>
-          <p:cNvPr id="8" name="TextBox 7"/>
-          <p:cNvSpPr txBox="1"/>
+              <a:t>Look at relevant encoder positions</a:t>
+            </a:r>
+          </a:p>
+        </p:txBody>
+      </p:sp>
+      <p:sp>
+        <p:nvSpPr>
+          <p:cNvPr id="8" name="Rounded Rectangle 7"/>
+          <p:cNvSpPr/>
           <p:nvPr/>
         </p:nvSpPr>
         <p:spPr>
           <a:xfrm>
             <a:off x="548640" y="1993392"/>
-            <a:ext cx="320040" cy="384048"/>
-          </a:xfrm>
-          <a:prstGeom prst="rect">
-            <a:avLst/>
-          </a:prstGeom>
-          <a:noFill/>
-        </p:spPr>
-        <p:txBody>
-          <a:bodyPr wrap="square" anchor="t">
-            <a:spAutoFit/>
-          </a:bodyPr>
-          <a:lstStyle/>
-          <a:p>
-            <a:pPr algn="l"/>
-            <a:r>
-              <a:rPr sz="1400" b="0">
-                <a:solidFill>
-                  <a:srgbClr val="9E59CD"/>
-                </a:solidFill>
-                <a:latin typeface="DIN Next LT W23"/>
-                <a:ea typeface="DIN Next LT W23"/>
-                <a:cs typeface="DIN Next LT W23"/>
-              </a:rPr>
-              <a:t>–</a:t>
-            </a:r>
-          </a:p>
-        </p:txBody>
-      </p:sp>
-      <p:sp>
-        <p:nvSpPr>
-          <p:cNvPr id="9" name="TextBox 8"/>
-          <p:cNvSpPr txBox="1"/>
-          <p:nvPr/>
-        </p:nvSpPr>
-        <p:spPr>
-          <a:xfrm>
-            <a:off x="914400" y="1993392"/>
-            <a:ext cx="9875519" cy="384048"/>
-          </a:xfrm>
-          <a:prstGeom prst="rect">
-            <a:avLst/>
-          </a:prstGeom>
-          <a:noFill/>
-        </p:spPr>
-        <p:txBody>
-          <a:bodyPr wrap="square" anchor="t">
-            <a:spAutoFit/>
-          </a:bodyPr>
-          <a:lstStyle/>
-          <a:p>
-            <a:pPr algn="l"/>
-            <a:r>
-              <a:rPr sz="1400" b="0">
-                <a:solidFill>
-                  <a:srgbClr val="121018"/>
-                </a:solidFill>
-                <a:latin typeface="DIN Next LT W23"/>
-                <a:ea typeface="DIN Next LT W23"/>
-                <a:cs typeface="DIN Next LT W23"/>
-              </a:rPr>
-              <a:t>Compressing a full source sentence into one fixed vector can lose detail.</a:t>
-            </a:r>
-          </a:p>
-        </p:txBody>
-      </p:sp>
-      <p:sp>
-        <p:nvSpPr>
-          <p:cNvPr id="10" name="TextBox 9"/>
-          <p:cNvSpPr txBox="1"/>
-          <p:nvPr/>
-        </p:nvSpPr>
-        <p:spPr>
-          <a:xfrm>
-            <a:off x="548640" y="2468880"/>
-            <a:ext cx="320040" cy="384048"/>
-          </a:xfrm>
-          <a:prstGeom prst="rect">
-            <a:avLst/>
-          </a:prstGeom>
-          <a:noFill/>
-        </p:spPr>
-        <p:txBody>
-          <a:bodyPr wrap="square" anchor="t">
-            <a:spAutoFit/>
-          </a:bodyPr>
-          <a:lstStyle/>
-          <a:p>
-            <a:pPr algn="l"/>
-            <a:r>
-              <a:rPr sz="1400" b="0">
-                <a:solidFill>
-                  <a:srgbClr val="9E59CD"/>
-                </a:solidFill>
-                <a:latin typeface="DIN Next LT W23"/>
-                <a:ea typeface="DIN Next LT W23"/>
-                <a:cs typeface="DIN Next LT W23"/>
-              </a:rPr>
-              <a:t>–</a:t>
-            </a:r>
-          </a:p>
-        </p:txBody>
-      </p:sp>
-      <p:sp>
-        <p:nvSpPr>
-          <p:cNvPr id="11" name="TextBox 10"/>
-          <p:cNvSpPr txBox="1"/>
-          <p:nvPr/>
-        </p:nvSpPr>
-        <p:spPr>
-          <a:xfrm>
-            <a:off x="914400" y="2468880"/>
-            <a:ext cx="9875519" cy="384048"/>
-          </a:xfrm>
-          <a:prstGeom prst="rect">
-            <a:avLst/>
-          </a:prstGeom>
-          <a:noFill/>
-        </p:spPr>
-        <p:txBody>
-          <a:bodyPr wrap="square" anchor="t">
-            <a:spAutoFit/>
-          </a:bodyPr>
-          <a:lstStyle/>
-          <a:p>
-            <a:pPr algn="l"/>
-            <a:r>
-              <a:rPr sz="1400" b="0">
-                <a:solidFill>
-                  <a:srgbClr val="121018"/>
-                </a:solidFill>
-                <a:latin typeface="DIN Next LT W23"/>
-                <a:ea typeface="DIN Next LT W23"/>
-                <a:cs typeface="DIN Next LT W23"/>
-              </a:rPr>
-              <a:t>Longer/complex inputs worsen the bottleneck effect.</a:t>
-            </a:r>
-          </a:p>
-        </p:txBody>
-      </p:sp>
-      <p:sp>
-        <p:nvSpPr>
-          <p:cNvPr id="12" name="TextBox 11"/>
-          <p:cNvSpPr txBox="1"/>
-          <p:nvPr/>
-        </p:nvSpPr>
-        <p:spPr>
-          <a:xfrm>
-            <a:off x="548640" y="2944368"/>
-            <a:ext cx="320040" cy="384048"/>
-          </a:xfrm>
-          <a:prstGeom prst="rect">
-            <a:avLst/>
-          </a:prstGeom>
-          <a:noFill/>
-        </p:spPr>
-        <p:txBody>
-          <a:bodyPr wrap="square" anchor="t">
-            <a:spAutoFit/>
-          </a:bodyPr>
-          <a:lstStyle/>
-          <a:p>
-            <a:pPr algn="l"/>
-            <a:r>
-              <a:rPr sz="1400" b="0">
-                <a:solidFill>
-                  <a:srgbClr val="9E59CD"/>
-                </a:solidFill>
-                <a:latin typeface="DIN Next LT W23"/>
-                <a:ea typeface="DIN Next LT W23"/>
-                <a:cs typeface="DIN Next LT W23"/>
-              </a:rPr>
-              <a:t>–</a:t>
-            </a:r>
-          </a:p>
-        </p:txBody>
-      </p:sp>
-      <p:sp>
-        <p:nvSpPr>
-          <p:cNvPr id="13" name="TextBox 12"/>
-          <p:cNvSpPr txBox="1"/>
-          <p:nvPr/>
-        </p:nvSpPr>
-        <p:spPr>
-          <a:xfrm>
-            <a:off x="914400" y="2944368"/>
-            <a:ext cx="9875519" cy="384048"/>
-          </a:xfrm>
-          <a:prstGeom prst="rect">
-            <a:avLst/>
-          </a:prstGeom>
-          <a:noFill/>
-        </p:spPr>
-        <p:txBody>
-          <a:bodyPr wrap="square" anchor="t">
-            <a:spAutoFit/>
-          </a:bodyPr>
-          <a:lstStyle/>
-          <a:p>
-            <a:pPr algn="l"/>
-            <a:r>
-              <a:rPr sz="1400" b="0">
-                <a:solidFill>
-                  <a:srgbClr val="121018"/>
-                </a:solidFill>
-                <a:latin typeface="DIN Next LT W23"/>
-                <a:ea typeface="DIN Next LT W23"/>
-                <a:cs typeface="DIN Next LT W23"/>
-              </a:rPr>
-              <a:t>Decoder needs different source details at different output steps.</a:t>
-            </a:r>
-          </a:p>
-        </p:txBody>
-      </p:sp>
-      <p:sp>
-        <p:nvSpPr>
-          <p:cNvPr id="14" name="TextBox 13"/>
-          <p:cNvSpPr txBox="1"/>
-          <p:nvPr/>
-        </p:nvSpPr>
-        <p:spPr>
-          <a:xfrm>
-            <a:off x="548640" y="5897880"/>
-            <a:ext cx="10972800" cy="274320"/>
-          </a:xfrm>
-          <a:prstGeom prst="rect">
-            <a:avLst/>
-          </a:prstGeom>
-          <a:noFill/>
-        </p:spPr>
-        <p:txBody>
-          <a:bodyPr wrap="square" anchor="t">
-            <a:spAutoFit/>
-          </a:bodyPr>
-          <a:lstStyle/>
-          <a:p>
-            <a:pPr algn="l"/>
-            <a:r>
-              <a:rPr sz="1200" b="0">
-                <a:solidFill>
-                  <a:srgbClr val="5A5470"/>
-                </a:solidFill>
-                <a:latin typeface="DIN Next LT W23"/>
-                <a:ea typeface="DIN Next LT W23"/>
-                <a:cs typeface="DIN Next LT W23"/>
-              </a:rPr>
-              <a:t>This motivates attention over all encoder hidden states.</a:t>
-            </a:r>
-          </a:p>
-        </p:txBody>
-      </p:sp>
-      <p:sp>
-        <p:nvSpPr>
-          <p:cNvPr id="15" name="Rectangle 14"/>
+            <a:ext cx="10972800" cy="3977639"/>
+          </a:xfrm>
+          <a:prstGeom prst="roundRect">
+            <a:avLst>
+              <a:gd name="adj" fmla="val 10000"/>
+            </a:avLst>
+          </a:prstGeom>
+          <a:solidFill>
+            <a:srgbClr val="EEE8FA"/>
+          </a:solidFill>
+          <a:ln>
+            <a:noFill/>
+          </a:ln>
+          <a:effectLst/>
+        </p:spPr>
+        <p:style>
+          <a:lnRef idx="1">
+            <a:schemeClr val="accent1"/>
+          </a:lnRef>
+          <a:fillRef idx="3">
+            <a:schemeClr val="accent1"/>
+          </a:fillRef>
+          <a:effectRef idx="2">
+            <a:schemeClr val="accent1"/>
+          </a:effectRef>
+          <a:fontRef idx="minor">
+            <a:schemeClr val="lt1"/>
+          </a:fontRef>
+        </p:style>
+        <p:txBody>
+          <a:bodyPr rtlCol="0" anchor="ctr"/>
+          <a:lstStyle/>
+          <a:p>
+            <a:pPr algn="ctr"/>
+          </a:p>
+        </p:txBody>
+      </p:sp>
+      <p:pic>
+        <p:nvPicPr>
+          <p:cNvPr id="9" name="Picture 8" descr="bottleneck-attention.png"/>
+          <p:cNvPicPr>
+            <a:picLocks noChangeAspect="1"/>
+          </p:cNvPicPr>
+          <p:nvPr/>
+        </p:nvPicPr>
+        <p:blipFill>
+          <a:blip r:embed="rId3"/>
+          <a:stretch>
+            <a:fillRect/>
+          </a:stretch>
+        </p:blipFill>
+        <p:spPr>
+          <a:xfrm>
+            <a:off x="1021201" y="2130552"/>
+            <a:ext cx="10027677" cy="3703320"/>
+          </a:xfrm>
+          <a:prstGeom prst="rect">
+            <a:avLst/>
+          </a:prstGeom>
+        </p:spPr>
+      </p:pic>
+      <p:sp>
+        <p:nvSpPr>
+          <p:cNvPr id="10" name="Rectangle 9"/>
           <p:cNvSpPr/>
           <p:nvPr/>
         </p:nvSpPr>
@@ -30739,7 +30434,7 @@
       </p:sp>
       <p:sp>
         <p:nvSpPr>
-          <p:cNvPr id="16" name="TextBox 15"/>
+          <p:cNvPr id="11" name="TextBox 10"/>
           <p:cNvSpPr txBox="1"/>
           <p:nvPr/>
         </p:nvSpPr>
@@ -30776,7 +30471,7 @@
       </p:sp>
       <p:sp>
         <p:nvSpPr>
-          <p:cNvPr id="17" name="TextBox 16"/>
+          <p:cNvPr id="12" name="TextBox 11"/>
           <p:cNvSpPr txBox="1"/>
           <p:nvPr/>
         </p:nvSpPr>
@@ -30806,7 +30501,7 @@
                 <a:ea typeface="DIN Next LT W23"/>
                 <a:cs typeface="DIN Next LT W23"/>
               </a:rPr>
-              <a:t>47  /  54</a:t>
+              <a:t>47  /  53</a:t>
             </a:r>
           </a:p>
         </p:txBody>
@@ -31062,77 +30757,229 @@
       </p:sp>
       <p:sp>
         <p:nvSpPr>
-          <p:cNvPr id="8" name="Rounded Rectangle 7"/>
-          <p:cNvSpPr/>
+          <p:cNvPr id="8" name="TextBox 7"/>
+          <p:cNvSpPr txBox="1"/>
           <p:nvPr/>
         </p:nvSpPr>
         <p:spPr>
           <a:xfrm>
             <a:off x="548640" y="1993392"/>
-            <a:ext cx="10972800" cy="3977639"/>
-          </a:xfrm>
-          <a:prstGeom prst="roundRect">
-            <a:avLst>
-              <a:gd name="adj" fmla="val 10000"/>
-            </a:avLst>
-          </a:prstGeom>
-          <a:solidFill>
-            <a:srgbClr val="EEE8FA"/>
-          </a:solidFill>
-          <a:ln>
-            <a:noFill/>
-          </a:ln>
-          <a:effectLst/>
-        </p:spPr>
-        <p:style>
-          <a:lnRef idx="1">
-            <a:schemeClr val="accent1"/>
-          </a:lnRef>
-          <a:fillRef idx="3">
-            <a:schemeClr val="accent1"/>
-          </a:fillRef>
-          <a:effectRef idx="2">
-            <a:schemeClr val="accent1"/>
-          </a:effectRef>
-          <a:fontRef idx="minor">
-            <a:schemeClr val="lt1"/>
-          </a:fontRef>
-        </p:style>
-        <p:txBody>
-          <a:bodyPr rtlCol="0" anchor="ctr"/>
-          <a:lstStyle/>
-          <a:p>
-            <a:pPr algn="ctr"/>
-          </a:p>
-        </p:txBody>
-      </p:sp>
-      <p:pic>
-        <p:nvPicPr>
-          <p:cNvPr id="9" name="Picture 8" descr="bottleneck-attention.png"/>
-          <p:cNvPicPr>
-            <a:picLocks noChangeAspect="1"/>
-          </p:cNvPicPr>
-          <p:nvPr/>
-        </p:nvPicPr>
-        <p:blipFill>
-          <a:blip r:embed="rId3"/>
-          <a:stretch>
-            <a:fillRect/>
-          </a:stretch>
-        </p:blipFill>
-        <p:spPr>
-          <a:xfrm>
-            <a:off x="1021201" y="2130552"/>
-            <a:ext cx="10027677" cy="3703320"/>
-          </a:xfrm>
-          <a:prstGeom prst="rect">
-            <a:avLst/>
-          </a:prstGeom>
-        </p:spPr>
-      </p:pic>
-      <p:sp>
-        <p:nvSpPr>
-          <p:cNvPr id="10" name="Rectangle 9"/>
+            <a:ext cx="320040" cy="384048"/>
+          </a:xfrm>
+          <a:prstGeom prst="rect">
+            <a:avLst/>
+          </a:prstGeom>
+          <a:noFill/>
+        </p:spPr>
+        <p:txBody>
+          <a:bodyPr wrap="square" anchor="t">
+            <a:spAutoFit/>
+          </a:bodyPr>
+          <a:lstStyle/>
+          <a:p>
+            <a:pPr algn="l"/>
+            <a:r>
+              <a:rPr sz="1500" b="0">
+                <a:solidFill>
+                  <a:srgbClr val="9E59CD"/>
+                </a:solidFill>
+                <a:latin typeface="DIN Next LT W23"/>
+                <a:ea typeface="DIN Next LT W23"/>
+                <a:cs typeface="DIN Next LT W23"/>
+              </a:rPr>
+              <a:t>–</a:t>
+            </a:r>
+          </a:p>
+        </p:txBody>
+      </p:sp>
+      <p:sp>
+        <p:nvSpPr>
+          <p:cNvPr id="9" name="TextBox 8"/>
+          <p:cNvSpPr txBox="1"/>
+          <p:nvPr/>
+        </p:nvSpPr>
+        <p:spPr>
+          <a:xfrm>
+            <a:off x="914400" y="1993392"/>
+            <a:ext cx="9875519" cy="384048"/>
+          </a:xfrm>
+          <a:prstGeom prst="rect">
+            <a:avLst/>
+          </a:prstGeom>
+          <a:noFill/>
+        </p:spPr>
+        <p:txBody>
+          <a:bodyPr wrap="square" anchor="t">
+            <a:spAutoFit/>
+          </a:bodyPr>
+          <a:lstStyle/>
+          <a:p>
+            <a:pPr algn="l"/>
+            <a:r>
+              <a:rPr sz="1500" b="0">
+                <a:solidFill>
+                  <a:srgbClr val="121018"/>
+                </a:solidFill>
+                <a:latin typeface="DIN Next LT W23"/>
+                <a:ea typeface="DIN Next LT W23"/>
+                <a:cs typeface="DIN Next LT W23"/>
+              </a:rPr>
+              <a:t>Decoder attends to relevant encoder positions at each generation step.</a:t>
+            </a:r>
+          </a:p>
+        </p:txBody>
+      </p:sp>
+      <p:sp>
+        <p:nvSpPr>
+          <p:cNvPr id="10" name="TextBox 9"/>
+          <p:cNvSpPr txBox="1"/>
+          <p:nvPr/>
+        </p:nvSpPr>
+        <p:spPr>
+          <a:xfrm>
+            <a:off x="548640" y="2468880"/>
+            <a:ext cx="320040" cy="384048"/>
+          </a:xfrm>
+          <a:prstGeom prst="rect">
+            <a:avLst/>
+          </a:prstGeom>
+          <a:noFill/>
+        </p:spPr>
+        <p:txBody>
+          <a:bodyPr wrap="square" anchor="t">
+            <a:spAutoFit/>
+          </a:bodyPr>
+          <a:lstStyle/>
+          <a:p>
+            <a:pPr algn="l"/>
+            <a:r>
+              <a:rPr sz="1500" b="0">
+                <a:solidFill>
+                  <a:srgbClr val="9E59CD"/>
+                </a:solidFill>
+                <a:latin typeface="DIN Next LT W23"/>
+                <a:ea typeface="DIN Next LT W23"/>
+                <a:cs typeface="DIN Next LT W23"/>
+              </a:rPr>
+              <a:t>–</a:t>
+            </a:r>
+          </a:p>
+        </p:txBody>
+      </p:sp>
+      <p:sp>
+        <p:nvSpPr>
+          <p:cNvPr id="11" name="TextBox 10"/>
+          <p:cNvSpPr txBox="1"/>
+          <p:nvPr/>
+        </p:nvSpPr>
+        <p:spPr>
+          <a:xfrm>
+            <a:off x="914400" y="2468880"/>
+            <a:ext cx="9875519" cy="384048"/>
+          </a:xfrm>
+          <a:prstGeom prst="rect">
+            <a:avLst/>
+          </a:prstGeom>
+          <a:noFill/>
+        </p:spPr>
+        <p:txBody>
+          <a:bodyPr wrap="square" anchor="t">
+            <a:spAutoFit/>
+          </a:bodyPr>
+          <a:lstStyle/>
+          <a:p>
+            <a:pPr algn="l"/>
+            <a:r>
+              <a:rPr sz="1500" b="0">
+                <a:solidFill>
+                  <a:srgbClr val="121018"/>
+                </a:solidFill>
+                <a:latin typeface="DIN Next LT W23"/>
+                <a:ea typeface="DIN Next LT W23"/>
+                <a:cs typeface="DIN Next LT W23"/>
+              </a:rPr>
+              <a:t>Dynamic alignment improves translation adequacy and fluency.</a:t>
+            </a:r>
+          </a:p>
+        </p:txBody>
+      </p:sp>
+      <p:sp>
+        <p:nvSpPr>
+          <p:cNvPr id="12" name="TextBox 11"/>
+          <p:cNvSpPr txBox="1"/>
+          <p:nvPr/>
+        </p:nvSpPr>
+        <p:spPr>
+          <a:xfrm>
+            <a:off x="548640" y="2944368"/>
+            <a:ext cx="320040" cy="384048"/>
+          </a:xfrm>
+          <a:prstGeom prst="rect">
+            <a:avLst/>
+          </a:prstGeom>
+          <a:noFill/>
+        </p:spPr>
+        <p:txBody>
+          <a:bodyPr wrap="square" anchor="t">
+            <a:spAutoFit/>
+          </a:bodyPr>
+          <a:lstStyle/>
+          <a:p>
+            <a:pPr algn="l"/>
+            <a:r>
+              <a:rPr sz="1500" b="0">
+                <a:solidFill>
+                  <a:srgbClr val="9E59CD"/>
+                </a:solidFill>
+                <a:latin typeface="DIN Next LT W23"/>
+                <a:ea typeface="DIN Next LT W23"/>
+                <a:cs typeface="DIN Next LT W23"/>
+              </a:rPr>
+              <a:t>–</a:t>
+            </a:r>
+          </a:p>
+        </p:txBody>
+      </p:sp>
+      <p:sp>
+        <p:nvSpPr>
+          <p:cNvPr id="13" name="TextBox 12"/>
+          <p:cNvSpPr txBox="1"/>
+          <p:nvPr/>
+        </p:nvSpPr>
+        <p:spPr>
+          <a:xfrm>
+            <a:off x="914400" y="2944368"/>
+            <a:ext cx="9875519" cy="384048"/>
+          </a:xfrm>
+          <a:prstGeom prst="rect">
+            <a:avLst/>
+          </a:prstGeom>
+          <a:noFill/>
+        </p:spPr>
+        <p:txBody>
+          <a:bodyPr wrap="square" anchor="t">
+            <a:spAutoFit/>
+          </a:bodyPr>
+          <a:lstStyle/>
+          <a:p>
+            <a:pPr algn="l"/>
+            <a:r>
+              <a:rPr sz="1500" b="0">
+                <a:solidFill>
+                  <a:srgbClr val="121018"/>
+                </a:solidFill>
+                <a:latin typeface="DIN Next LT W23"/>
+                <a:ea typeface="DIN Next LT W23"/>
+                <a:cs typeface="DIN Next LT W23"/>
+              </a:rPr>
+              <a:t>Attention laid the foundation for transformer-dominant NMT systems.</a:t>
+            </a:r>
+          </a:p>
+        </p:txBody>
+      </p:sp>
+      <p:sp>
+        <p:nvSpPr>
+          <p:cNvPr id="14" name="Rectangle 13"/>
           <p:cNvSpPr/>
           <p:nvPr/>
         </p:nvSpPr>
@@ -31176,7 +31023,7 @@
       </p:sp>
       <p:sp>
         <p:nvSpPr>
-          <p:cNvPr id="11" name="TextBox 10"/>
+          <p:cNvPr id="15" name="TextBox 14"/>
           <p:cNvSpPr txBox="1"/>
           <p:nvPr/>
         </p:nvSpPr>
@@ -31213,7 +31060,7 @@
       </p:sp>
       <p:sp>
         <p:nvSpPr>
-          <p:cNvPr id="12" name="TextBox 11"/>
+          <p:cNvPr id="16" name="TextBox 15"/>
           <p:cNvSpPr txBox="1"/>
           <p:nvPr/>
         </p:nvSpPr>
@@ -31243,7 +31090,7 @@
                 <a:ea typeface="DIN Next LT W23"/>
                 <a:cs typeface="DIN Next LT W23"/>
               </a:rPr>
-              <a:t>48  /  54</a:t>
+              <a:t>48  /  53</a:t>
             </a:r>
           </a:p>
         </p:txBody>
@@ -31257,1291 +31104,6 @@
 </file>
 
 <file path=ppt/slides/slide49.xml><?xml version="1.0" encoding="utf-8"?>
-<p:sld xmlns:a="http://schemas.openxmlformats.org/drawingml/2006/main" xmlns:p="http://schemas.openxmlformats.org/presentationml/2006/main" xmlns:r="http://schemas.openxmlformats.org/officeDocument/2006/relationships">
-  <p:cSld>
-    <p:bg>
-      <p:bgPr>
-        <a:solidFill>
-          <a:srgbClr val="FAF8FF"/>
-        </a:solidFill>
-        <a:effectLst/>
-      </p:bgPr>
-    </p:bg>
-    <p:spTree>
-      <p:nvGrpSpPr>
-        <p:cNvPr id="1" name=""/>
-        <p:cNvGrpSpPr/>
-        <p:nvPr/>
-      </p:nvGrpSpPr>
-      <p:grpSpPr/>
-      <p:sp>
-        <p:nvSpPr>
-          <p:cNvPr id="2" name="Rectangle 1"/>
-          <p:cNvSpPr/>
-          <p:nvPr/>
-        </p:nvSpPr>
-        <p:spPr>
-          <a:xfrm>
-            <a:off x="12136831" y="0"/>
-            <a:ext cx="54864" cy="6858000"/>
-          </a:xfrm>
-          <a:prstGeom prst="rect">
-            <a:avLst/>
-          </a:prstGeom>
-          <a:solidFill>
-            <a:srgbClr val="5234B7"/>
-          </a:solidFill>
-          <a:ln>
-            <a:noFill/>
-          </a:ln>
-          <a:effectLst/>
-        </p:spPr>
-        <p:style>
-          <a:lnRef idx="1">
-            <a:schemeClr val="accent1"/>
-          </a:lnRef>
-          <a:fillRef idx="3">
-            <a:schemeClr val="accent1"/>
-          </a:fillRef>
-          <a:effectRef idx="2">
-            <a:schemeClr val="accent1"/>
-          </a:effectRef>
-          <a:fontRef idx="minor">
-            <a:schemeClr val="lt1"/>
-          </a:fontRef>
-        </p:style>
-        <p:txBody>
-          <a:bodyPr rtlCol="0" anchor="ctr"/>
-          <a:lstStyle/>
-          <a:p>
-            <a:pPr algn="ctr"/>
-          </a:p>
-        </p:txBody>
-      </p:sp>
-      <p:pic>
-        <p:nvPicPr>
-          <p:cNvPr id="3" name="Picture 2" descr="etra-wordmark.png"/>
-          <p:cNvPicPr>
-            <a:picLocks noChangeAspect="1"/>
-          </p:cNvPicPr>
-          <p:nvPr/>
-        </p:nvPicPr>
-        <p:blipFill>
-          <a:blip r:embed="rId2"/>
-          <a:stretch>
-            <a:fillRect/>
-          </a:stretch>
-        </p:blipFill>
-        <p:spPr>
-          <a:xfrm>
-            <a:off x="10561320" y="411480"/>
-            <a:ext cx="1206201" cy="320040"/>
-          </a:xfrm>
-          <a:prstGeom prst="rect">
-            <a:avLst/>
-          </a:prstGeom>
-        </p:spPr>
-      </p:pic>
-      <p:sp>
-        <p:nvSpPr>
-          <p:cNvPr id="4" name="TextBox 3"/>
-          <p:cNvSpPr txBox="1"/>
-          <p:nvPr/>
-        </p:nvSpPr>
-        <p:spPr>
-          <a:xfrm>
-            <a:off x="548640" y="438912"/>
-            <a:ext cx="7772400" cy="274320"/>
-          </a:xfrm>
-          <a:prstGeom prst="rect">
-            <a:avLst/>
-          </a:prstGeom>
-          <a:noFill/>
-        </p:spPr>
-        <p:txBody>
-          <a:bodyPr wrap="square" anchor="t">
-            <a:spAutoFit/>
-          </a:bodyPr>
-          <a:lstStyle/>
-          <a:p>
-            <a:pPr algn="l"/>
-            <a:r>
-              <a:rPr sz="1200" b="0">
-                <a:solidFill>
-                  <a:srgbClr val="5A5470"/>
-                </a:solidFill>
-                <a:latin typeface="DIN Next LT W23"/>
-                <a:ea typeface="DIN Next LT W23"/>
-                <a:cs typeface="DIN Next LT W23"/>
-              </a:rPr>
-              <a:t>S08  ·  NLP</a:t>
-            </a:r>
-          </a:p>
-        </p:txBody>
-      </p:sp>
-      <p:sp>
-        <p:nvSpPr>
-          <p:cNvPr id="5" name="Rectangle 4"/>
-          <p:cNvSpPr/>
-          <p:nvPr/>
-        </p:nvSpPr>
-        <p:spPr>
-          <a:xfrm>
-            <a:off x="548640" y="822960"/>
-            <a:ext cx="11064240" cy="10972"/>
-          </a:xfrm>
-          <a:prstGeom prst="rect">
-            <a:avLst/>
-          </a:prstGeom>
-          <a:solidFill>
-            <a:srgbClr val="E4DCF4"/>
-          </a:solidFill>
-          <a:ln>
-            <a:noFill/>
-          </a:ln>
-          <a:effectLst/>
-        </p:spPr>
-        <p:style>
-          <a:lnRef idx="1">
-            <a:schemeClr val="accent1"/>
-          </a:lnRef>
-          <a:fillRef idx="3">
-            <a:schemeClr val="accent1"/>
-          </a:fillRef>
-          <a:effectRef idx="2">
-            <a:schemeClr val="accent1"/>
-          </a:effectRef>
-          <a:fontRef idx="minor">
-            <a:schemeClr val="lt1"/>
-          </a:fontRef>
-        </p:style>
-        <p:txBody>
-          <a:bodyPr rtlCol="0" anchor="ctr"/>
-          <a:lstStyle/>
-          <a:p>
-            <a:pPr algn="ctr"/>
-          </a:p>
-        </p:txBody>
-      </p:sp>
-      <p:sp>
-        <p:nvSpPr>
-          <p:cNvPr id="6" name="TextBox 5"/>
-          <p:cNvSpPr txBox="1"/>
-          <p:nvPr/>
-        </p:nvSpPr>
-        <p:spPr>
-          <a:xfrm>
-            <a:off x="548640" y="1024128"/>
-            <a:ext cx="10241280" cy="566928"/>
-          </a:xfrm>
-          <a:prstGeom prst="rect">
-            <a:avLst/>
-          </a:prstGeom>
-          <a:noFill/>
-        </p:spPr>
-        <p:txBody>
-          <a:bodyPr wrap="square" anchor="t">
-            <a:spAutoFit/>
-          </a:bodyPr>
-          <a:lstStyle/>
-          <a:p>
-            <a:pPr algn="l"/>
-            <a:r>
-              <a:rPr sz="3200" b="1">
-                <a:solidFill>
-                  <a:srgbClr val="5234B7"/>
-                </a:solidFill>
-                <a:latin typeface="DIN Next LT W23"/>
-                <a:ea typeface="DIN Next LT W23"/>
-                <a:cs typeface="DIN Next LT W23"/>
-              </a:rPr>
-              <a:t>Attention as the Bottleneck Solution</a:t>
-            </a:r>
-          </a:p>
-        </p:txBody>
-      </p:sp>
-      <p:sp>
-        <p:nvSpPr>
-          <p:cNvPr id="7" name="TextBox 6"/>
-          <p:cNvSpPr txBox="1"/>
-          <p:nvPr/>
-        </p:nvSpPr>
-        <p:spPr>
-          <a:xfrm>
-            <a:off x="548640" y="1591056"/>
-            <a:ext cx="10241280" cy="310896"/>
-          </a:xfrm>
-          <a:prstGeom prst="rect">
-            <a:avLst/>
-          </a:prstGeom>
-          <a:noFill/>
-        </p:spPr>
-        <p:txBody>
-          <a:bodyPr wrap="square" anchor="t">
-            <a:spAutoFit/>
-          </a:bodyPr>
-          <a:lstStyle/>
-          <a:p>
-            <a:pPr algn="l"/>
-            <a:r>
-              <a:rPr sz="1500" b="0">
-                <a:solidFill>
-                  <a:srgbClr val="5A5470"/>
-                </a:solidFill>
-                <a:latin typeface="DIN Next LT W23"/>
-                <a:ea typeface="DIN Next LT W23"/>
-                <a:cs typeface="DIN Next LT W23"/>
-              </a:rPr>
-              <a:t>Look at relevant encoder positions</a:t>
-            </a:r>
-          </a:p>
-        </p:txBody>
-      </p:sp>
-      <p:sp>
-        <p:nvSpPr>
-          <p:cNvPr id="8" name="TextBox 7"/>
-          <p:cNvSpPr txBox="1"/>
-          <p:nvPr/>
-        </p:nvSpPr>
-        <p:spPr>
-          <a:xfrm>
-            <a:off x="548640" y="1993392"/>
-            <a:ext cx="320040" cy="384048"/>
-          </a:xfrm>
-          <a:prstGeom prst="rect">
-            <a:avLst/>
-          </a:prstGeom>
-          <a:noFill/>
-        </p:spPr>
-        <p:txBody>
-          <a:bodyPr wrap="square" anchor="t">
-            <a:spAutoFit/>
-          </a:bodyPr>
-          <a:lstStyle/>
-          <a:p>
-            <a:pPr algn="l"/>
-            <a:r>
-              <a:rPr sz="1500" b="0">
-                <a:solidFill>
-                  <a:srgbClr val="9E59CD"/>
-                </a:solidFill>
-                <a:latin typeface="DIN Next LT W23"/>
-                <a:ea typeface="DIN Next LT W23"/>
-                <a:cs typeface="DIN Next LT W23"/>
-              </a:rPr>
-              <a:t>–</a:t>
-            </a:r>
-          </a:p>
-        </p:txBody>
-      </p:sp>
-      <p:sp>
-        <p:nvSpPr>
-          <p:cNvPr id="9" name="TextBox 8"/>
-          <p:cNvSpPr txBox="1"/>
-          <p:nvPr/>
-        </p:nvSpPr>
-        <p:spPr>
-          <a:xfrm>
-            <a:off x="914400" y="1993392"/>
-            <a:ext cx="9875519" cy="384048"/>
-          </a:xfrm>
-          <a:prstGeom prst="rect">
-            <a:avLst/>
-          </a:prstGeom>
-          <a:noFill/>
-        </p:spPr>
-        <p:txBody>
-          <a:bodyPr wrap="square" anchor="t">
-            <a:spAutoFit/>
-          </a:bodyPr>
-          <a:lstStyle/>
-          <a:p>
-            <a:pPr algn="l"/>
-            <a:r>
-              <a:rPr sz="1500" b="0">
-                <a:solidFill>
-                  <a:srgbClr val="121018"/>
-                </a:solidFill>
-                <a:latin typeface="DIN Next LT W23"/>
-                <a:ea typeface="DIN Next LT W23"/>
-                <a:cs typeface="DIN Next LT W23"/>
-              </a:rPr>
-              <a:t>Decoder attends to relevant encoder positions at each generation step.</a:t>
-            </a:r>
-          </a:p>
-        </p:txBody>
-      </p:sp>
-      <p:sp>
-        <p:nvSpPr>
-          <p:cNvPr id="10" name="TextBox 9"/>
-          <p:cNvSpPr txBox="1"/>
-          <p:nvPr/>
-        </p:nvSpPr>
-        <p:spPr>
-          <a:xfrm>
-            <a:off x="548640" y="2468880"/>
-            <a:ext cx="320040" cy="384048"/>
-          </a:xfrm>
-          <a:prstGeom prst="rect">
-            <a:avLst/>
-          </a:prstGeom>
-          <a:noFill/>
-        </p:spPr>
-        <p:txBody>
-          <a:bodyPr wrap="square" anchor="t">
-            <a:spAutoFit/>
-          </a:bodyPr>
-          <a:lstStyle/>
-          <a:p>
-            <a:pPr algn="l"/>
-            <a:r>
-              <a:rPr sz="1500" b="0">
-                <a:solidFill>
-                  <a:srgbClr val="9E59CD"/>
-                </a:solidFill>
-                <a:latin typeface="DIN Next LT W23"/>
-                <a:ea typeface="DIN Next LT W23"/>
-                <a:cs typeface="DIN Next LT W23"/>
-              </a:rPr>
-              <a:t>–</a:t>
-            </a:r>
-          </a:p>
-        </p:txBody>
-      </p:sp>
-      <p:sp>
-        <p:nvSpPr>
-          <p:cNvPr id="11" name="TextBox 10"/>
-          <p:cNvSpPr txBox="1"/>
-          <p:nvPr/>
-        </p:nvSpPr>
-        <p:spPr>
-          <a:xfrm>
-            <a:off x="914400" y="2468880"/>
-            <a:ext cx="9875519" cy="384048"/>
-          </a:xfrm>
-          <a:prstGeom prst="rect">
-            <a:avLst/>
-          </a:prstGeom>
-          <a:noFill/>
-        </p:spPr>
-        <p:txBody>
-          <a:bodyPr wrap="square" anchor="t">
-            <a:spAutoFit/>
-          </a:bodyPr>
-          <a:lstStyle/>
-          <a:p>
-            <a:pPr algn="l"/>
-            <a:r>
-              <a:rPr sz="1500" b="0">
-                <a:solidFill>
-                  <a:srgbClr val="121018"/>
-                </a:solidFill>
-                <a:latin typeface="DIN Next LT W23"/>
-                <a:ea typeface="DIN Next LT W23"/>
-                <a:cs typeface="DIN Next LT W23"/>
-              </a:rPr>
-              <a:t>Dynamic alignment improves translation adequacy and fluency.</a:t>
-            </a:r>
-          </a:p>
-        </p:txBody>
-      </p:sp>
-      <p:sp>
-        <p:nvSpPr>
-          <p:cNvPr id="12" name="TextBox 11"/>
-          <p:cNvSpPr txBox="1"/>
-          <p:nvPr/>
-        </p:nvSpPr>
-        <p:spPr>
-          <a:xfrm>
-            <a:off x="548640" y="2944368"/>
-            <a:ext cx="320040" cy="384048"/>
-          </a:xfrm>
-          <a:prstGeom prst="rect">
-            <a:avLst/>
-          </a:prstGeom>
-          <a:noFill/>
-        </p:spPr>
-        <p:txBody>
-          <a:bodyPr wrap="square" anchor="t">
-            <a:spAutoFit/>
-          </a:bodyPr>
-          <a:lstStyle/>
-          <a:p>
-            <a:pPr algn="l"/>
-            <a:r>
-              <a:rPr sz="1500" b="0">
-                <a:solidFill>
-                  <a:srgbClr val="9E59CD"/>
-                </a:solidFill>
-                <a:latin typeface="DIN Next LT W23"/>
-                <a:ea typeface="DIN Next LT W23"/>
-                <a:cs typeface="DIN Next LT W23"/>
-              </a:rPr>
-              <a:t>–</a:t>
-            </a:r>
-          </a:p>
-        </p:txBody>
-      </p:sp>
-      <p:sp>
-        <p:nvSpPr>
-          <p:cNvPr id="13" name="TextBox 12"/>
-          <p:cNvSpPr txBox="1"/>
-          <p:nvPr/>
-        </p:nvSpPr>
-        <p:spPr>
-          <a:xfrm>
-            <a:off x="914400" y="2944368"/>
-            <a:ext cx="9875519" cy="384048"/>
-          </a:xfrm>
-          <a:prstGeom prst="rect">
-            <a:avLst/>
-          </a:prstGeom>
-          <a:noFill/>
-        </p:spPr>
-        <p:txBody>
-          <a:bodyPr wrap="square" anchor="t">
-            <a:spAutoFit/>
-          </a:bodyPr>
-          <a:lstStyle/>
-          <a:p>
-            <a:pPr algn="l"/>
-            <a:r>
-              <a:rPr sz="1500" b="0">
-                <a:solidFill>
-                  <a:srgbClr val="121018"/>
-                </a:solidFill>
-                <a:latin typeface="DIN Next LT W23"/>
-                <a:ea typeface="DIN Next LT W23"/>
-                <a:cs typeface="DIN Next LT W23"/>
-              </a:rPr>
-              <a:t>Attention laid the foundation for transformer-dominant NMT systems.</a:t>
-            </a:r>
-          </a:p>
-        </p:txBody>
-      </p:sp>
-      <p:sp>
-        <p:nvSpPr>
-          <p:cNvPr id="14" name="Rectangle 13"/>
-          <p:cNvSpPr/>
-          <p:nvPr/>
-        </p:nvSpPr>
-        <p:spPr>
-          <a:xfrm>
-            <a:off x="548640" y="6446520"/>
-            <a:ext cx="11064240" cy="10972"/>
-          </a:xfrm>
-          <a:prstGeom prst="rect">
-            <a:avLst/>
-          </a:prstGeom>
-          <a:solidFill>
-            <a:srgbClr val="5234B7"/>
-          </a:solidFill>
-          <a:ln>
-            <a:noFill/>
-          </a:ln>
-          <a:effectLst/>
-        </p:spPr>
-        <p:style>
-          <a:lnRef idx="1">
-            <a:schemeClr val="accent1"/>
-          </a:lnRef>
-          <a:fillRef idx="3">
-            <a:schemeClr val="accent1"/>
-          </a:fillRef>
-          <a:effectRef idx="2">
-            <a:schemeClr val="accent1"/>
-          </a:effectRef>
-          <a:fontRef idx="minor">
-            <a:schemeClr val="lt1"/>
-          </a:fontRef>
-        </p:style>
-        <p:txBody>
-          <a:bodyPr rtlCol="0" anchor="ctr"/>
-          <a:lstStyle/>
-          <a:p>
-            <a:pPr algn="ctr"/>
-          </a:p>
-        </p:txBody>
-      </p:sp>
-      <p:sp>
-        <p:nvSpPr>
-          <p:cNvPr id="15" name="TextBox 14"/>
-          <p:cNvSpPr txBox="1"/>
-          <p:nvPr/>
-        </p:nvSpPr>
-        <p:spPr>
-          <a:xfrm>
-            <a:off x="548640" y="6510528"/>
-            <a:ext cx="2743200" cy="256032"/>
-          </a:xfrm>
-          <a:prstGeom prst="rect">
-            <a:avLst/>
-          </a:prstGeom>
-          <a:noFill/>
-        </p:spPr>
-        <p:txBody>
-          <a:bodyPr wrap="square" anchor="t">
-            <a:spAutoFit/>
-          </a:bodyPr>
-          <a:lstStyle/>
-          <a:p>
-            <a:pPr algn="l"/>
-            <a:r>
-              <a:rPr sz="1100" b="1">
-                <a:solidFill>
-                  <a:srgbClr val="5234B7"/>
-                </a:solidFill>
-                <a:latin typeface="DIN Next LT W23"/>
-                <a:ea typeface="DIN Next LT W23"/>
-                <a:cs typeface="DIN Next LT W23"/>
-              </a:rPr>
-              <a:t>ETRA</a:t>
-            </a:r>
-          </a:p>
-        </p:txBody>
-      </p:sp>
-      <p:sp>
-        <p:nvSpPr>
-          <p:cNvPr id="16" name="TextBox 15"/>
-          <p:cNvSpPr txBox="1"/>
-          <p:nvPr/>
-        </p:nvSpPr>
-        <p:spPr>
-          <a:xfrm>
-            <a:off x="9601200" y="6510528"/>
-            <a:ext cx="2011680" cy="256032"/>
-          </a:xfrm>
-          <a:prstGeom prst="rect">
-            <a:avLst/>
-          </a:prstGeom>
-          <a:noFill/>
-        </p:spPr>
-        <p:txBody>
-          <a:bodyPr wrap="square" anchor="t">
-            <a:spAutoFit/>
-          </a:bodyPr>
-          <a:lstStyle/>
-          <a:p>
-            <a:pPr algn="r"/>
-            <a:r>
-              <a:rPr sz="1100" b="0">
-                <a:solidFill>
-                  <a:srgbClr val="5A5470"/>
-                </a:solidFill>
-                <a:latin typeface="DIN Next LT W23"/>
-                <a:ea typeface="DIN Next LT W23"/>
-                <a:cs typeface="DIN Next LT W23"/>
-              </a:rPr>
-              <a:t>49  /  54</a:t>
-            </a:r>
-          </a:p>
-        </p:txBody>
-      </p:sp>
-    </p:spTree>
-  </p:cSld>
-  <p:clrMapOvr>
-    <a:masterClrMapping/>
-  </p:clrMapOvr>
-</p:sld>
-</file>
-
-<file path=ppt/slides/slide5.xml><?xml version="1.0" encoding="utf-8"?>
-<p:sld xmlns:a="http://schemas.openxmlformats.org/drawingml/2006/main" xmlns:p="http://schemas.openxmlformats.org/presentationml/2006/main" xmlns:r="http://schemas.openxmlformats.org/officeDocument/2006/relationships">
-  <p:cSld>
-    <p:bg>
-      <p:bgPr>
-        <a:solidFill>
-          <a:srgbClr val="FAF8FF"/>
-        </a:solidFill>
-        <a:effectLst/>
-      </p:bgPr>
-    </p:bg>
-    <p:spTree>
-      <p:nvGrpSpPr>
-        <p:cNvPr id="1" name=""/>
-        <p:cNvGrpSpPr/>
-        <p:nvPr/>
-      </p:nvGrpSpPr>
-      <p:grpSpPr/>
-      <p:sp>
-        <p:nvSpPr>
-          <p:cNvPr id="2" name="Rectangle 1"/>
-          <p:cNvSpPr/>
-          <p:nvPr/>
-        </p:nvSpPr>
-        <p:spPr>
-          <a:xfrm>
-            <a:off x="12136831" y="0"/>
-            <a:ext cx="54864" cy="6858000"/>
-          </a:xfrm>
-          <a:prstGeom prst="rect">
-            <a:avLst/>
-          </a:prstGeom>
-          <a:solidFill>
-            <a:srgbClr val="5234B7"/>
-          </a:solidFill>
-          <a:ln>
-            <a:noFill/>
-          </a:ln>
-          <a:effectLst/>
-        </p:spPr>
-        <p:style>
-          <a:lnRef idx="1">
-            <a:schemeClr val="accent1"/>
-          </a:lnRef>
-          <a:fillRef idx="3">
-            <a:schemeClr val="accent1"/>
-          </a:fillRef>
-          <a:effectRef idx="2">
-            <a:schemeClr val="accent1"/>
-          </a:effectRef>
-          <a:fontRef idx="minor">
-            <a:schemeClr val="lt1"/>
-          </a:fontRef>
-        </p:style>
-        <p:txBody>
-          <a:bodyPr rtlCol="0" anchor="ctr"/>
-          <a:lstStyle/>
-          <a:p>
-            <a:pPr algn="ctr"/>
-          </a:p>
-        </p:txBody>
-      </p:sp>
-      <p:pic>
-        <p:nvPicPr>
-          <p:cNvPr id="3" name="Picture 2" descr="etra-wordmark.png"/>
-          <p:cNvPicPr>
-            <a:picLocks noChangeAspect="1"/>
-          </p:cNvPicPr>
-          <p:nvPr/>
-        </p:nvPicPr>
-        <p:blipFill>
-          <a:blip r:embed="rId2"/>
-          <a:stretch>
-            <a:fillRect/>
-          </a:stretch>
-        </p:blipFill>
-        <p:spPr>
-          <a:xfrm>
-            <a:off x="10561320" y="411480"/>
-            <a:ext cx="1206201" cy="320040"/>
-          </a:xfrm>
-          <a:prstGeom prst="rect">
-            <a:avLst/>
-          </a:prstGeom>
-        </p:spPr>
-      </p:pic>
-      <p:sp>
-        <p:nvSpPr>
-          <p:cNvPr id="4" name="TextBox 3"/>
-          <p:cNvSpPr txBox="1"/>
-          <p:nvPr/>
-        </p:nvSpPr>
-        <p:spPr>
-          <a:xfrm>
-            <a:off x="548640" y="438912"/>
-            <a:ext cx="7772400" cy="274320"/>
-          </a:xfrm>
-          <a:prstGeom prst="rect">
-            <a:avLst/>
-          </a:prstGeom>
-          <a:noFill/>
-        </p:spPr>
-        <p:txBody>
-          <a:bodyPr wrap="square" anchor="t">
-            <a:spAutoFit/>
-          </a:bodyPr>
-          <a:lstStyle/>
-          <a:p>
-            <a:pPr algn="l"/>
-            <a:r>
-              <a:rPr sz="1200" b="0">
-                <a:solidFill>
-                  <a:srgbClr val="5A5470"/>
-                </a:solidFill>
-                <a:latin typeface="DIN Next LT W23"/>
-                <a:ea typeface="DIN Next LT W23"/>
-                <a:cs typeface="DIN Next LT W23"/>
-              </a:rPr>
-              <a:t>S08  ·  NLP</a:t>
-            </a:r>
-          </a:p>
-        </p:txBody>
-      </p:sp>
-      <p:sp>
-        <p:nvSpPr>
-          <p:cNvPr id="5" name="Rectangle 4"/>
-          <p:cNvSpPr/>
-          <p:nvPr/>
-        </p:nvSpPr>
-        <p:spPr>
-          <a:xfrm>
-            <a:off x="548640" y="822960"/>
-            <a:ext cx="11064240" cy="10972"/>
-          </a:xfrm>
-          <a:prstGeom prst="rect">
-            <a:avLst/>
-          </a:prstGeom>
-          <a:solidFill>
-            <a:srgbClr val="E4DCF4"/>
-          </a:solidFill>
-          <a:ln>
-            <a:noFill/>
-          </a:ln>
-          <a:effectLst/>
-        </p:spPr>
-        <p:style>
-          <a:lnRef idx="1">
-            <a:schemeClr val="accent1"/>
-          </a:lnRef>
-          <a:fillRef idx="3">
-            <a:schemeClr val="accent1"/>
-          </a:fillRef>
-          <a:effectRef idx="2">
-            <a:schemeClr val="accent1"/>
-          </a:effectRef>
-          <a:fontRef idx="minor">
-            <a:schemeClr val="lt1"/>
-          </a:fontRef>
-        </p:style>
-        <p:txBody>
-          <a:bodyPr rtlCol="0" anchor="ctr"/>
-          <a:lstStyle/>
-          <a:p>
-            <a:pPr algn="ctr"/>
-          </a:p>
-        </p:txBody>
-      </p:sp>
-      <p:sp>
-        <p:nvSpPr>
-          <p:cNvPr id="6" name="TextBox 5"/>
-          <p:cNvSpPr txBox="1"/>
-          <p:nvPr/>
-        </p:nvSpPr>
-        <p:spPr>
-          <a:xfrm>
-            <a:off x="548640" y="1024128"/>
-            <a:ext cx="10241280" cy="566928"/>
-          </a:xfrm>
-          <a:prstGeom prst="rect">
-            <a:avLst/>
-          </a:prstGeom>
-          <a:noFill/>
-        </p:spPr>
-        <p:txBody>
-          <a:bodyPr wrap="square" anchor="t">
-            <a:spAutoFit/>
-          </a:bodyPr>
-          <a:lstStyle/>
-          <a:p>
-            <a:pPr algn="l"/>
-            <a:r>
-              <a:rPr sz="3200" b="1">
-                <a:solidFill>
-                  <a:srgbClr val="5234B7"/>
-                </a:solidFill>
-                <a:latin typeface="DIN Next LT W23"/>
-                <a:ea typeface="DIN Next LT W23"/>
-                <a:cs typeface="DIN Next LT W23"/>
-              </a:rPr>
-              <a:t>NLP Fundamentals and Challenges</a:t>
-            </a:r>
-          </a:p>
-        </p:txBody>
-      </p:sp>
-      <p:sp>
-        <p:nvSpPr>
-          <p:cNvPr id="7" name="TextBox 6"/>
-          <p:cNvSpPr txBox="1"/>
-          <p:nvPr/>
-        </p:nvSpPr>
-        <p:spPr>
-          <a:xfrm>
-            <a:off x="548640" y="1591056"/>
-            <a:ext cx="10241280" cy="310896"/>
-          </a:xfrm>
-          <a:prstGeom prst="rect">
-            <a:avLst/>
-          </a:prstGeom>
-          <a:noFill/>
-        </p:spPr>
-        <p:txBody>
-          <a:bodyPr wrap="square" anchor="t">
-            <a:spAutoFit/>
-          </a:bodyPr>
-          <a:lstStyle/>
-          <a:p>
-            <a:pPr algn="l"/>
-            <a:r>
-              <a:rPr sz="1500" b="0">
-                <a:solidFill>
-                  <a:srgbClr val="5A5470"/>
-                </a:solidFill>
-                <a:latin typeface="DIN Next LT W23"/>
-                <a:ea typeface="DIN Next LT W23"/>
-                <a:cs typeface="DIN Next LT W23"/>
-              </a:rPr>
-              <a:t>Why Natural Language Is Difficult for Machines</a:t>
-            </a:r>
-          </a:p>
-        </p:txBody>
-      </p:sp>
-      <p:sp>
-        <p:nvSpPr>
-          <p:cNvPr id="8" name="TextBox 7"/>
-          <p:cNvSpPr txBox="1"/>
-          <p:nvPr/>
-        </p:nvSpPr>
-        <p:spPr>
-          <a:xfrm>
-            <a:off x="548640" y="1993392"/>
-            <a:ext cx="320040" cy="537210"/>
-          </a:xfrm>
-          <a:prstGeom prst="rect">
-            <a:avLst/>
-          </a:prstGeom>
-          <a:noFill/>
-        </p:spPr>
-        <p:txBody>
-          <a:bodyPr wrap="square" anchor="t">
-            <a:spAutoFit/>
-          </a:bodyPr>
-          <a:lstStyle/>
-          <a:p>
-            <a:pPr algn="l"/>
-            <a:r>
-              <a:rPr sz="1300" b="0">
-                <a:solidFill>
-                  <a:srgbClr val="9E59CD"/>
-                </a:solidFill>
-                <a:latin typeface="DIN Next LT W23"/>
-                <a:ea typeface="DIN Next LT W23"/>
-                <a:cs typeface="DIN Next LT W23"/>
-              </a:rPr>
-              <a:t>–</a:t>
-            </a:r>
-          </a:p>
-        </p:txBody>
-      </p:sp>
-      <p:sp>
-        <p:nvSpPr>
-          <p:cNvPr id="9" name="TextBox 8"/>
-          <p:cNvSpPr txBox="1"/>
-          <p:nvPr/>
-        </p:nvSpPr>
-        <p:spPr>
-          <a:xfrm>
-            <a:off x="914400" y="1993392"/>
-            <a:ext cx="4754879" cy="537210"/>
-          </a:xfrm>
-          <a:prstGeom prst="rect">
-            <a:avLst/>
-          </a:prstGeom>
-          <a:noFill/>
-        </p:spPr>
-        <p:txBody>
-          <a:bodyPr wrap="square" anchor="t">
-            <a:spAutoFit/>
-          </a:bodyPr>
-          <a:lstStyle/>
-          <a:p>
-            <a:pPr algn="l"/>
-            <a:r>
-              <a:rPr sz="1300" b="0">
-                <a:solidFill>
-                  <a:srgbClr val="121018"/>
-                </a:solidFill>
-                <a:latin typeface="DIN Next LT W23"/>
-                <a:ea typeface="DIN Next LT W23"/>
-                <a:cs typeface="DIN Next LT W23"/>
-              </a:rPr>
-              <a:t>Natural language is ambiguous, context-dependent, and full of idioms.</a:t>
-            </a:r>
-          </a:p>
-        </p:txBody>
-      </p:sp>
-      <p:sp>
-        <p:nvSpPr>
-          <p:cNvPr id="10" name="TextBox 9"/>
-          <p:cNvSpPr txBox="1"/>
-          <p:nvPr/>
-        </p:nvSpPr>
-        <p:spPr>
-          <a:xfrm>
-            <a:off x="548640" y="2622042"/>
-            <a:ext cx="320040" cy="537210"/>
-          </a:xfrm>
-          <a:prstGeom prst="rect">
-            <a:avLst/>
-          </a:prstGeom>
-          <a:noFill/>
-        </p:spPr>
-        <p:txBody>
-          <a:bodyPr wrap="square" anchor="t">
-            <a:spAutoFit/>
-          </a:bodyPr>
-          <a:lstStyle/>
-          <a:p>
-            <a:pPr algn="l"/>
-            <a:r>
-              <a:rPr sz="1300" b="0">
-                <a:solidFill>
-                  <a:srgbClr val="9E59CD"/>
-                </a:solidFill>
-                <a:latin typeface="DIN Next LT W23"/>
-                <a:ea typeface="DIN Next LT W23"/>
-                <a:cs typeface="DIN Next LT W23"/>
-              </a:rPr>
-              <a:t>–</a:t>
-            </a:r>
-          </a:p>
-        </p:txBody>
-      </p:sp>
-      <p:sp>
-        <p:nvSpPr>
-          <p:cNvPr id="11" name="TextBox 10"/>
-          <p:cNvSpPr txBox="1"/>
-          <p:nvPr/>
-        </p:nvSpPr>
-        <p:spPr>
-          <a:xfrm>
-            <a:off x="914400" y="2622042"/>
-            <a:ext cx="4754879" cy="537210"/>
-          </a:xfrm>
-          <a:prstGeom prst="rect">
-            <a:avLst/>
-          </a:prstGeom>
-          <a:noFill/>
-        </p:spPr>
-        <p:txBody>
-          <a:bodyPr wrap="square" anchor="t">
-            <a:spAutoFit/>
-          </a:bodyPr>
-          <a:lstStyle/>
-          <a:p>
-            <a:pPr algn="l"/>
-            <a:r>
-              <a:rPr sz="1300" b="0">
-                <a:solidFill>
-                  <a:srgbClr val="121018"/>
-                </a:solidFill>
-                <a:latin typeface="DIN Next LT W23"/>
-                <a:ea typeface="DIN Next LT W23"/>
-                <a:cs typeface="DIN Next LT W23"/>
-              </a:rPr>
-              <a:t>Meaning often depends on pragmatics, domain, and cultural background.</a:t>
-            </a:r>
-          </a:p>
-        </p:txBody>
-      </p:sp>
-      <p:sp>
-        <p:nvSpPr>
-          <p:cNvPr id="12" name="TextBox 11"/>
-          <p:cNvSpPr txBox="1"/>
-          <p:nvPr/>
-        </p:nvSpPr>
-        <p:spPr>
-          <a:xfrm>
-            <a:off x="548640" y="3250692"/>
-            <a:ext cx="320040" cy="537210"/>
-          </a:xfrm>
-          <a:prstGeom prst="rect">
-            <a:avLst/>
-          </a:prstGeom>
-          <a:noFill/>
-        </p:spPr>
-        <p:txBody>
-          <a:bodyPr wrap="square" anchor="t">
-            <a:spAutoFit/>
-          </a:bodyPr>
-          <a:lstStyle/>
-          <a:p>
-            <a:pPr algn="l"/>
-            <a:r>
-              <a:rPr sz="1300" b="0">
-                <a:solidFill>
-                  <a:srgbClr val="9E59CD"/>
-                </a:solidFill>
-                <a:latin typeface="DIN Next LT W23"/>
-                <a:ea typeface="DIN Next LT W23"/>
-                <a:cs typeface="DIN Next LT W23"/>
-              </a:rPr>
-              <a:t>–</a:t>
-            </a:r>
-          </a:p>
-        </p:txBody>
-      </p:sp>
-      <p:sp>
-        <p:nvSpPr>
-          <p:cNvPr id="13" name="TextBox 12"/>
-          <p:cNvSpPr txBox="1"/>
-          <p:nvPr/>
-        </p:nvSpPr>
-        <p:spPr>
-          <a:xfrm>
-            <a:off x="914400" y="3250692"/>
-            <a:ext cx="4754879" cy="537210"/>
-          </a:xfrm>
-          <a:prstGeom prst="rect">
-            <a:avLst/>
-          </a:prstGeom>
-          <a:noFill/>
-        </p:spPr>
-        <p:txBody>
-          <a:bodyPr wrap="square" anchor="t">
-            <a:spAutoFit/>
-          </a:bodyPr>
-          <a:lstStyle/>
-          <a:p>
-            <a:pPr algn="l"/>
-            <a:r>
-              <a:rPr sz="1300" b="0">
-                <a:solidFill>
-                  <a:srgbClr val="121018"/>
-                </a:solidFill>
-                <a:latin typeface="DIN Next LT W23"/>
-                <a:ea typeface="DIN Next LT W23"/>
-                <a:cs typeface="DIN Next LT W23"/>
-              </a:rPr>
-              <a:t>The same sentence can map to multiple valid interpretations.</a:t>
-            </a:r>
-          </a:p>
-        </p:txBody>
-      </p:sp>
-      <p:sp>
-        <p:nvSpPr>
-          <p:cNvPr id="14" name="Rounded Rectangle 13"/>
-          <p:cNvSpPr/>
-          <p:nvPr/>
-        </p:nvSpPr>
-        <p:spPr>
-          <a:xfrm>
-            <a:off x="6537960" y="2011680"/>
-            <a:ext cx="4983480" cy="3794760"/>
-          </a:xfrm>
-          <a:prstGeom prst="roundRect">
-            <a:avLst>
-              <a:gd name="adj" fmla="val 10000"/>
-            </a:avLst>
-          </a:prstGeom>
-          <a:solidFill>
-            <a:srgbClr val="EEE8FA"/>
-          </a:solidFill>
-          <a:ln>
-            <a:noFill/>
-          </a:ln>
-          <a:effectLst/>
-        </p:spPr>
-        <p:style>
-          <a:lnRef idx="1">
-            <a:schemeClr val="accent1"/>
-          </a:lnRef>
-          <a:fillRef idx="3">
-            <a:schemeClr val="accent1"/>
-          </a:fillRef>
-          <a:effectRef idx="2">
-            <a:schemeClr val="accent1"/>
-          </a:effectRef>
-          <a:fontRef idx="minor">
-            <a:schemeClr val="lt1"/>
-          </a:fontRef>
-        </p:style>
-        <p:txBody>
-          <a:bodyPr rtlCol="0" anchor="ctr"/>
-          <a:lstStyle/>
-          <a:p>
-            <a:pPr algn="ctr"/>
-          </a:p>
-        </p:txBody>
-      </p:sp>
-      <p:pic>
-        <p:nvPicPr>
-          <p:cNvPr id="15" name="Picture 14" descr="linguistic-levels.png"/>
-          <p:cNvPicPr>
-            <a:picLocks noChangeAspect="1"/>
-          </p:cNvPicPr>
-          <p:nvPr/>
-        </p:nvPicPr>
-        <p:blipFill>
-          <a:blip r:embed="rId3"/>
-          <a:stretch>
-            <a:fillRect/>
-          </a:stretch>
-        </p:blipFill>
-        <p:spPr>
-          <a:xfrm>
-            <a:off x="6720840" y="2194560"/>
-            <a:ext cx="4617720" cy="2898356"/>
-          </a:xfrm>
-          <a:prstGeom prst="rect">
-            <a:avLst/>
-          </a:prstGeom>
-        </p:spPr>
-      </p:pic>
-      <p:sp>
-        <p:nvSpPr>
-          <p:cNvPr id="16" name="TextBox 15"/>
-          <p:cNvSpPr txBox="1"/>
-          <p:nvPr/>
-        </p:nvSpPr>
-        <p:spPr>
-          <a:xfrm>
-            <a:off x="548640" y="5989320"/>
-            <a:ext cx="10972800" cy="256032"/>
-          </a:xfrm>
-          <a:prstGeom prst="rect">
-            <a:avLst/>
-          </a:prstGeom>
-          <a:noFill/>
-        </p:spPr>
-        <p:txBody>
-          <a:bodyPr wrap="square" anchor="t">
-            <a:spAutoFit/>
-          </a:bodyPr>
-          <a:lstStyle/>
-          <a:p>
-            <a:pPr algn="l"/>
-            <a:r>
-              <a:rPr sz="1100" b="0">
-                <a:solidFill>
-                  <a:srgbClr val="5A5470"/>
-                </a:solidFill>
-                <a:latin typeface="DIN Next LT W23"/>
-                <a:ea typeface="DIN Next LT W23"/>
-                <a:cs typeface="DIN Next LT W23"/>
-              </a:rPr>
-              <a:t>NLP systems must model form, meaning, and context simultaneously.</a:t>
-            </a:r>
-          </a:p>
-        </p:txBody>
-      </p:sp>
-      <p:sp>
-        <p:nvSpPr>
-          <p:cNvPr id="17" name="Rectangle 16"/>
-          <p:cNvSpPr/>
-          <p:nvPr/>
-        </p:nvSpPr>
-        <p:spPr>
-          <a:xfrm>
-            <a:off x="548640" y="6446520"/>
-            <a:ext cx="11064240" cy="10972"/>
-          </a:xfrm>
-          <a:prstGeom prst="rect">
-            <a:avLst/>
-          </a:prstGeom>
-          <a:solidFill>
-            <a:srgbClr val="5234B7"/>
-          </a:solidFill>
-          <a:ln>
-            <a:noFill/>
-          </a:ln>
-          <a:effectLst/>
-        </p:spPr>
-        <p:style>
-          <a:lnRef idx="1">
-            <a:schemeClr val="accent1"/>
-          </a:lnRef>
-          <a:fillRef idx="3">
-            <a:schemeClr val="accent1"/>
-          </a:fillRef>
-          <a:effectRef idx="2">
-            <a:schemeClr val="accent1"/>
-          </a:effectRef>
-          <a:fontRef idx="minor">
-            <a:schemeClr val="lt1"/>
-          </a:fontRef>
-        </p:style>
-        <p:txBody>
-          <a:bodyPr rtlCol="0" anchor="ctr"/>
-          <a:lstStyle/>
-          <a:p>
-            <a:pPr algn="ctr"/>
-          </a:p>
-        </p:txBody>
-      </p:sp>
-      <p:sp>
-        <p:nvSpPr>
-          <p:cNvPr id="18" name="TextBox 17"/>
-          <p:cNvSpPr txBox="1"/>
-          <p:nvPr/>
-        </p:nvSpPr>
-        <p:spPr>
-          <a:xfrm>
-            <a:off x="548640" y="6510528"/>
-            <a:ext cx="2743200" cy="256032"/>
-          </a:xfrm>
-          <a:prstGeom prst="rect">
-            <a:avLst/>
-          </a:prstGeom>
-          <a:noFill/>
-        </p:spPr>
-        <p:txBody>
-          <a:bodyPr wrap="square" anchor="t">
-            <a:spAutoFit/>
-          </a:bodyPr>
-          <a:lstStyle/>
-          <a:p>
-            <a:pPr algn="l"/>
-            <a:r>
-              <a:rPr sz="1100" b="1">
-                <a:solidFill>
-                  <a:srgbClr val="5234B7"/>
-                </a:solidFill>
-                <a:latin typeface="DIN Next LT W23"/>
-                <a:ea typeface="DIN Next LT W23"/>
-                <a:cs typeface="DIN Next LT W23"/>
-              </a:rPr>
-              <a:t>ETRA</a:t>
-            </a:r>
-          </a:p>
-        </p:txBody>
-      </p:sp>
-      <p:sp>
-        <p:nvSpPr>
-          <p:cNvPr id="19" name="TextBox 18"/>
-          <p:cNvSpPr txBox="1"/>
-          <p:nvPr/>
-        </p:nvSpPr>
-        <p:spPr>
-          <a:xfrm>
-            <a:off x="9601200" y="6510528"/>
-            <a:ext cx="2011680" cy="256032"/>
-          </a:xfrm>
-          <a:prstGeom prst="rect">
-            <a:avLst/>
-          </a:prstGeom>
-          <a:noFill/>
-        </p:spPr>
-        <p:txBody>
-          <a:bodyPr wrap="square" anchor="t">
-            <a:spAutoFit/>
-          </a:bodyPr>
-          <a:lstStyle/>
-          <a:p>
-            <a:pPr algn="r"/>
-            <a:r>
-              <a:rPr sz="1100" b="0">
-                <a:solidFill>
-                  <a:srgbClr val="5A5470"/>
-                </a:solidFill>
-                <a:latin typeface="DIN Next LT W23"/>
-                <a:ea typeface="DIN Next LT W23"/>
-                <a:cs typeface="DIN Next LT W23"/>
-              </a:rPr>
-              <a:t>05  /  54</a:t>
-            </a:r>
-          </a:p>
-        </p:txBody>
-      </p:sp>
-    </p:spTree>
-  </p:cSld>
-  <p:clrMapOvr>
-    <a:masterClrMapping/>
-  </p:clrMapOvr>
-</p:sld>
-</file>
-
-<file path=ppt/slides/slide50.xml><?xml version="1.0" encoding="utf-8"?>
 <p:sld xmlns:a="http://schemas.openxmlformats.org/drawingml/2006/main" xmlns:p="http://schemas.openxmlformats.org/presentationml/2006/main" xmlns:r="http://schemas.openxmlformats.org/officeDocument/2006/relationships">
   <p:cSld>
     <p:bg>
@@ -33299,7 +31861,1177 @@
                 <a:ea typeface="DIN Next LT W23"/>
                 <a:cs typeface="DIN Next LT W23"/>
               </a:rPr>
-              <a:t>50  /  54</a:t>
+              <a:t>49  /  53</a:t>
+            </a:r>
+          </a:p>
+        </p:txBody>
+      </p:sp>
+    </p:spTree>
+  </p:cSld>
+  <p:clrMapOvr>
+    <a:masterClrMapping/>
+  </p:clrMapOvr>
+</p:sld>
+</file>
+
+<file path=ppt/slides/slide5.xml><?xml version="1.0" encoding="utf-8"?>
+<p:sld xmlns:a="http://schemas.openxmlformats.org/drawingml/2006/main" xmlns:p="http://schemas.openxmlformats.org/presentationml/2006/main" xmlns:r="http://schemas.openxmlformats.org/officeDocument/2006/relationships">
+  <p:cSld>
+    <p:bg>
+      <p:bgPr>
+        <a:solidFill>
+          <a:srgbClr val="FAF8FF"/>
+        </a:solidFill>
+        <a:effectLst/>
+      </p:bgPr>
+    </p:bg>
+    <p:spTree>
+      <p:nvGrpSpPr>
+        <p:cNvPr id="1" name=""/>
+        <p:cNvGrpSpPr/>
+        <p:nvPr/>
+      </p:nvGrpSpPr>
+      <p:grpSpPr/>
+      <p:sp>
+        <p:nvSpPr>
+          <p:cNvPr id="2" name="Rectangle 1"/>
+          <p:cNvSpPr/>
+          <p:nvPr/>
+        </p:nvSpPr>
+        <p:spPr>
+          <a:xfrm>
+            <a:off x="12136831" y="0"/>
+            <a:ext cx="54864" cy="6858000"/>
+          </a:xfrm>
+          <a:prstGeom prst="rect">
+            <a:avLst/>
+          </a:prstGeom>
+          <a:solidFill>
+            <a:srgbClr val="5234B7"/>
+          </a:solidFill>
+          <a:ln>
+            <a:noFill/>
+          </a:ln>
+          <a:effectLst/>
+        </p:spPr>
+        <p:style>
+          <a:lnRef idx="1">
+            <a:schemeClr val="accent1"/>
+          </a:lnRef>
+          <a:fillRef idx="3">
+            <a:schemeClr val="accent1"/>
+          </a:fillRef>
+          <a:effectRef idx="2">
+            <a:schemeClr val="accent1"/>
+          </a:effectRef>
+          <a:fontRef idx="minor">
+            <a:schemeClr val="lt1"/>
+          </a:fontRef>
+        </p:style>
+        <p:txBody>
+          <a:bodyPr rtlCol="0" anchor="ctr"/>
+          <a:lstStyle/>
+          <a:p>
+            <a:pPr algn="ctr"/>
+          </a:p>
+        </p:txBody>
+      </p:sp>
+      <p:pic>
+        <p:nvPicPr>
+          <p:cNvPr id="3" name="Picture 2" descr="etra-wordmark.png"/>
+          <p:cNvPicPr>
+            <a:picLocks noChangeAspect="1"/>
+          </p:cNvPicPr>
+          <p:nvPr/>
+        </p:nvPicPr>
+        <p:blipFill>
+          <a:blip r:embed="rId2"/>
+          <a:stretch>
+            <a:fillRect/>
+          </a:stretch>
+        </p:blipFill>
+        <p:spPr>
+          <a:xfrm>
+            <a:off x="10561320" y="411480"/>
+            <a:ext cx="1206201" cy="320040"/>
+          </a:xfrm>
+          <a:prstGeom prst="rect">
+            <a:avLst/>
+          </a:prstGeom>
+        </p:spPr>
+      </p:pic>
+      <p:sp>
+        <p:nvSpPr>
+          <p:cNvPr id="4" name="TextBox 3"/>
+          <p:cNvSpPr txBox="1"/>
+          <p:nvPr/>
+        </p:nvSpPr>
+        <p:spPr>
+          <a:xfrm>
+            <a:off x="548640" y="438912"/>
+            <a:ext cx="7772400" cy="274320"/>
+          </a:xfrm>
+          <a:prstGeom prst="rect">
+            <a:avLst/>
+          </a:prstGeom>
+          <a:noFill/>
+        </p:spPr>
+        <p:txBody>
+          <a:bodyPr wrap="square" anchor="t">
+            <a:spAutoFit/>
+          </a:bodyPr>
+          <a:lstStyle/>
+          <a:p>
+            <a:pPr algn="l"/>
+            <a:r>
+              <a:rPr sz="1200" b="0">
+                <a:solidFill>
+                  <a:srgbClr val="5A5470"/>
+                </a:solidFill>
+                <a:latin typeface="DIN Next LT W23"/>
+                <a:ea typeface="DIN Next LT W23"/>
+                <a:cs typeface="DIN Next LT W23"/>
+              </a:rPr>
+              <a:t>S08  ·  NLP</a:t>
+            </a:r>
+          </a:p>
+        </p:txBody>
+      </p:sp>
+      <p:sp>
+        <p:nvSpPr>
+          <p:cNvPr id="5" name="Rectangle 4"/>
+          <p:cNvSpPr/>
+          <p:nvPr/>
+        </p:nvSpPr>
+        <p:spPr>
+          <a:xfrm>
+            <a:off x="548640" y="822960"/>
+            <a:ext cx="11064240" cy="10972"/>
+          </a:xfrm>
+          <a:prstGeom prst="rect">
+            <a:avLst/>
+          </a:prstGeom>
+          <a:solidFill>
+            <a:srgbClr val="E4DCF4"/>
+          </a:solidFill>
+          <a:ln>
+            <a:noFill/>
+          </a:ln>
+          <a:effectLst/>
+        </p:spPr>
+        <p:style>
+          <a:lnRef idx="1">
+            <a:schemeClr val="accent1"/>
+          </a:lnRef>
+          <a:fillRef idx="3">
+            <a:schemeClr val="accent1"/>
+          </a:fillRef>
+          <a:effectRef idx="2">
+            <a:schemeClr val="accent1"/>
+          </a:effectRef>
+          <a:fontRef idx="minor">
+            <a:schemeClr val="lt1"/>
+          </a:fontRef>
+        </p:style>
+        <p:txBody>
+          <a:bodyPr rtlCol="0" anchor="ctr"/>
+          <a:lstStyle/>
+          <a:p>
+            <a:pPr algn="ctr"/>
+          </a:p>
+        </p:txBody>
+      </p:sp>
+      <p:sp>
+        <p:nvSpPr>
+          <p:cNvPr id="6" name="TextBox 5"/>
+          <p:cNvSpPr txBox="1"/>
+          <p:nvPr/>
+        </p:nvSpPr>
+        <p:spPr>
+          <a:xfrm>
+            <a:off x="548640" y="1024128"/>
+            <a:ext cx="10241280" cy="566928"/>
+          </a:xfrm>
+          <a:prstGeom prst="rect">
+            <a:avLst/>
+          </a:prstGeom>
+          <a:noFill/>
+        </p:spPr>
+        <p:txBody>
+          <a:bodyPr wrap="square" anchor="t">
+            <a:spAutoFit/>
+          </a:bodyPr>
+          <a:lstStyle/>
+          <a:p>
+            <a:pPr algn="l"/>
+            <a:r>
+              <a:rPr sz="3200" b="1">
+                <a:solidFill>
+                  <a:srgbClr val="5234B7"/>
+                </a:solidFill>
+                <a:latin typeface="DIN Next LT W23"/>
+                <a:ea typeface="DIN Next LT W23"/>
+                <a:cs typeface="DIN Next LT W23"/>
+              </a:rPr>
+              <a:t>NLP Fundamentals and Challenges</a:t>
+            </a:r>
+          </a:p>
+        </p:txBody>
+      </p:sp>
+      <p:sp>
+        <p:nvSpPr>
+          <p:cNvPr id="7" name="TextBox 6"/>
+          <p:cNvSpPr txBox="1"/>
+          <p:nvPr/>
+        </p:nvSpPr>
+        <p:spPr>
+          <a:xfrm>
+            <a:off x="548640" y="1591056"/>
+            <a:ext cx="10241280" cy="310896"/>
+          </a:xfrm>
+          <a:prstGeom prst="rect">
+            <a:avLst/>
+          </a:prstGeom>
+          <a:noFill/>
+        </p:spPr>
+        <p:txBody>
+          <a:bodyPr wrap="square" anchor="t">
+            <a:spAutoFit/>
+          </a:bodyPr>
+          <a:lstStyle/>
+          <a:p>
+            <a:pPr algn="l"/>
+            <a:r>
+              <a:rPr sz="1500" b="0">
+                <a:solidFill>
+                  <a:srgbClr val="5A5470"/>
+                </a:solidFill>
+                <a:latin typeface="DIN Next LT W23"/>
+                <a:ea typeface="DIN Next LT W23"/>
+                <a:cs typeface="DIN Next LT W23"/>
+              </a:rPr>
+              <a:t>Why Natural Language Is Difficult for Machines</a:t>
+            </a:r>
+          </a:p>
+        </p:txBody>
+      </p:sp>
+      <p:sp>
+        <p:nvSpPr>
+          <p:cNvPr id="8" name="TextBox 7"/>
+          <p:cNvSpPr txBox="1"/>
+          <p:nvPr/>
+        </p:nvSpPr>
+        <p:spPr>
+          <a:xfrm>
+            <a:off x="548640" y="1993392"/>
+            <a:ext cx="320040" cy="537210"/>
+          </a:xfrm>
+          <a:prstGeom prst="rect">
+            <a:avLst/>
+          </a:prstGeom>
+          <a:noFill/>
+        </p:spPr>
+        <p:txBody>
+          <a:bodyPr wrap="square" anchor="t">
+            <a:spAutoFit/>
+          </a:bodyPr>
+          <a:lstStyle/>
+          <a:p>
+            <a:pPr algn="l"/>
+            <a:r>
+              <a:rPr sz="1300" b="0">
+                <a:solidFill>
+                  <a:srgbClr val="9E59CD"/>
+                </a:solidFill>
+                <a:latin typeface="DIN Next LT W23"/>
+                <a:ea typeface="DIN Next LT W23"/>
+                <a:cs typeface="DIN Next LT W23"/>
+              </a:rPr>
+              <a:t>–</a:t>
+            </a:r>
+          </a:p>
+        </p:txBody>
+      </p:sp>
+      <p:sp>
+        <p:nvSpPr>
+          <p:cNvPr id="9" name="TextBox 8"/>
+          <p:cNvSpPr txBox="1"/>
+          <p:nvPr/>
+        </p:nvSpPr>
+        <p:spPr>
+          <a:xfrm>
+            <a:off x="914400" y="1993392"/>
+            <a:ext cx="4754879" cy="537210"/>
+          </a:xfrm>
+          <a:prstGeom prst="rect">
+            <a:avLst/>
+          </a:prstGeom>
+          <a:noFill/>
+        </p:spPr>
+        <p:txBody>
+          <a:bodyPr wrap="square" anchor="t">
+            <a:spAutoFit/>
+          </a:bodyPr>
+          <a:lstStyle/>
+          <a:p>
+            <a:pPr algn="l"/>
+            <a:r>
+              <a:rPr sz="1300" b="0">
+                <a:solidFill>
+                  <a:srgbClr val="121018"/>
+                </a:solidFill>
+                <a:latin typeface="DIN Next LT W23"/>
+                <a:ea typeface="DIN Next LT W23"/>
+                <a:cs typeface="DIN Next LT W23"/>
+              </a:rPr>
+              <a:t>Natural language is ambiguous, context-dependent, and full of idioms.</a:t>
+            </a:r>
+          </a:p>
+        </p:txBody>
+      </p:sp>
+      <p:sp>
+        <p:nvSpPr>
+          <p:cNvPr id="10" name="TextBox 9"/>
+          <p:cNvSpPr txBox="1"/>
+          <p:nvPr/>
+        </p:nvSpPr>
+        <p:spPr>
+          <a:xfrm>
+            <a:off x="548640" y="2622042"/>
+            <a:ext cx="320040" cy="537210"/>
+          </a:xfrm>
+          <a:prstGeom prst="rect">
+            <a:avLst/>
+          </a:prstGeom>
+          <a:noFill/>
+        </p:spPr>
+        <p:txBody>
+          <a:bodyPr wrap="square" anchor="t">
+            <a:spAutoFit/>
+          </a:bodyPr>
+          <a:lstStyle/>
+          <a:p>
+            <a:pPr algn="l"/>
+            <a:r>
+              <a:rPr sz="1300" b="0">
+                <a:solidFill>
+                  <a:srgbClr val="9E59CD"/>
+                </a:solidFill>
+                <a:latin typeface="DIN Next LT W23"/>
+                <a:ea typeface="DIN Next LT W23"/>
+                <a:cs typeface="DIN Next LT W23"/>
+              </a:rPr>
+              <a:t>–</a:t>
+            </a:r>
+          </a:p>
+        </p:txBody>
+      </p:sp>
+      <p:sp>
+        <p:nvSpPr>
+          <p:cNvPr id="11" name="TextBox 10"/>
+          <p:cNvSpPr txBox="1"/>
+          <p:nvPr/>
+        </p:nvSpPr>
+        <p:spPr>
+          <a:xfrm>
+            <a:off x="914400" y="2622042"/>
+            <a:ext cx="4754879" cy="537210"/>
+          </a:xfrm>
+          <a:prstGeom prst="rect">
+            <a:avLst/>
+          </a:prstGeom>
+          <a:noFill/>
+        </p:spPr>
+        <p:txBody>
+          <a:bodyPr wrap="square" anchor="t">
+            <a:spAutoFit/>
+          </a:bodyPr>
+          <a:lstStyle/>
+          <a:p>
+            <a:pPr algn="l"/>
+            <a:r>
+              <a:rPr sz="1300" b="0">
+                <a:solidFill>
+                  <a:srgbClr val="121018"/>
+                </a:solidFill>
+                <a:latin typeface="DIN Next LT W23"/>
+                <a:ea typeface="DIN Next LT W23"/>
+                <a:cs typeface="DIN Next LT W23"/>
+              </a:rPr>
+              <a:t>Meaning often depends on pragmatics, domain, and cultural background.</a:t>
+            </a:r>
+          </a:p>
+        </p:txBody>
+      </p:sp>
+      <p:sp>
+        <p:nvSpPr>
+          <p:cNvPr id="12" name="TextBox 11"/>
+          <p:cNvSpPr txBox="1"/>
+          <p:nvPr/>
+        </p:nvSpPr>
+        <p:spPr>
+          <a:xfrm>
+            <a:off x="548640" y="3250692"/>
+            <a:ext cx="320040" cy="537210"/>
+          </a:xfrm>
+          <a:prstGeom prst="rect">
+            <a:avLst/>
+          </a:prstGeom>
+          <a:noFill/>
+        </p:spPr>
+        <p:txBody>
+          <a:bodyPr wrap="square" anchor="t">
+            <a:spAutoFit/>
+          </a:bodyPr>
+          <a:lstStyle/>
+          <a:p>
+            <a:pPr algn="l"/>
+            <a:r>
+              <a:rPr sz="1300" b="0">
+                <a:solidFill>
+                  <a:srgbClr val="9E59CD"/>
+                </a:solidFill>
+                <a:latin typeface="DIN Next LT W23"/>
+                <a:ea typeface="DIN Next LT W23"/>
+                <a:cs typeface="DIN Next LT W23"/>
+              </a:rPr>
+              <a:t>–</a:t>
+            </a:r>
+          </a:p>
+        </p:txBody>
+      </p:sp>
+      <p:sp>
+        <p:nvSpPr>
+          <p:cNvPr id="13" name="TextBox 12"/>
+          <p:cNvSpPr txBox="1"/>
+          <p:nvPr/>
+        </p:nvSpPr>
+        <p:spPr>
+          <a:xfrm>
+            <a:off x="914400" y="3250692"/>
+            <a:ext cx="4754879" cy="537210"/>
+          </a:xfrm>
+          <a:prstGeom prst="rect">
+            <a:avLst/>
+          </a:prstGeom>
+          <a:noFill/>
+        </p:spPr>
+        <p:txBody>
+          <a:bodyPr wrap="square" anchor="t">
+            <a:spAutoFit/>
+          </a:bodyPr>
+          <a:lstStyle/>
+          <a:p>
+            <a:pPr algn="l"/>
+            <a:r>
+              <a:rPr sz="1300" b="0">
+                <a:solidFill>
+                  <a:srgbClr val="121018"/>
+                </a:solidFill>
+                <a:latin typeface="DIN Next LT W23"/>
+                <a:ea typeface="DIN Next LT W23"/>
+                <a:cs typeface="DIN Next LT W23"/>
+              </a:rPr>
+              <a:t>The same sentence can map to multiple valid interpretations.</a:t>
+            </a:r>
+          </a:p>
+        </p:txBody>
+      </p:sp>
+      <p:sp>
+        <p:nvSpPr>
+          <p:cNvPr id="14" name="Rounded Rectangle 13"/>
+          <p:cNvSpPr/>
+          <p:nvPr/>
+        </p:nvSpPr>
+        <p:spPr>
+          <a:xfrm>
+            <a:off x="6537960" y="2011680"/>
+            <a:ext cx="4983480" cy="3794760"/>
+          </a:xfrm>
+          <a:prstGeom prst="roundRect">
+            <a:avLst>
+              <a:gd name="adj" fmla="val 10000"/>
+            </a:avLst>
+          </a:prstGeom>
+          <a:solidFill>
+            <a:srgbClr val="EEE8FA"/>
+          </a:solidFill>
+          <a:ln>
+            <a:noFill/>
+          </a:ln>
+          <a:effectLst/>
+        </p:spPr>
+        <p:style>
+          <a:lnRef idx="1">
+            <a:schemeClr val="accent1"/>
+          </a:lnRef>
+          <a:fillRef idx="3">
+            <a:schemeClr val="accent1"/>
+          </a:fillRef>
+          <a:effectRef idx="2">
+            <a:schemeClr val="accent1"/>
+          </a:effectRef>
+          <a:fontRef idx="minor">
+            <a:schemeClr val="lt1"/>
+          </a:fontRef>
+        </p:style>
+        <p:txBody>
+          <a:bodyPr rtlCol="0" anchor="ctr"/>
+          <a:lstStyle/>
+          <a:p>
+            <a:pPr algn="ctr"/>
+          </a:p>
+        </p:txBody>
+      </p:sp>
+      <p:pic>
+        <p:nvPicPr>
+          <p:cNvPr id="15" name="Picture 14" descr="linguistic-levels.png"/>
+          <p:cNvPicPr>
+            <a:picLocks noChangeAspect="1"/>
+          </p:cNvPicPr>
+          <p:nvPr/>
+        </p:nvPicPr>
+        <p:blipFill>
+          <a:blip r:embed="rId3"/>
+          <a:stretch>
+            <a:fillRect/>
+          </a:stretch>
+        </p:blipFill>
+        <p:spPr>
+          <a:xfrm>
+            <a:off x="6720840" y="2194560"/>
+            <a:ext cx="4617720" cy="2898356"/>
+          </a:xfrm>
+          <a:prstGeom prst="rect">
+            <a:avLst/>
+          </a:prstGeom>
+        </p:spPr>
+      </p:pic>
+      <p:sp>
+        <p:nvSpPr>
+          <p:cNvPr id="16" name="TextBox 15"/>
+          <p:cNvSpPr txBox="1"/>
+          <p:nvPr/>
+        </p:nvSpPr>
+        <p:spPr>
+          <a:xfrm>
+            <a:off x="548640" y="5989320"/>
+            <a:ext cx="10972800" cy="256032"/>
+          </a:xfrm>
+          <a:prstGeom prst="rect">
+            <a:avLst/>
+          </a:prstGeom>
+          <a:noFill/>
+        </p:spPr>
+        <p:txBody>
+          <a:bodyPr wrap="square" anchor="t">
+            <a:spAutoFit/>
+          </a:bodyPr>
+          <a:lstStyle/>
+          <a:p>
+            <a:pPr algn="l"/>
+            <a:r>
+              <a:rPr sz="1100" b="0">
+                <a:solidFill>
+                  <a:srgbClr val="5A5470"/>
+                </a:solidFill>
+                <a:latin typeface="DIN Next LT W23"/>
+                <a:ea typeface="DIN Next LT W23"/>
+                <a:cs typeface="DIN Next LT W23"/>
+              </a:rPr>
+              <a:t>NLP systems must model form, meaning, and context simultaneously.</a:t>
+            </a:r>
+          </a:p>
+        </p:txBody>
+      </p:sp>
+      <p:sp>
+        <p:nvSpPr>
+          <p:cNvPr id="17" name="Rectangle 16"/>
+          <p:cNvSpPr/>
+          <p:nvPr/>
+        </p:nvSpPr>
+        <p:spPr>
+          <a:xfrm>
+            <a:off x="548640" y="6446520"/>
+            <a:ext cx="11064240" cy="10972"/>
+          </a:xfrm>
+          <a:prstGeom prst="rect">
+            <a:avLst/>
+          </a:prstGeom>
+          <a:solidFill>
+            <a:srgbClr val="5234B7"/>
+          </a:solidFill>
+          <a:ln>
+            <a:noFill/>
+          </a:ln>
+          <a:effectLst/>
+        </p:spPr>
+        <p:style>
+          <a:lnRef idx="1">
+            <a:schemeClr val="accent1"/>
+          </a:lnRef>
+          <a:fillRef idx="3">
+            <a:schemeClr val="accent1"/>
+          </a:fillRef>
+          <a:effectRef idx="2">
+            <a:schemeClr val="accent1"/>
+          </a:effectRef>
+          <a:fontRef idx="minor">
+            <a:schemeClr val="lt1"/>
+          </a:fontRef>
+        </p:style>
+        <p:txBody>
+          <a:bodyPr rtlCol="0" anchor="ctr"/>
+          <a:lstStyle/>
+          <a:p>
+            <a:pPr algn="ctr"/>
+          </a:p>
+        </p:txBody>
+      </p:sp>
+      <p:sp>
+        <p:nvSpPr>
+          <p:cNvPr id="18" name="TextBox 17"/>
+          <p:cNvSpPr txBox="1"/>
+          <p:nvPr/>
+        </p:nvSpPr>
+        <p:spPr>
+          <a:xfrm>
+            <a:off x="548640" y="6510528"/>
+            <a:ext cx="2743200" cy="256032"/>
+          </a:xfrm>
+          <a:prstGeom prst="rect">
+            <a:avLst/>
+          </a:prstGeom>
+          <a:noFill/>
+        </p:spPr>
+        <p:txBody>
+          <a:bodyPr wrap="square" anchor="t">
+            <a:spAutoFit/>
+          </a:bodyPr>
+          <a:lstStyle/>
+          <a:p>
+            <a:pPr algn="l"/>
+            <a:r>
+              <a:rPr sz="1100" b="1">
+                <a:solidFill>
+                  <a:srgbClr val="5234B7"/>
+                </a:solidFill>
+                <a:latin typeface="DIN Next LT W23"/>
+                <a:ea typeface="DIN Next LT W23"/>
+                <a:cs typeface="DIN Next LT W23"/>
+              </a:rPr>
+              <a:t>ETRA</a:t>
+            </a:r>
+          </a:p>
+        </p:txBody>
+      </p:sp>
+      <p:sp>
+        <p:nvSpPr>
+          <p:cNvPr id="19" name="TextBox 18"/>
+          <p:cNvSpPr txBox="1"/>
+          <p:nvPr/>
+        </p:nvSpPr>
+        <p:spPr>
+          <a:xfrm>
+            <a:off x="9601200" y="6510528"/>
+            <a:ext cx="2011680" cy="256032"/>
+          </a:xfrm>
+          <a:prstGeom prst="rect">
+            <a:avLst/>
+          </a:prstGeom>
+          <a:noFill/>
+        </p:spPr>
+        <p:txBody>
+          <a:bodyPr wrap="square" anchor="t">
+            <a:spAutoFit/>
+          </a:bodyPr>
+          <a:lstStyle/>
+          <a:p>
+            <a:pPr algn="r"/>
+            <a:r>
+              <a:rPr sz="1100" b="0">
+                <a:solidFill>
+                  <a:srgbClr val="5A5470"/>
+                </a:solidFill>
+                <a:latin typeface="DIN Next LT W23"/>
+                <a:ea typeface="DIN Next LT W23"/>
+                <a:cs typeface="DIN Next LT W23"/>
+              </a:rPr>
+              <a:t>05  /  53</a:t>
+            </a:r>
+          </a:p>
+        </p:txBody>
+      </p:sp>
+    </p:spTree>
+  </p:cSld>
+  <p:clrMapOvr>
+    <a:masterClrMapping/>
+  </p:clrMapOvr>
+</p:sld>
+</file>
+
+<file path=ppt/slides/slide50.xml><?xml version="1.0" encoding="utf-8"?>
+<p:sld xmlns:a="http://schemas.openxmlformats.org/drawingml/2006/main" xmlns:p="http://schemas.openxmlformats.org/presentationml/2006/main" xmlns:r="http://schemas.openxmlformats.org/officeDocument/2006/relationships">
+  <p:cSld>
+    <p:bg>
+      <p:bgPr>
+        <a:solidFill>
+          <a:srgbClr val="FAF8FF"/>
+        </a:solidFill>
+        <a:effectLst/>
+      </p:bgPr>
+    </p:bg>
+    <p:spTree>
+      <p:nvGrpSpPr>
+        <p:cNvPr id="1" name=""/>
+        <p:cNvGrpSpPr/>
+        <p:nvPr/>
+      </p:nvGrpSpPr>
+      <p:grpSpPr/>
+      <p:sp>
+        <p:nvSpPr>
+          <p:cNvPr id="2" name="Rectangle 1"/>
+          <p:cNvSpPr/>
+          <p:nvPr/>
+        </p:nvSpPr>
+        <p:spPr>
+          <a:xfrm>
+            <a:off x="12136831" y="0"/>
+            <a:ext cx="54864" cy="6858000"/>
+          </a:xfrm>
+          <a:prstGeom prst="rect">
+            <a:avLst/>
+          </a:prstGeom>
+          <a:solidFill>
+            <a:srgbClr val="5234B7"/>
+          </a:solidFill>
+          <a:ln>
+            <a:noFill/>
+          </a:ln>
+          <a:effectLst/>
+        </p:spPr>
+        <p:style>
+          <a:lnRef idx="1">
+            <a:schemeClr val="accent1"/>
+          </a:lnRef>
+          <a:fillRef idx="3">
+            <a:schemeClr val="accent1"/>
+          </a:fillRef>
+          <a:effectRef idx="2">
+            <a:schemeClr val="accent1"/>
+          </a:effectRef>
+          <a:fontRef idx="minor">
+            <a:schemeClr val="lt1"/>
+          </a:fontRef>
+        </p:style>
+        <p:txBody>
+          <a:bodyPr rtlCol="0" anchor="ctr"/>
+          <a:lstStyle/>
+          <a:p>
+            <a:pPr algn="ctr"/>
+          </a:p>
+        </p:txBody>
+      </p:sp>
+      <p:pic>
+        <p:nvPicPr>
+          <p:cNvPr id="3" name="Picture 2" descr="etra-wordmark.png"/>
+          <p:cNvPicPr>
+            <a:picLocks noChangeAspect="1"/>
+          </p:cNvPicPr>
+          <p:nvPr/>
+        </p:nvPicPr>
+        <p:blipFill>
+          <a:blip r:embed="rId2"/>
+          <a:stretch>
+            <a:fillRect/>
+          </a:stretch>
+        </p:blipFill>
+        <p:spPr>
+          <a:xfrm>
+            <a:off x="10561320" y="411480"/>
+            <a:ext cx="1206201" cy="320040"/>
+          </a:xfrm>
+          <a:prstGeom prst="rect">
+            <a:avLst/>
+          </a:prstGeom>
+        </p:spPr>
+      </p:pic>
+      <p:sp>
+        <p:nvSpPr>
+          <p:cNvPr id="4" name="TextBox 3"/>
+          <p:cNvSpPr txBox="1"/>
+          <p:nvPr/>
+        </p:nvSpPr>
+        <p:spPr>
+          <a:xfrm>
+            <a:off x="548640" y="438912"/>
+            <a:ext cx="7772400" cy="274320"/>
+          </a:xfrm>
+          <a:prstGeom prst="rect">
+            <a:avLst/>
+          </a:prstGeom>
+          <a:noFill/>
+        </p:spPr>
+        <p:txBody>
+          <a:bodyPr wrap="square" anchor="t">
+            <a:spAutoFit/>
+          </a:bodyPr>
+          <a:lstStyle/>
+          <a:p>
+            <a:pPr algn="l"/>
+            <a:r>
+              <a:rPr sz="1200" b="0">
+                <a:solidFill>
+                  <a:srgbClr val="5A5470"/>
+                </a:solidFill>
+                <a:latin typeface="DIN Next LT W23"/>
+                <a:ea typeface="DIN Next LT W23"/>
+                <a:cs typeface="DIN Next LT W23"/>
+              </a:rPr>
+              <a:t>S08  ·  NLP</a:t>
+            </a:r>
+          </a:p>
+        </p:txBody>
+      </p:sp>
+      <p:sp>
+        <p:nvSpPr>
+          <p:cNvPr id="5" name="Rectangle 4"/>
+          <p:cNvSpPr/>
+          <p:nvPr/>
+        </p:nvSpPr>
+        <p:spPr>
+          <a:xfrm>
+            <a:off x="548640" y="822960"/>
+            <a:ext cx="11064240" cy="10972"/>
+          </a:xfrm>
+          <a:prstGeom prst="rect">
+            <a:avLst/>
+          </a:prstGeom>
+          <a:solidFill>
+            <a:srgbClr val="E4DCF4"/>
+          </a:solidFill>
+          <a:ln>
+            <a:noFill/>
+          </a:ln>
+          <a:effectLst/>
+        </p:spPr>
+        <p:style>
+          <a:lnRef idx="1">
+            <a:schemeClr val="accent1"/>
+          </a:lnRef>
+          <a:fillRef idx="3">
+            <a:schemeClr val="accent1"/>
+          </a:fillRef>
+          <a:effectRef idx="2">
+            <a:schemeClr val="accent1"/>
+          </a:effectRef>
+          <a:fontRef idx="minor">
+            <a:schemeClr val="lt1"/>
+          </a:fontRef>
+        </p:style>
+        <p:txBody>
+          <a:bodyPr rtlCol="0" anchor="ctr"/>
+          <a:lstStyle/>
+          <a:p>
+            <a:pPr algn="ctr"/>
+          </a:p>
+        </p:txBody>
+      </p:sp>
+      <p:sp>
+        <p:nvSpPr>
+          <p:cNvPr id="6" name="TextBox 5"/>
+          <p:cNvSpPr txBox="1"/>
+          <p:nvPr/>
+        </p:nvSpPr>
+        <p:spPr>
+          <a:xfrm>
+            <a:off x="548640" y="1024128"/>
+            <a:ext cx="10241280" cy="566928"/>
+          </a:xfrm>
+          <a:prstGeom prst="rect">
+            <a:avLst/>
+          </a:prstGeom>
+          <a:noFill/>
+        </p:spPr>
+        <p:txBody>
+          <a:bodyPr wrap="square" anchor="t">
+            <a:spAutoFit/>
+          </a:bodyPr>
+          <a:lstStyle/>
+          <a:p>
+            <a:pPr algn="l"/>
+            <a:r>
+              <a:rPr sz="3200" b="1">
+                <a:solidFill>
+                  <a:srgbClr val="5234B7"/>
+                </a:solidFill>
+                <a:latin typeface="DIN Next LT W23"/>
+                <a:ea typeface="DIN Next LT W23"/>
+                <a:cs typeface="DIN Next LT W23"/>
+              </a:rPr>
+              <a:t>Transformer Encoder-Decoder Overview</a:t>
+            </a:r>
+          </a:p>
+        </p:txBody>
+      </p:sp>
+      <p:sp>
+        <p:nvSpPr>
+          <p:cNvPr id="7" name="TextBox 6"/>
+          <p:cNvSpPr txBox="1"/>
+          <p:nvPr/>
+        </p:nvSpPr>
+        <p:spPr>
+          <a:xfrm>
+            <a:off x="548640" y="1591056"/>
+            <a:ext cx="10241280" cy="310896"/>
+          </a:xfrm>
+          <a:prstGeom prst="rect">
+            <a:avLst/>
+          </a:prstGeom>
+          <a:noFill/>
+        </p:spPr>
+        <p:txBody>
+          <a:bodyPr wrap="square" anchor="t">
+            <a:spAutoFit/>
+          </a:bodyPr>
+          <a:lstStyle/>
+          <a:p>
+            <a:pPr algn="l"/>
+            <a:r>
+              <a:rPr sz="1500" b="0">
+                <a:solidFill>
+                  <a:srgbClr val="5A5470"/>
+                </a:solidFill>
+                <a:latin typeface="DIN Next LT W23"/>
+                <a:ea typeface="DIN Next LT W23"/>
+                <a:cs typeface="DIN Next LT W23"/>
+              </a:rPr>
+              <a:t>Bridge to Week 4 GenAI — encoder-decoder intuition before BERT/GPT</a:t>
+            </a:r>
+          </a:p>
+        </p:txBody>
+      </p:sp>
+      <p:sp>
+        <p:nvSpPr>
+          <p:cNvPr id="8" name="Rounded Rectangle 7"/>
+          <p:cNvSpPr/>
+          <p:nvPr/>
+        </p:nvSpPr>
+        <p:spPr>
+          <a:xfrm>
+            <a:off x="548640" y="1993392"/>
+            <a:ext cx="10972800" cy="3977639"/>
+          </a:xfrm>
+          <a:prstGeom prst="roundRect">
+            <a:avLst>
+              <a:gd name="adj" fmla="val 10000"/>
+            </a:avLst>
+          </a:prstGeom>
+          <a:solidFill>
+            <a:srgbClr val="EEE8FA"/>
+          </a:solidFill>
+          <a:ln>
+            <a:noFill/>
+          </a:ln>
+          <a:effectLst/>
+        </p:spPr>
+        <p:style>
+          <a:lnRef idx="1">
+            <a:schemeClr val="accent1"/>
+          </a:lnRef>
+          <a:fillRef idx="3">
+            <a:schemeClr val="accent1"/>
+          </a:fillRef>
+          <a:effectRef idx="2">
+            <a:schemeClr val="accent1"/>
+          </a:effectRef>
+          <a:fontRef idx="minor">
+            <a:schemeClr val="lt1"/>
+          </a:fontRef>
+        </p:style>
+        <p:txBody>
+          <a:bodyPr rtlCol="0" anchor="ctr"/>
+          <a:lstStyle/>
+          <a:p>
+            <a:pPr algn="ctr"/>
+          </a:p>
+        </p:txBody>
+      </p:sp>
+      <p:pic>
+        <p:nvPicPr>
+          <p:cNvPr id="9" name="Picture 8" descr="transformer-encdec.png"/>
+          <p:cNvPicPr>
+            <a:picLocks noChangeAspect="1"/>
+          </p:cNvPicPr>
+          <p:nvPr/>
+        </p:nvPicPr>
+        <p:blipFill>
+          <a:blip r:embed="rId3"/>
+          <a:stretch>
+            <a:fillRect/>
+          </a:stretch>
+        </p:blipFill>
+        <p:spPr>
+          <a:xfrm>
+            <a:off x="898663" y="2130552"/>
+            <a:ext cx="10272753" cy="3703320"/>
+          </a:xfrm>
+          <a:prstGeom prst="rect">
+            <a:avLst/>
+          </a:prstGeom>
+        </p:spPr>
+      </p:pic>
+      <p:sp>
+        <p:nvSpPr>
+          <p:cNvPr id="10" name="TextBox 9"/>
+          <p:cNvSpPr txBox="1"/>
+          <p:nvPr/>
+        </p:nvSpPr>
+        <p:spPr>
+          <a:xfrm>
+            <a:off x="548640" y="6309360"/>
+            <a:ext cx="10972800" cy="228600"/>
+          </a:xfrm>
+          <a:prstGeom prst="rect">
+            <a:avLst/>
+          </a:prstGeom>
+          <a:noFill/>
+        </p:spPr>
+        <p:txBody>
+          <a:bodyPr wrap="square" anchor="t">
+            <a:spAutoFit/>
+          </a:bodyPr>
+          <a:lstStyle/>
+          <a:p>
+            <a:pPr algn="l"/>
+            <a:r>
+              <a:rPr sz="1100" b="0">
+                <a:solidFill>
+                  <a:srgbClr val="5A5470"/>
+                </a:solidFill>
+                <a:latin typeface="DIN Next LT W23"/>
+                <a:ea typeface="DIN Next LT W23"/>
+                <a:cs typeface="DIN Next LT W23"/>
+              </a:rPr>
+              <a:t>Attention mechanisms reduce reliance on recurrence for sequence modeling.</a:t>
+            </a:r>
+          </a:p>
+        </p:txBody>
+      </p:sp>
+      <p:sp>
+        <p:nvSpPr>
+          <p:cNvPr id="11" name="Rectangle 10"/>
+          <p:cNvSpPr/>
+          <p:nvPr/>
+        </p:nvSpPr>
+        <p:spPr>
+          <a:xfrm>
+            <a:off x="548640" y="6446520"/>
+            <a:ext cx="11064240" cy="10972"/>
+          </a:xfrm>
+          <a:prstGeom prst="rect">
+            <a:avLst/>
+          </a:prstGeom>
+          <a:solidFill>
+            <a:srgbClr val="5234B7"/>
+          </a:solidFill>
+          <a:ln>
+            <a:noFill/>
+          </a:ln>
+          <a:effectLst/>
+        </p:spPr>
+        <p:style>
+          <a:lnRef idx="1">
+            <a:schemeClr val="accent1"/>
+          </a:lnRef>
+          <a:fillRef idx="3">
+            <a:schemeClr val="accent1"/>
+          </a:fillRef>
+          <a:effectRef idx="2">
+            <a:schemeClr val="accent1"/>
+          </a:effectRef>
+          <a:fontRef idx="minor">
+            <a:schemeClr val="lt1"/>
+          </a:fontRef>
+        </p:style>
+        <p:txBody>
+          <a:bodyPr rtlCol="0" anchor="ctr"/>
+          <a:lstStyle/>
+          <a:p>
+            <a:pPr algn="ctr"/>
+          </a:p>
+        </p:txBody>
+      </p:sp>
+      <p:sp>
+        <p:nvSpPr>
+          <p:cNvPr id="12" name="TextBox 11"/>
+          <p:cNvSpPr txBox="1"/>
+          <p:nvPr/>
+        </p:nvSpPr>
+        <p:spPr>
+          <a:xfrm>
+            <a:off x="548640" y="6510528"/>
+            <a:ext cx="2743200" cy="256032"/>
+          </a:xfrm>
+          <a:prstGeom prst="rect">
+            <a:avLst/>
+          </a:prstGeom>
+          <a:noFill/>
+        </p:spPr>
+        <p:txBody>
+          <a:bodyPr wrap="square" anchor="t">
+            <a:spAutoFit/>
+          </a:bodyPr>
+          <a:lstStyle/>
+          <a:p>
+            <a:pPr algn="l"/>
+            <a:r>
+              <a:rPr sz="1100" b="1">
+                <a:solidFill>
+                  <a:srgbClr val="5234B7"/>
+                </a:solidFill>
+                <a:latin typeface="DIN Next LT W23"/>
+                <a:ea typeface="DIN Next LT W23"/>
+                <a:cs typeface="DIN Next LT W23"/>
+              </a:rPr>
+              <a:t>ETRA</a:t>
+            </a:r>
+          </a:p>
+        </p:txBody>
+      </p:sp>
+      <p:sp>
+        <p:nvSpPr>
+          <p:cNvPr id="13" name="TextBox 12"/>
+          <p:cNvSpPr txBox="1"/>
+          <p:nvPr/>
+        </p:nvSpPr>
+        <p:spPr>
+          <a:xfrm>
+            <a:off x="9601200" y="6510528"/>
+            <a:ext cx="2011680" cy="256032"/>
+          </a:xfrm>
+          <a:prstGeom prst="rect">
+            <a:avLst/>
+          </a:prstGeom>
+          <a:noFill/>
+        </p:spPr>
+        <p:txBody>
+          <a:bodyPr wrap="square" anchor="t">
+            <a:spAutoFit/>
+          </a:bodyPr>
+          <a:lstStyle/>
+          <a:p>
+            <a:pPr algn="r"/>
+            <a:r>
+              <a:rPr sz="1100" b="0">
+                <a:solidFill>
+                  <a:srgbClr val="5A5470"/>
+                </a:solidFill>
+                <a:latin typeface="DIN Next LT W23"/>
+                <a:ea typeface="DIN Next LT W23"/>
+                <a:cs typeface="DIN Next LT W23"/>
+              </a:rPr>
+              <a:t>50  /  53</a:t>
             </a:r>
           </a:p>
         </p:txBody>
@@ -33555,74 +33287,78 @@
       </p:sp>
       <p:sp>
         <p:nvSpPr>
-          <p:cNvPr id="8" name="Rounded Rectangle 7"/>
-          <p:cNvSpPr/>
+          <p:cNvPr id="8" name="TextBox 7"/>
+          <p:cNvSpPr txBox="1"/>
           <p:nvPr/>
         </p:nvSpPr>
         <p:spPr>
           <a:xfrm>
             <a:off x="548640" y="1993392"/>
-            <a:ext cx="10972800" cy="3977639"/>
-          </a:xfrm>
-          <a:prstGeom prst="roundRect">
-            <a:avLst>
-              <a:gd name="adj" fmla="val 10000"/>
-            </a:avLst>
-          </a:prstGeom>
-          <a:solidFill>
-            <a:srgbClr val="EEE8FA"/>
-          </a:solidFill>
-          <a:ln>
-            <a:noFill/>
-          </a:ln>
-          <a:effectLst/>
-        </p:spPr>
-        <p:style>
-          <a:lnRef idx="1">
-            <a:schemeClr val="accent1"/>
-          </a:lnRef>
-          <a:fillRef idx="3">
-            <a:schemeClr val="accent1"/>
-          </a:fillRef>
-          <a:effectRef idx="2">
-            <a:schemeClr val="accent1"/>
-          </a:effectRef>
-          <a:fontRef idx="minor">
-            <a:schemeClr val="lt1"/>
-          </a:fontRef>
-        </p:style>
-        <p:txBody>
-          <a:bodyPr rtlCol="0" anchor="ctr"/>
-          <a:lstStyle/>
-          <a:p>
-            <a:pPr algn="ctr"/>
-          </a:p>
-        </p:txBody>
-      </p:sp>
-      <p:pic>
-        <p:nvPicPr>
-          <p:cNvPr id="9" name="Picture 8" descr="transformer-encdec.png"/>
-          <p:cNvPicPr>
-            <a:picLocks noChangeAspect="1"/>
-          </p:cNvPicPr>
-          <p:nvPr/>
-        </p:nvPicPr>
-        <p:blipFill>
-          <a:blip r:embed="rId3"/>
-          <a:stretch>
-            <a:fillRect/>
-          </a:stretch>
-        </p:blipFill>
-        <p:spPr>
-          <a:xfrm>
-            <a:off x="898663" y="2130552"/>
-            <a:ext cx="10272753" cy="3703320"/>
-          </a:xfrm>
-          <a:prstGeom prst="rect">
-            <a:avLst/>
-          </a:prstGeom>
-        </p:spPr>
-      </p:pic>
+            <a:ext cx="320040" cy="384048"/>
+          </a:xfrm>
+          <a:prstGeom prst="rect">
+            <a:avLst/>
+          </a:prstGeom>
+          <a:noFill/>
+        </p:spPr>
+        <p:txBody>
+          <a:bodyPr wrap="square" anchor="t">
+            <a:spAutoFit/>
+          </a:bodyPr>
+          <a:lstStyle/>
+          <a:p>
+            <a:pPr algn="l"/>
+            <a:r>
+              <a:rPr sz="1400" b="0">
+                <a:solidFill>
+                  <a:srgbClr val="9E59CD"/>
+                </a:solidFill>
+                <a:latin typeface="DIN Next LT W23"/>
+                <a:ea typeface="DIN Next LT W23"/>
+                <a:cs typeface="DIN Next LT W23"/>
+              </a:rPr>
+              <a:t>–</a:t>
+            </a:r>
+          </a:p>
+        </p:txBody>
+      </p:sp>
+      <p:sp>
+        <p:nvSpPr>
+          <p:cNvPr id="9" name="TextBox 8"/>
+          <p:cNvSpPr txBox="1"/>
+          <p:nvPr/>
+        </p:nvSpPr>
+        <p:spPr>
+          <a:xfrm>
+            <a:off x="914400" y="1993392"/>
+            <a:ext cx="9875519" cy="384048"/>
+          </a:xfrm>
+          <a:prstGeom prst="rect">
+            <a:avLst/>
+          </a:prstGeom>
+          <a:noFill/>
+        </p:spPr>
+        <p:txBody>
+          <a:bodyPr wrap="square" anchor="t">
+            <a:spAutoFit/>
+          </a:bodyPr>
+          <a:lstStyle/>
+          <a:p>
+            <a:pPr algn="l"/>
+            <a:r>
+              <a:rPr sz="1400" b="0">
+                <a:solidFill>
+                  <a:srgbClr val="121018"/>
+                </a:solidFill>
+                <a:latin typeface="DIN Next LT W23"/>
+                <a:ea typeface="DIN Next LT W23"/>
+                <a:cs typeface="DIN Next LT W23"/>
+              </a:rPr>
+              <a:t>Encoder builds contextual token representations from source text.</a:t>
+            </a:r>
+          </a:p>
+        </p:txBody>
+      </p:sp>
       <p:sp>
         <p:nvSpPr>
           <p:cNvPr id="10" name="TextBox 9"/>
@@ -33631,8 +33367,8 @@
         </p:nvSpPr>
         <p:spPr>
           <a:xfrm>
-            <a:off x="548640" y="6309360"/>
-            <a:ext cx="10972800" cy="228600"/>
+            <a:off x="548640" y="2468880"/>
+            <a:ext cx="320040" cy="384048"/>
           </a:xfrm>
           <a:prstGeom prst="rect">
             <a:avLst/>
@@ -33647,7 +33383,155 @@
           <a:p>
             <a:pPr algn="l"/>
             <a:r>
-              <a:rPr sz="1100" b="0">
+              <a:rPr sz="1400" b="0">
+                <a:solidFill>
+                  <a:srgbClr val="9E59CD"/>
+                </a:solidFill>
+                <a:latin typeface="DIN Next LT W23"/>
+                <a:ea typeface="DIN Next LT W23"/>
+                <a:cs typeface="DIN Next LT W23"/>
+              </a:rPr>
+              <a:t>–</a:t>
+            </a:r>
+          </a:p>
+        </p:txBody>
+      </p:sp>
+      <p:sp>
+        <p:nvSpPr>
+          <p:cNvPr id="11" name="TextBox 10"/>
+          <p:cNvSpPr txBox="1"/>
+          <p:nvPr/>
+        </p:nvSpPr>
+        <p:spPr>
+          <a:xfrm>
+            <a:off x="914400" y="2468880"/>
+            <a:ext cx="9875519" cy="384048"/>
+          </a:xfrm>
+          <a:prstGeom prst="rect">
+            <a:avLst/>
+          </a:prstGeom>
+          <a:noFill/>
+        </p:spPr>
+        <p:txBody>
+          <a:bodyPr wrap="square" anchor="t">
+            <a:spAutoFit/>
+          </a:bodyPr>
+          <a:lstStyle/>
+          <a:p>
+            <a:pPr algn="l"/>
+            <a:r>
+              <a:rPr sz="1400" b="0">
+                <a:solidFill>
+                  <a:srgbClr val="121018"/>
+                </a:solidFill>
+                <a:latin typeface="DIN Next LT W23"/>
+                <a:ea typeface="DIN Next LT W23"/>
+                <a:cs typeface="DIN Next LT W23"/>
+              </a:rPr>
+              <a:t>Decoder generates target tokens autoregressively with attention to encoder states.</a:t>
+            </a:r>
+          </a:p>
+        </p:txBody>
+      </p:sp>
+      <p:sp>
+        <p:nvSpPr>
+          <p:cNvPr id="12" name="TextBox 11"/>
+          <p:cNvSpPr txBox="1"/>
+          <p:nvPr/>
+        </p:nvSpPr>
+        <p:spPr>
+          <a:xfrm>
+            <a:off x="548640" y="2944368"/>
+            <a:ext cx="320040" cy="384048"/>
+          </a:xfrm>
+          <a:prstGeom prst="rect">
+            <a:avLst/>
+          </a:prstGeom>
+          <a:noFill/>
+        </p:spPr>
+        <p:txBody>
+          <a:bodyPr wrap="square" anchor="t">
+            <a:spAutoFit/>
+          </a:bodyPr>
+          <a:lstStyle/>
+          <a:p>
+            <a:pPr algn="l"/>
+            <a:r>
+              <a:rPr sz="1400" b="0">
+                <a:solidFill>
+                  <a:srgbClr val="9E59CD"/>
+                </a:solidFill>
+                <a:latin typeface="DIN Next LT W23"/>
+                <a:ea typeface="DIN Next LT W23"/>
+                <a:cs typeface="DIN Next LT W23"/>
+              </a:rPr>
+              <a:t>–</a:t>
+            </a:r>
+          </a:p>
+        </p:txBody>
+      </p:sp>
+      <p:sp>
+        <p:nvSpPr>
+          <p:cNvPr id="13" name="TextBox 12"/>
+          <p:cNvSpPr txBox="1"/>
+          <p:nvPr/>
+        </p:nvSpPr>
+        <p:spPr>
+          <a:xfrm>
+            <a:off x="914400" y="2944368"/>
+            <a:ext cx="9875519" cy="384048"/>
+          </a:xfrm>
+          <a:prstGeom prst="rect">
+            <a:avLst/>
+          </a:prstGeom>
+          <a:noFill/>
+        </p:spPr>
+        <p:txBody>
+          <a:bodyPr wrap="square" anchor="t">
+            <a:spAutoFit/>
+          </a:bodyPr>
+          <a:lstStyle/>
+          <a:p>
+            <a:pPr algn="l"/>
+            <a:r>
+              <a:rPr sz="1400" b="0">
+                <a:solidFill>
+                  <a:srgbClr val="121018"/>
+                </a:solidFill>
+                <a:latin typeface="DIN Next LT W23"/>
+                <a:ea typeface="DIN Next LT W23"/>
+                <a:cs typeface="DIN Next LT W23"/>
+              </a:rPr>
+              <a:t>Foundation architecture for translation, summarization, and many LLM pipelines.</a:t>
+            </a:r>
+          </a:p>
+        </p:txBody>
+      </p:sp>
+      <p:sp>
+        <p:nvSpPr>
+          <p:cNvPr id="14" name="TextBox 13"/>
+          <p:cNvSpPr txBox="1"/>
+          <p:nvPr/>
+        </p:nvSpPr>
+        <p:spPr>
+          <a:xfrm>
+            <a:off x="548640" y="5897880"/>
+            <a:ext cx="10972800" cy="274320"/>
+          </a:xfrm>
+          <a:prstGeom prst="rect">
+            <a:avLst/>
+          </a:prstGeom>
+          <a:noFill/>
+        </p:spPr>
+        <p:txBody>
+          <a:bodyPr wrap="square" anchor="t">
+            <a:spAutoFit/>
+          </a:bodyPr>
+          <a:lstStyle/>
+          <a:p>
+            <a:pPr algn="l"/>
+            <a:r>
+              <a:rPr sz="1200" b="0">
                 <a:solidFill>
                   <a:srgbClr val="5A5470"/>
                 </a:solidFill>
@@ -33662,7 +33546,7 @@
       </p:sp>
       <p:sp>
         <p:nvSpPr>
-          <p:cNvPr id="11" name="Rectangle 10"/>
+          <p:cNvPr id="15" name="Rectangle 14"/>
           <p:cNvSpPr/>
           <p:nvPr/>
         </p:nvSpPr>
@@ -33706,7 +33590,7 @@
       </p:sp>
       <p:sp>
         <p:nvSpPr>
-          <p:cNvPr id="12" name="TextBox 11"/>
+          <p:cNvPr id="16" name="TextBox 15"/>
           <p:cNvSpPr txBox="1"/>
           <p:nvPr/>
         </p:nvSpPr>
@@ -33743,7 +33627,7 @@
       </p:sp>
       <p:sp>
         <p:nvSpPr>
-          <p:cNvPr id="13" name="TextBox 12"/>
+          <p:cNvPr id="17" name="TextBox 16"/>
           <p:cNvSpPr txBox="1"/>
           <p:nvPr/>
         </p:nvSpPr>
@@ -33773,7 +33657,7 @@
                 <a:ea typeface="DIN Next LT W23"/>
                 <a:cs typeface="DIN Next LT W23"/>
               </a:rPr>
-              <a:t>51  /  54</a:t>
+              <a:t>51  /  53</a:t>
             </a:r>
           </a:p>
         </p:txBody>
@@ -33904,7 +33788,7 @@
                 <a:ea typeface="DIN Next LT W23"/>
                 <a:cs typeface="DIN Next LT W23"/>
               </a:rPr>
-              <a:t>S08  ·  NLP</a:t>
+              <a:t>S08  ·  Takeaways</a:t>
             </a:r>
           </a:p>
         </p:txBody>
@@ -33961,8 +33845,8 @@
         </p:nvSpPr>
         <p:spPr>
           <a:xfrm>
-            <a:off x="548640" y="1024128"/>
-            <a:ext cx="10241280" cy="566928"/>
+            <a:off x="548640" y="1051560"/>
+            <a:ext cx="10241280" cy="594360"/>
           </a:xfrm>
           <a:prstGeom prst="rect">
             <a:avLst/>
@@ -33985,7 +33869,7 @@
                 <a:ea typeface="DIN Next LT W23"/>
                 <a:cs typeface="DIN Next LT W23"/>
               </a:rPr>
-              <a:t>Transformer Encoder-Decoder Overview</a:t>
+              <a:t>3 Ideas to Keep</a:t>
             </a:r>
           </a:p>
         </p:txBody>
@@ -33998,8 +33882,8 @@
         </p:nvSpPr>
         <p:spPr>
           <a:xfrm>
-            <a:off x="548640" y="1591056"/>
-            <a:ext cx="10241280" cy="310896"/>
+            <a:off x="548640" y="1600200"/>
+            <a:ext cx="10241280" cy="365760"/>
           </a:xfrm>
           <a:prstGeom prst="rect">
             <a:avLst/>
@@ -34022,21 +33906,67 @@
                 <a:ea typeface="DIN Next LT W23"/>
                 <a:cs typeface="DIN Next LT W23"/>
               </a:rPr>
-              <a:t>Bridge to Week 4 GenAI — encoder-decoder intuition before BERT/GPT</a:t>
-            </a:r>
-          </a:p>
-        </p:txBody>
-      </p:sp>
-      <p:sp>
-        <p:nvSpPr>
-          <p:cNvPr id="8" name="TextBox 7"/>
-          <p:cNvSpPr txBox="1"/>
-          <p:nvPr/>
-        </p:nvSpPr>
-        <p:spPr>
-          <a:xfrm>
-            <a:off x="548640" y="1993392"/>
-            <a:ext cx="320040" cy="384048"/>
+              <a:t>Leave with these</a:t>
+            </a:r>
+          </a:p>
+        </p:txBody>
+      </p:sp>
+      <p:sp>
+        <p:nvSpPr>
+          <p:cNvPr id="8" name="Rounded Rectangle 7"/>
+          <p:cNvSpPr/>
+          <p:nvPr/>
+        </p:nvSpPr>
+        <p:spPr>
+          <a:xfrm>
+            <a:off x="548640" y="2148840"/>
+            <a:ext cx="10972800" cy="987552"/>
+          </a:xfrm>
+          <a:prstGeom prst="roundRect">
+            <a:avLst>
+              <a:gd name="adj" fmla="val 10000"/>
+            </a:avLst>
+          </a:prstGeom>
+          <a:solidFill>
+            <a:srgbClr val="EEE8FA"/>
+          </a:solidFill>
+          <a:ln>
+            <a:noFill/>
+          </a:ln>
+          <a:effectLst/>
+        </p:spPr>
+        <p:style>
+          <a:lnRef idx="1">
+            <a:schemeClr val="accent1"/>
+          </a:lnRef>
+          <a:fillRef idx="3">
+            <a:schemeClr val="accent1"/>
+          </a:fillRef>
+          <a:effectRef idx="2">
+            <a:schemeClr val="accent1"/>
+          </a:effectRef>
+          <a:fontRef idx="minor">
+            <a:schemeClr val="lt1"/>
+          </a:fontRef>
+        </p:style>
+        <p:txBody>
+          <a:bodyPr rtlCol="0" anchor="ctr"/>
+          <a:lstStyle/>
+          <a:p>
+            <a:pPr algn="ctr"/>
+          </a:p>
+        </p:txBody>
+      </p:sp>
+      <p:sp>
+        <p:nvSpPr>
+          <p:cNvPr id="9" name="TextBox 8"/>
+          <p:cNvSpPr txBox="1"/>
+          <p:nvPr/>
+        </p:nvSpPr>
+        <p:spPr>
+          <a:xfrm>
+            <a:off x="822960" y="2404872"/>
+            <a:ext cx="457200" cy="457200"/>
           </a:xfrm>
           <a:prstGeom prst="rect">
             <a:avLst/>
@@ -34051,29 +33981,29 @@
           <a:p>
             <a:pPr algn="l"/>
             <a:r>
-              <a:rPr sz="1400" b="0">
-                <a:solidFill>
-                  <a:srgbClr val="9E59CD"/>
-                </a:solidFill>
-                <a:latin typeface="DIN Next LT W23"/>
-                <a:ea typeface="DIN Next LT W23"/>
-                <a:cs typeface="DIN Next LT W23"/>
-              </a:rPr>
-              <a:t>–</a:t>
-            </a:r>
-          </a:p>
-        </p:txBody>
-      </p:sp>
-      <p:sp>
-        <p:nvSpPr>
-          <p:cNvPr id="9" name="TextBox 8"/>
-          <p:cNvSpPr txBox="1"/>
-          <p:nvPr/>
-        </p:nvSpPr>
-        <p:spPr>
-          <a:xfrm>
-            <a:off x="914400" y="1993392"/>
-            <a:ext cx="9875519" cy="384048"/>
+              <a:rPr sz="2200" b="1">
+                <a:solidFill>
+                  <a:srgbClr val="5234B7"/>
+                </a:solidFill>
+                <a:latin typeface="DIN Next LT W23"/>
+                <a:ea typeface="DIN Next LT W23"/>
+                <a:cs typeface="DIN Next LT W23"/>
+              </a:rPr>
+              <a:t>1</a:t>
+            </a:r>
+          </a:p>
+        </p:txBody>
+      </p:sp>
+      <p:sp>
+        <p:nvSpPr>
+          <p:cNvPr id="10" name="TextBox 9"/>
+          <p:cNvSpPr txBox="1"/>
+          <p:nvPr/>
+        </p:nvSpPr>
+        <p:spPr>
+          <a:xfrm>
+            <a:off x="1417320" y="2404872"/>
+            <a:ext cx="9692640" cy="548640"/>
           </a:xfrm>
           <a:prstGeom prst="rect">
             <a:avLst/>
@@ -34088,7 +34018,7 @@
           <a:p>
             <a:pPr algn="l"/>
             <a:r>
-              <a:rPr sz="1400" b="0">
+              <a:rPr sz="1600" b="0">
                 <a:solidFill>
                   <a:srgbClr val="121018"/>
                 </a:solidFill>
@@ -34096,21 +34026,67 @@
                 <a:ea typeface="DIN Next LT W23"/>
                 <a:cs typeface="DIN Next LT W23"/>
               </a:rPr>
-              <a:t>Encoder builds contextual token representations from source text.</a:t>
-            </a:r>
-          </a:p>
-        </p:txBody>
-      </p:sp>
-      <p:sp>
-        <p:nvSpPr>
-          <p:cNvPr id="10" name="TextBox 9"/>
-          <p:cNvSpPr txBox="1"/>
-          <p:nvPr/>
-        </p:nvSpPr>
-        <p:spPr>
-          <a:xfrm>
-            <a:off x="548640" y="2468880"/>
-            <a:ext cx="320040" cy="384048"/>
+              <a:t>Language is ambiguous — cleaning and tokenization choices persist through the pipeline.</a:t>
+            </a:r>
+          </a:p>
+        </p:txBody>
+      </p:sp>
+      <p:sp>
+        <p:nvSpPr>
+          <p:cNvPr id="11" name="Rounded Rectangle 10"/>
+          <p:cNvSpPr/>
+          <p:nvPr/>
+        </p:nvSpPr>
+        <p:spPr>
+          <a:xfrm>
+            <a:off x="548640" y="3291840"/>
+            <a:ext cx="10972800" cy="987552"/>
+          </a:xfrm>
+          <a:prstGeom prst="roundRect">
+            <a:avLst>
+              <a:gd name="adj" fmla="val 10000"/>
+            </a:avLst>
+          </a:prstGeom>
+          <a:solidFill>
+            <a:srgbClr val="EEE8FA"/>
+          </a:solidFill>
+          <a:ln>
+            <a:noFill/>
+          </a:ln>
+          <a:effectLst/>
+        </p:spPr>
+        <p:style>
+          <a:lnRef idx="1">
+            <a:schemeClr val="accent1"/>
+          </a:lnRef>
+          <a:fillRef idx="3">
+            <a:schemeClr val="accent1"/>
+          </a:fillRef>
+          <a:effectRef idx="2">
+            <a:schemeClr val="accent1"/>
+          </a:effectRef>
+          <a:fontRef idx="minor">
+            <a:schemeClr val="lt1"/>
+          </a:fontRef>
+        </p:style>
+        <p:txBody>
+          <a:bodyPr rtlCol="0" anchor="ctr"/>
+          <a:lstStyle/>
+          <a:p>
+            <a:pPr algn="ctr"/>
+          </a:p>
+        </p:txBody>
+      </p:sp>
+      <p:sp>
+        <p:nvSpPr>
+          <p:cNvPr id="12" name="TextBox 11"/>
+          <p:cNvSpPr txBox="1"/>
+          <p:nvPr/>
+        </p:nvSpPr>
+        <p:spPr>
+          <a:xfrm>
+            <a:off x="822960" y="3547872"/>
+            <a:ext cx="457200" cy="457200"/>
           </a:xfrm>
           <a:prstGeom prst="rect">
             <a:avLst/>
@@ -34125,29 +34101,29 @@
           <a:p>
             <a:pPr algn="l"/>
             <a:r>
-              <a:rPr sz="1400" b="0">
-                <a:solidFill>
-                  <a:srgbClr val="9E59CD"/>
-                </a:solidFill>
-                <a:latin typeface="DIN Next LT W23"/>
-                <a:ea typeface="DIN Next LT W23"/>
-                <a:cs typeface="DIN Next LT W23"/>
-              </a:rPr>
-              <a:t>–</a:t>
-            </a:r>
-          </a:p>
-        </p:txBody>
-      </p:sp>
-      <p:sp>
-        <p:nvSpPr>
-          <p:cNvPr id="11" name="TextBox 10"/>
-          <p:cNvSpPr txBox="1"/>
-          <p:nvPr/>
-        </p:nvSpPr>
-        <p:spPr>
-          <a:xfrm>
-            <a:off x="914400" y="2468880"/>
-            <a:ext cx="9875519" cy="384048"/>
+              <a:rPr sz="2200" b="1">
+                <a:solidFill>
+                  <a:srgbClr val="5234B7"/>
+                </a:solidFill>
+                <a:latin typeface="DIN Next LT W23"/>
+                <a:ea typeface="DIN Next LT W23"/>
+                <a:cs typeface="DIN Next LT W23"/>
+              </a:rPr>
+              <a:t>2</a:t>
+            </a:r>
+          </a:p>
+        </p:txBody>
+      </p:sp>
+      <p:sp>
+        <p:nvSpPr>
+          <p:cNvPr id="13" name="TextBox 12"/>
+          <p:cNvSpPr txBox="1"/>
+          <p:nvPr/>
+        </p:nvSpPr>
+        <p:spPr>
+          <a:xfrm>
+            <a:off x="1417320" y="3547872"/>
+            <a:ext cx="9692640" cy="548640"/>
           </a:xfrm>
           <a:prstGeom prst="rect">
             <a:avLst/>
@@ -34162,7 +34138,7 @@
           <a:p>
             <a:pPr algn="l"/>
             <a:r>
-              <a:rPr sz="1400" b="0">
+              <a:rPr sz="1600" b="0">
                 <a:solidFill>
                   <a:srgbClr val="121018"/>
                 </a:solidFill>
@@ -34170,21 +34146,67 @@
                 <a:ea typeface="DIN Next LT W23"/>
                 <a:cs typeface="DIN Next LT W23"/>
               </a:rPr>
-              <a:t>Decoder generates target tokens autoregressively with attention to encoder states.</a:t>
-            </a:r>
-          </a:p>
-        </p:txBody>
-      </p:sp>
-      <p:sp>
-        <p:nvSpPr>
-          <p:cNvPr id="12" name="TextBox 11"/>
-          <p:cNvSpPr txBox="1"/>
-          <p:nvPr/>
-        </p:nvSpPr>
-        <p:spPr>
-          <a:xfrm>
-            <a:off x="548640" y="2944368"/>
-            <a:ext cx="320040" cy="384048"/>
+              <a:t>N-grams and RNNs model sequences; attention removes the seq2seq bottleneck.</a:t>
+            </a:r>
+          </a:p>
+        </p:txBody>
+      </p:sp>
+      <p:sp>
+        <p:nvSpPr>
+          <p:cNvPr id="14" name="Rounded Rectangle 13"/>
+          <p:cNvSpPr/>
+          <p:nvPr/>
+        </p:nvSpPr>
+        <p:spPr>
+          <a:xfrm>
+            <a:off x="548640" y="4434840"/>
+            <a:ext cx="10972800" cy="987552"/>
+          </a:xfrm>
+          <a:prstGeom prst="roundRect">
+            <a:avLst>
+              <a:gd name="adj" fmla="val 10000"/>
+            </a:avLst>
+          </a:prstGeom>
+          <a:solidFill>
+            <a:srgbClr val="EEE8FA"/>
+          </a:solidFill>
+          <a:ln>
+            <a:noFill/>
+          </a:ln>
+          <a:effectLst/>
+        </p:spPr>
+        <p:style>
+          <a:lnRef idx="1">
+            <a:schemeClr val="accent1"/>
+          </a:lnRef>
+          <a:fillRef idx="3">
+            <a:schemeClr val="accent1"/>
+          </a:fillRef>
+          <a:effectRef idx="2">
+            <a:schemeClr val="accent1"/>
+          </a:effectRef>
+          <a:fontRef idx="minor">
+            <a:schemeClr val="lt1"/>
+          </a:fontRef>
+        </p:style>
+        <p:txBody>
+          <a:bodyPr rtlCol="0" anchor="ctr"/>
+          <a:lstStyle/>
+          <a:p>
+            <a:pPr algn="ctr"/>
+          </a:p>
+        </p:txBody>
+      </p:sp>
+      <p:sp>
+        <p:nvSpPr>
+          <p:cNvPr id="15" name="TextBox 14"/>
+          <p:cNvSpPr txBox="1"/>
+          <p:nvPr/>
+        </p:nvSpPr>
+        <p:spPr>
+          <a:xfrm>
+            <a:off x="822960" y="4690872"/>
+            <a:ext cx="457200" cy="457200"/>
           </a:xfrm>
           <a:prstGeom prst="rect">
             <a:avLst/>
@@ -34199,29 +34221,29 @@
           <a:p>
             <a:pPr algn="l"/>
             <a:r>
-              <a:rPr sz="1400" b="0">
-                <a:solidFill>
-                  <a:srgbClr val="9E59CD"/>
-                </a:solidFill>
-                <a:latin typeface="DIN Next LT W23"/>
-                <a:ea typeface="DIN Next LT W23"/>
-                <a:cs typeface="DIN Next LT W23"/>
-              </a:rPr>
-              <a:t>–</a:t>
-            </a:r>
-          </a:p>
-        </p:txBody>
-      </p:sp>
-      <p:sp>
-        <p:nvSpPr>
-          <p:cNvPr id="13" name="TextBox 12"/>
-          <p:cNvSpPr txBox="1"/>
-          <p:nvPr/>
-        </p:nvSpPr>
-        <p:spPr>
-          <a:xfrm>
-            <a:off x="914400" y="2944368"/>
-            <a:ext cx="9875519" cy="384048"/>
+              <a:rPr sz="2200" b="1">
+                <a:solidFill>
+                  <a:srgbClr val="5234B7"/>
+                </a:solidFill>
+                <a:latin typeface="DIN Next LT W23"/>
+                <a:ea typeface="DIN Next LT W23"/>
+                <a:cs typeface="DIN Next LT W23"/>
+              </a:rPr>
+              <a:t>3</a:t>
+            </a:r>
+          </a:p>
+        </p:txBody>
+      </p:sp>
+      <p:sp>
+        <p:nvSpPr>
+          <p:cNvPr id="16" name="TextBox 15"/>
+          <p:cNvSpPr txBox="1"/>
+          <p:nvPr/>
+        </p:nvSpPr>
+        <p:spPr>
+          <a:xfrm>
+            <a:off x="1417320" y="4690872"/>
+            <a:ext cx="9692640" cy="548640"/>
           </a:xfrm>
           <a:prstGeom prst="rect">
             <a:avLst/>
@@ -34236,7 +34258,7 @@
           <a:p>
             <a:pPr algn="l"/>
             <a:r>
-              <a:rPr sz="1400" b="0">
+              <a:rPr sz="1600" b="0">
                 <a:solidFill>
                   <a:srgbClr val="121018"/>
                 </a:solidFill>
@@ -34244,51 +34266,14 @@
                 <a:ea typeface="DIN Next LT W23"/>
                 <a:cs typeface="DIN Next LT W23"/>
               </a:rPr>
-              <a:t>Foundation architecture for translation, summarization, and many LLM pipelines.</a:t>
-            </a:r>
-          </a:p>
-        </p:txBody>
-      </p:sp>
-      <p:sp>
-        <p:nvSpPr>
-          <p:cNvPr id="14" name="TextBox 13"/>
-          <p:cNvSpPr txBox="1"/>
-          <p:nvPr/>
-        </p:nvSpPr>
-        <p:spPr>
-          <a:xfrm>
-            <a:off x="548640" y="5897880"/>
-            <a:ext cx="10972800" cy="274320"/>
-          </a:xfrm>
-          <a:prstGeom prst="rect">
-            <a:avLst/>
-          </a:prstGeom>
-          <a:noFill/>
-        </p:spPr>
-        <p:txBody>
-          <a:bodyPr wrap="square" anchor="t">
-            <a:spAutoFit/>
-          </a:bodyPr>
-          <a:lstStyle/>
-          <a:p>
-            <a:pPr algn="l"/>
-            <a:r>
-              <a:rPr sz="1200" b="0">
-                <a:solidFill>
-                  <a:srgbClr val="5A5470"/>
-                </a:solidFill>
-                <a:latin typeface="DIN Next LT W23"/>
-                <a:ea typeface="DIN Next LT W23"/>
-                <a:cs typeface="DIN Next LT W23"/>
-              </a:rPr>
-              <a:t>Attention mechanisms reduce reliance on recurrence for sequence modeling.</a:t>
-            </a:r>
-          </a:p>
-        </p:txBody>
-      </p:sp>
-      <p:sp>
-        <p:nvSpPr>
-          <p:cNvPr id="15" name="Rectangle 14"/>
+              <a:t>Subword tokenizers and encoder–decoder attention are the bridge to Transformers.</a:t>
+            </a:r>
+          </a:p>
+        </p:txBody>
+      </p:sp>
+      <p:sp>
+        <p:nvSpPr>
+          <p:cNvPr id="17" name="Rectangle 16"/>
           <p:cNvSpPr/>
           <p:nvPr/>
         </p:nvSpPr>
@@ -34332,7 +34317,7 @@
       </p:sp>
       <p:sp>
         <p:nvSpPr>
-          <p:cNvPr id="16" name="TextBox 15"/>
+          <p:cNvPr id="18" name="TextBox 17"/>
           <p:cNvSpPr txBox="1"/>
           <p:nvPr/>
         </p:nvSpPr>
@@ -34369,7 +34354,7 @@
       </p:sp>
       <p:sp>
         <p:nvSpPr>
-          <p:cNvPr id="17" name="TextBox 16"/>
+          <p:cNvPr id="19" name="TextBox 18"/>
           <p:cNvSpPr txBox="1"/>
           <p:nvPr/>
         </p:nvSpPr>
@@ -34399,7 +34384,7 @@
                 <a:ea typeface="DIN Next LT W23"/>
                 <a:cs typeface="DIN Next LT W23"/>
               </a:rPr>
-              <a:t>52  /  54</a:t>
+              <a:t>52  /  53</a:t>
             </a:r>
           </a:p>
         </p:txBody>
@@ -34491,7 +34476,7 @@
         <p:spPr>
           <a:xfrm>
             <a:off x="10561320" y="411480"/>
-            <a:ext cx="1206201" cy="320040"/>
+            <a:ext cx="1378516" cy="365760"/>
           </a:xfrm>
           <a:prstGeom prst="rect">
             <a:avLst/>
@@ -34506,8 +34491,82 @@
         </p:nvSpPr>
         <p:spPr>
           <a:xfrm>
-            <a:off x="548640" y="438912"/>
-            <a:ext cx="7772400" cy="274320"/>
+            <a:off x="548640" y="2651760"/>
+            <a:ext cx="10972800" cy="731520"/>
+          </a:xfrm>
+          <a:prstGeom prst="rect">
+            <a:avLst/>
+          </a:prstGeom>
+          <a:noFill/>
+        </p:spPr>
+        <p:txBody>
+          <a:bodyPr wrap="square" anchor="t">
+            <a:spAutoFit/>
+          </a:bodyPr>
+          <a:lstStyle/>
+          <a:p>
+            <a:pPr algn="ctr"/>
+            <a:r>
+              <a:rPr sz="4000" b="1">
+                <a:solidFill>
+                  <a:srgbClr val="5234B7"/>
+                </a:solidFill>
+                <a:latin typeface="DIN Next LT W23"/>
+                <a:ea typeface="DIN Next LT W23"/>
+                <a:cs typeface="DIN Next LT W23"/>
+              </a:rPr>
+              <a:t>Thank you</a:t>
+            </a:r>
+          </a:p>
+        </p:txBody>
+      </p:sp>
+      <p:sp>
+        <p:nvSpPr>
+          <p:cNvPr id="5" name="TextBox 4"/>
+          <p:cNvSpPr txBox="1"/>
+          <p:nvPr/>
+        </p:nvSpPr>
+        <p:spPr>
+          <a:xfrm>
+            <a:off x="548640" y="3474720"/>
+            <a:ext cx="10972800" cy="365760"/>
+          </a:xfrm>
+          <a:prstGeom prst="rect">
+            <a:avLst/>
+          </a:prstGeom>
+          <a:noFill/>
+        </p:spPr>
+        <p:txBody>
+          <a:bodyPr wrap="square" anchor="t">
+            <a:spAutoFit/>
+          </a:bodyPr>
+          <a:lstStyle/>
+          <a:p>
+            <a:pPr algn="ctr"/>
+            <a:r>
+              <a:rPr sz="1600" b="0">
+                <a:solidFill>
+                  <a:srgbClr val="5A5470"/>
+                </a:solidFill>
+                <a:latin typeface="DIN Next LT W23"/>
+                <a:ea typeface="DIN Next LT W23"/>
+                <a:cs typeface="DIN Next LT W23"/>
+              </a:rPr>
+              <a:t>Labs: code/16- NLP</a:t>
+            </a:r>
+          </a:p>
+        </p:txBody>
+      </p:sp>
+      <p:sp>
+        <p:nvSpPr>
+          <p:cNvPr id="6" name="TextBox 5"/>
+          <p:cNvSpPr txBox="1"/>
+          <p:nvPr/>
+        </p:nvSpPr>
+        <p:spPr>
+          <a:xfrm>
+            <a:off x="548640" y="6126480"/>
+            <a:ext cx="5486400" cy="274320"/>
           </a:xfrm>
           <a:prstGeom prst="rect">
             <a:avLst/>
@@ -34522,88 +34581,7 @@
           <a:p>
             <a:pPr algn="l"/>
             <a:r>
-              <a:rPr sz="1200" b="0">
-                <a:solidFill>
-                  <a:srgbClr val="5A5470"/>
-                </a:solidFill>
-                <a:latin typeface="DIN Next LT W23"/>
-                <a:ea typeface="DIN Next LT W23"/>
-                <a:cs typeface="DIN Next LT W23"/>
-              </a:rPr>
-              <a:t>S08  ·  Takeaways</a:t>
-            </a:r>
-          </a:p>
-        </p:txBody>
-      </p:sp>
-      <p:sp>
-        <p:nvSpPr>
-          <p:cNvPr id="5" name="Rectangle 4"/>
-          <p:cNvSpPr/>
-          <p:nvPr/>
-        </p:nvSpPr>
-        <p:spPr>
-          <a:xfrm>
-            <a:off x="548640" y="822960"/>
-            <a:ext cx="11064240" cy="10972"/>
-          </a:xfrm>
-          <a:prstGeom prst="rect">
-            <a:avLst/>
-          </a:prstGeom>
-          <a:solidFill>
-            <a:srgbClr val="E4DCF4"/>
-          </a:solidFill>
-          <a:ln>
-            <a:noFill/>
-          </a:ln>
-          <a:effectLst/>
-        </p:spPr>
-        <p:style>
-          <a:lnRef idx="1">
-            <a:schemeClr val="accent1"/>
-          </a:lnRef>
-          <a:fillRef idx="3">
-            <a:schemeClr val="accent1"/>
-          </a:fillRef>
-          <a:effectRef idx="2">
-            <a:schemeClr val="accent1"/>
-          </a:effectRef>
-          <a:fontRef idx="minor">
-            <a:schemeClr val="lt1"/>
-          </a:fontRef>
-        </p:style>
-        <p:txBody>
-          <a:bodyPr rtlCol="0" anchor="ctr"/>
-          <a:lstStyle/>
-          <a:p>
-            <a:pPr algn="ctr"/>
-          </a:p>
-        </p:txBody>
-      </p:sp>
-      <p:sp>
-        <p:nvSpPr>
-          <p:cNvPr id="6" name="TextBox 5"/>
-          <p:cNvSpPr txBox="1"/>
-          <p:nvPr/>
-        </p:nvSpPr>
-        <p:spPr>
-          <a:xfrm>
-            <a:off x="548640" y="1051560"/>
-            <a:ext cx="10241280" cy="594360"/>
-          </a:xfrm>
-          <a:prstGeom prst="rect">
-            <a:avLst/>
-          </a:prstGeom>
-          <a:noFill/>
-        </p:spPr>
-        <p:txBody>
-          <a:bodyPr wrap="square" anchor="t">
-            <a:spAutoFit/>
-          </a:bodyPr>
-          <a:lstStyle/>
-          <a:p>
-            <a:pPr algn="l"/>
-            <a:r>
-              <a:rPr sz="3200" b="1">
+              <a:rPr sz="1200" b="1">
                 <a:solidFill>
                   <a:srgbClr val="5234B7"/>
                 </a:solidFill>
@@ -34611,411 +34589,14 @@
                 <a:ea typeface="DIN Next LT W23"/>
                 <a:cs typeface="DIN Next LT W23"/>
               </a:rPr>
-              <a:t>3 Ideas to Keep</a:t>
-            </a:r>
-          </a:p>
-        </p:txBody>
-      </p:sp>
-      <p:sp>
-        <p:nvSpPr>
-          <p:cNvPr id="7" name="TextBox 6"/>
-          <p:cNvSpPr txBox="1"/>
-          <p:nvPr/>
-        </p:nvSpPr>
-        <p:spPr>
-          <a:xfrm>
-            <a:off x="548640" y="1600200"/>
-            <a:ext cx="10241280" cy="365760"/>
-          </a:xfrm>
-          <a:prstGeom prst="rect">
-            <a:avLst/>
-          </a:prstGeom>
-          <a:noFill/>
-        </p:spPr>
-        <p:txBody>
-          <a:bodyPr wrap="square" anchor="t">
-            <a:spAutoFit/>
-          </a:bodyPr>
-          <a:lstStyle/>
-          <a:p>
-            <a:pPr algn="l"/>
-            <a:r>
-              <a:rPr sz="1500" b="0">
-                <a:solidFill>
-                  <a:srgbClr val="5A5470"/>
-                </a:solidFill>
-                <a:latin typeface="DIN Next LT W23"/>
-                <a:ea typeface="DIN Next LT W23"/>
-                <a:cs typeface="DIN Next LT W23"/>
-              </a:rPr>
-              <a:t>Leave with these</a:t>
-            </a:r>
-          </a:p>
-        </p:txBody>
-      </p:sp>
-      <p:sp>
-        <p:nvSpPr>
-          <p:cNvPr id="8" name="Rounded Rectangle 7"/>
-          <p:cNvSpPr/>
-          <p:nvPr/>
-        </p:nvSpPr>
-        <p:spPr>
-          <a:xfrm>
-            <a:off x="548640" y="2148840"/>
-            <a:ext cx="10972800" cy="987552"/>
-          </a:xfrm>
-          <a:prstGeom prst="roundRect">
-            <a:avLst>
-              <a:gd name="adj" fmla="val 10000"/>
-            </a:avLst>
-          </a:prstGeom>
-          <a:solidFill>
-            <a:srgbClr val="EEE8FA"/>
-          </a:solidFill>
-          <a:ln>
-            <a:noFill/>
-          </a:ln>
-          <a:effectLst/>
-        </p:spPr>
-        <p:style>
-          <a:lnRef idx="1">
-            <a:schemeClr val="accent1"/>
-          </a:lnRef>
-          <a:fillRef idx="3">
-            <a:schemeClr val="accent1"/>
-          </a:fillRef>
-          <a:effectRef idx="2">
-            <a:schemeClr val="accent1"/>
-          </a:effectRef>
-          <a:fontRef idx="minor">
-            <a:schemeClr val="lt1"/>
-          </a:fontRef>
-        </p:style>
-        <p:txBody>
-          <a:bodyPr rtlCol="0" anchor="ctr"/>
-          <a:lstStyle/>
-          <a:p>
-            <a:pPr algn="ctr"/>
-          </a:p>
-        </p:txBody>
-      </p:sp>
-      <p:sp>
-        <p:nvSpPr>
-          <p:cNvPr id="9" name="TextBox 8"/>
-          <p:cNvSpPr txBox="1"/>
-          <p:nvPr/>
-        </p:nvSpPr>
-        <p:spPr>
-          <a:xfrm>
-            <a:off x="822960" y="2404872"/>
-            <a:ext cx="457200" cy="457200"/>
-          </a:xfrm>
-          <a:prstGeom prst="rect">
-            <a:avLst/>
-          </a:prstGeom>
-          <a:noFill/>
-        </p:spPr>
-        <p:txBody>
-          <a:bodyPr wrap="square" anchor="t">
-            <a:spAutoFit/>
-          </a:bodyPr>
-          <a:lstStyle/>
-          <a:p>
-            <a:pPr algn="l"/>
-            <a:r>
-              <a:rPr sz="2200" b="1">
-                <a:solidFill>
-                  <a:srgbClr val="5234B7"/>
-                </a:solidFill>
-                <a:latin typeface="DIN Next LT W23"/>
-                <a:ea typeface="DIN Next LT W23"/>
-                <a:cs typeface="DIN Next LT W23"/>
-              </a:rPr>
-              <a:t>1</a:t>
-            </a:r>
-          </a:p>
-        </p:txBody>
-      </p:sp>
-      <p:sp>
-        <p:nvSpPr>
-          <p:cNvPr id="10" name="TextBox 9"/>
-          <p:cNvSpPr txBox="1"/>
-          <p:nvPr/>
-        </p:nvSpPr>
-        <p:spPr>
-          <a:xfrm>
-            <a:off x="1417320" y="2404872"/>
-            <a:ext cx="9692640" cy="548640"/>
-          </a:xfrm>
-          <a:prstGeom prst="rect">
-            <a:avLst/>
-          </a:prstGeom>
-          <a:noFill/>
-        </p:spPr>
-        <p:txBody>
-          <a:bodyPr wrap="square" anchor="t">
-            <a:spAutoFit/>
-          </a:bodyPr>
-          <a:lstStyle/>
-          <a:p>
-            <a:pPr algn="l"/>
-            <a:r>
-              <a:rPr sz="1600" b="0">
-                <a:solidFill>
-                  <a:srgbClr val="121018"/>
-                </a:solidFill>
-                <a:latin typeface="DIN Next LT W23"/>
-                <a:ea typeface="DIN Next LT W23"/>
-                <a:cs typeface="DIN Next LT W23"/>
-              </a:rPr>
-              <a:t>Language is ambiguous — cleaning and tokenization choices persist through the pipeline.</a:t>
-            </a:r>
-          </a:p>
-        </p:txBody>
-      </p:sp>
-      <p:sp>
-        <p:nvSpPr>
-          <p:cNvPr id="11" name="Rounded Rectangle 10"/>
-          <p:cNvSpPr/>
-          <p:nvPr/>
-        </p:nvSpPr>
-        <p:spPr>
-          <a:xfrm>
-            <a:off x="548640" y="3291840"/>
-            <a:ext cx="10972800" cy="987552"/>
-          </a:xfrm>
-          <a:prstGeom prst="roundRect">
-            <a:avLst>
-              <a:gd name="adj" fmla="val 10000"/>
-            </a:avLst>
-          </a:prstGeom>
-          <a:solidFill>
-            <a:srgbClr val="EEE8FA"/>
-          </a:solidFill>
-          <a:ln>
-            <a:noFill/>
-          </a:ln>
-          <a:effectLst/>
-        </p:spPr>
-        <p:style>
-          <a:lnRef idx="1">
-            <a:schemeClr val="accent1"/>
-          </a:lnRef>
-          <a:fillRef idx="3">
-            <a:schemeClr val="accent1"/>
-          </a:fillRef>
-          <a:effectRef idx="2">
-            <a:schemeClr val="accent1"/>
-          </a:effectRef>
-          <a:fontRef idx="minor">
-            <a:schemeClr val="lt1"/>
-          </a:fontRef>
-        </p:style>
-        <p:txBody>
-          <a:bodyPr rtlCol="0" anchor="ctr"/>
-          <a:lstStyle/>
-          <a:p>
-            <a:pPr algn="ctr"/>
-          </a:p>
-        </p:txBody>
-      </p:sp>
-      <p:sp>
-        <p:nvSpPr>
-          <p:cNvPr id="12" name="TextBox 11"/>
-          <p:cNvSpPr txBox="1"/>
-          <p:nvPr/>
-        </p:nvSpPr>
-        <p:spPr>
-          <a:xfrm>
-            <a:off x="822960" y="3547872"/>
-            <a:ext cx="457200" cy="457200"/>
-          </a:xfrm>
-          <a:prstGeom prst="rect">
-            <a:avLst/>
-          </a:prstGeom>
-          <a:noFill/>
-        </p:spPr>
-        <p:txBody>
-          <a:bodyPr wrap="square" anchor="t">
-            <a:spAutoFit/>
-          </a:bodyPr>
-          <a:lstStyle/>
-          <a:p>
-            <a:pPr algn="l"/>
-            <a:r>
-              <a:rPr sz="2200" b="1">
-                <a:solidFill>
-                  <a:srgbClr val="5234B7"/>
-                </a:solidFill>
-                <a:latin typeface="DIN Next LT W23"/>
-                <a:ea typeface="DIN Next LT W23"/>
-                <a:cs typeface="DIN Next LT W23"/>
-              </a:rPr>
-              <a:t>2</a:t>
-            </a:r>
-          </a:p>
-        </p:txBody>
-      </p:sp>
-      <p:sp>
-        <p:nvSpPr>
-          <p:cNvPr id="13" name="TextBox 12"/>
-          <p:cNvSpPr txBox="1"/>
-          <p:nvPr/>
-        </p:nvSpPr>
-        <p:spPr>
-          <a:xfrm>
-            <a:off x="1417320" y="3547872"/>
-            <a:ext cx="9692640" cy="548640"/>
-          </a:xfrm>
-          <a:prstGeom prst="rect">
-            <a:avLst/>
-          </a:prstGeom>
-          <a:noFill/>
-        </p:spPr>
-        <p:txBody>
-          <a:bodyPr wrap="square" anchor="t">
-            <a:spAutoFit/>
-          </a:bodyPr>
-          <a:lstStyle/>
-          <a:p>
-            <a:pPr algn="l"/>
-            <a:r>
-              <a:rPr sz="1600" b="0">
-                <a:solidFill>
-                  <a:srgbClr val="121018"/>
-                </a:solidFill>
-                <a:latin typeface="DIN Next LT W23"/>
-                <a:ea typeface="DIN Next LT W23"/>
-                <a:cs typeface="DIN Next LT W23"/>
-              </a:rPr>
-              <a:t>N-grams and RNNs model sequences; attention removes the seq2seq bottleneck.</a:t>
-            </a:r>
-          </a:p>
-        </p:txBody>
-      </p:sp>
-      <p:sp>
-        <p:nvSpPr>
-          <p:cNvPr id="14" name="Rounded Rectangle 13"/>
-          <p:cNvSpPr/>
-          <p:nvPr/>
-        </p:nvSpPr>
-        <p:spPr>
-          <a:xfrm>
-            <a:off x="548640" y="4434840"/>
-            <a:ext cx="10972800" cy="987552"/>
-          </a:xfrm>
-          <a:prstGeom prst="roundRect">
-            <a:avLst>
-              <a:gd name="adj" fmla="val 10000"/>
-            </a:avLst>
-          </a:prstGeom>
-          <a:solidFill>
-            <a:srgbClr val="EEE8FA"/>
-          </a:solidFill>
-          <a:ln>
-            <a:noFill/>
-          </a:ln>
-          <a:effectLst/>
-        </p:spPr>
-        <p:style>
-          <a:lnRef idx="1">
-            <a:schemeClr val="accent1"/>
-          </a:lnRef>
-          <a:fillRef idx="3">
-            <a:schemeClr val="accent1"/>
-          </a:fillRef>
-          <a:effectRef idx="2">
-            <a:schemeClr val="accent1"/>
-          </a:effectRef>
-          <a:fontRef idx="minor">
-            <a:schemeClr val="lt1"/>
-          </a:fontRef>
-        </p:style>
-        <p:txBody>
-          <a:bodyPr rtlCol="0" anchor="ctr"/>
-          <a:lstStyle/>
-          <a:p>
-            <a:pPr algn="ctr"/>
-          </a:p>
-        </p:txBody>
-      </p:sp>
-      <p:sp>
-        <p:nvSpPr>
-          <p:cNvPr id="15" name="TextBox 14"/>
-          <p:cNvSpPr txBox="1"/>
-          <p:nvPr/>
-        </p:nvSpPr>
-        <p:spPr>
-          <a:xfrm>
-            <a:off x="822960" y="4690872"/>
-            <a:ext cx="457200" cy="457200"/>
-          </a:xfrm>
-          <a:prstGeom prst="rect">
-            <a:avLst/>
-          </a:prstGeom>
-          <a:noFill/>
-        </p:spPr>
-        <p:txBody>
-          <a:bodyPr wrap="square" anchor="t">
-            <a:spAutoFit/>
-          </a:bodyPr>
-          <a:lstStyle/>
-          <a:p>
-            <a:pPr algn="l"/>
-            <a:r>
-              <a:rPr sz="2200" b="1">
-                <a:solidFill>
-                  <a:srgbClr val="5234B7"/>
-                </a:solidFill>
-                <a:latin typeface="DIN Next LT W23"/>
-                <a:ea typeface="DIN Next LT W23"/>
-                <a:cs typeface="DIN Next LT W23"/>
-              </a:rPr>
-              <a:t>3</a:t>
-            </a:r>
-          </a:p>
-        </p:txBody>
-      </p:sp>
-      <p:sp>
-        <p:nvSpPr>
-          <p:cNvPr id="16" name="TextBox 15"/>
-          <p:cNvSpPr txBox="1"/>
-          <p:nvPr/>
-        </p:nvSpPr>
-        <p:spPr>
-          <a:xfrm>
-            <a:off x="1417320" y="4690872"/>
-            <a:ext cx="9692640" cy="548640"/>
-          </a:xfrm>
-          <a:prstGeom prst="rect">
-            <a:avLst/>
-          </a:prstGeom>
-          <a:noFill/>
-        </p:spPr>
-        <p:txBody>
-          <a:bodyPr wrap="square" anchor="t">
-            <a:spAutoFit/>
-          </a:bodyPr>
-          <a:lstStyle/>
-          <a:p>
-            <a:pPr algn="l"/>
-            <a:r>
-              <a:rPr sz="1600" b="0">
-                <a:solidFill>
-                  <a:srgbClr val="121018"/>
-                </a:solidFill>
-                <a:latin typeface="DIN Next LT W23"/>
-                <a:ea typeface="DIN Next LT W23"/>
-                <a:cs typeface="DIN Next LT W23"/>
-              </a:rPr>
-              <a:t>Subword tokenizers and encoder–decoder attention are the bridge to Transformers.</a:t>
-            </a:r>
-          </a:p>
-        </p:txBody>
-      </p:sp>
-      <p:sp>
-        <p:nvSpPr>
-          <p:cNvPr id="17" name="Rectangle 16"/>
+              <a:t>ETRA</a:t>
+            </a:r>
+          </a:p>
+        </p:txBody>
+      </p:sp>
+      <p:sp>
+        <p:nvSpPr>
+          <p:cNvPr id="7" name="Rectangle 6"/>
           <p:cNvSpPr/>
           <p:nvPr/>
         </p:nvSpPr>
@@ -35059,7 +34640,7 @@
       </p:sp>
       <p:sp>
         <p:nvSpPr>
-          <p:cNvPr id="18" name="TextBox 17"/>
+          <p:cNvPr id="8" name="TextBox 7"/>
           <p:cNvSpPr txBox="1"/>
           <p:nvPr/>
         </p:nvSpPr>
@@ -35096,7 +34677,7 @@
       </p:sp>
       <p:sp>
         <p:nvSpPr>
-          <p:cNvPr id="19" name="TextBox 18"/>
+          <p:cNvPr id="9" name="TextBox 8"/>
           <p:cNvSpPr txBox="1"/>
           <p:nvPr/>
         </p:nvSpPr>
@@ -35126,330 +34707,7 @@
                 <a:ea typeface="DIN Next LT W23"/>
                 <a:cs typeface="DIN Next LT W23"/>
               </a:rPr>
-              <a:t>53  /  54</a:t>
-            </a:r>
-          </a:p>
-        </p:txBody>
-      </p:sp>
-    </p:spTree>
-  </p:cSld>
-  <p:clrMapOvr>
-    <a:masterClrMapping/>
-  </p:clrMapOvr>
-</p:sld>
-</file>
-
-<file path=ppt/slides/slide54.xml><?xml version="1.0" encoding="utf-8"?>
-<p:sld xmlns:a="http://schemas.openxmlformats.org/drawingml/2006/main" xmlns:p="http://schemas.openxmlformats.org/presentationml/2006/main" xmlns:r="http://schemas.openxmlformats.org/officeDocument/2006/relationships">
-  <p:cSld>
-    <p:bg>
-      <p:bgPr>
-        <a:solidFill>
-          <a:srgbClr val="FAF8FF"/>
-        </a:solidFill>
-        <a:effectLst/>
-      </p:bgPr>
-    </p:bg>
-    <p:spTree>
-      <p:nvGrpSpPr>
-        <p:cNvPr id="1" name=""/>
-        <p:cNvGrpSpPr/>
-        <p:nvPr/>
-      </p:nvGrpSpPr>
-      <p:grpSpPr/>
-      <p:sp>
-        <p:nvSpPr>
-          <p:cNvPr id="2" name="Rectangle 1"/>
-          <p:cNvSpPr/>
-          <p:nvPr/>
-        </p:nvSpPr>
-        <p:spPr>
-          <a:xfrm>
-            <a:off x="12136831" y="0"/>
-            <a:ext cx="54864" cy="6858000"/>
-          </a:xfrm>
-          <a:prstGeom prst="rect">
-            <a:avLst/>
-          </a:prstGeom>
-          <a:solidFill>
-            <a:srgbClr val="5234B7"/>
-          </a:solidFill>
-          <a:ln>
-            <a:noFill/>
-          </a:ln>
-          <a:effectLst/>
-        </p:spPr>
-        <p:style>
-          <a:lnRef idx="1">
-            <a:schemeClr val="accent1"/>
-          </a:lnRef>
-          <a:fillRef idx="3">
-            <a:schemeClr val="accent1"/>
-          </a:fillRef>
-          <a:effectRef idx="2">
-            <a:schemeClr val="accent1"/>
-          </a:effectRef>
-          <a:fontRef idx="minor">
-            <a:schemeClr val="lt1"/>
-          </a:fontRef>
-        </p:style>
-        <p:txBody>
-          <a:bodyPr rtlCol="0" anchor="ctr"/>
-          <a:lstStyle/>
-          <a:p>
-            <a:pPr algn="ctr"/>
-          </a:p>
-        </p:txBody>
-      </p:sp>
-      <p:pic>
-        <p:nvPicPr>
-          <p:cNvPr id="3" name="Picture 2" descr="etra-wordmark.png"/>
-          <p:cNvPicPr>
-            <a:picLocks noChangeAspect="1"/>
-          </p:cNvPicPr>
-          <p:nvPr/>
-        </p:nvPicPr>
-        <p:blipFill>
-          <a:blip r:embed="rId2"/>
-          <a:stretch>
-            <a:fillRect/>
-          </a:stretch>
-        </p:blipFill>
-        <p:spPr>
-          <a:xfrm>
-            <a:off x="10561320" y="411480"/>
-            <a:ext cx="1378516" cy="365760"/>
-          </a:xfrm>
-          <a:prstGeom prst="rect">
-            <a:avLst/>
-          </a:prstGeom>
-        </p:spPr>
-      </p:pic>
-      <p:sp>
-        <p:nvSpPr>
-          <p:cNvPr id="4" name="TextBox 3"/>
-          <p:cNvSpPr txBox="1"/>
-          <p:nvPr/>
-        </p:nvSpPr>
-        <p:spPr>
-          <a:xfrm>
-            <a:off x="548640" y="2651760"/>
-            <a:ext cx="10972800" cy="731520"/>
-          </a:xfrm>
-          <a:prstGeom prst="rect">
-            <a:avLst/>
-          </a:prstGeom>
-          <a:noFill/>
-        </p:spPr>
-        <p:txBody>
-          <a:bodyPr wrap="square" anchor="t">
-            <a:spAutoFit/>
-          </a:bodyPr>
-          <a:lstStyle/>
-          <a:p>
-            <a:pPr algn="ctr"/>
-            <a:r>
-              <a:rPr sz="4000" b="1">
-                <a:solidFill>
-                  <a:srgbClr val="5234B7"/>
-                </a:solidFill>
-                <a:latin typeface="DIN Next LT W23"/>
-                <a:ea typeface="DIN Next LT W23"/>
-                <a:cs typeface="DIN Next LT W23"/>
-              </a:rPr>
-              <a:t>Thank you</a:t>
-            </a:r>
-          </a:p>
-        </p:txBody>
-      </p:sp>
-      <p:sp>
-        <p:nvSpPr>
-          <p:cNvPr id="5" name="TextBox 4"/>
-          <p:cNvSpPr txBox="1"/>
-          <p:nvPr/>
-        </p:nvSpPr>
-        <p:spPr>
-          <a:xfrm>
-            <a:off x="548640" y="3474720"/>
-            <a:ext cx="10972800" cy="365760"/>
-          </a:xfrm>
-          <a:prstGeom prst="rect">
-            <a:avLst/>
-          </a:prstGeom>
-          <a:noFill/>
-        </p:spPr>
-        <p:txBody>
-          <a:bodyPr wrap="square" anchor="t">
-            <a:spAutoFit/>
-          </a:bodyPr>
-          <a:lstStyle/>
-          <a:p>
-            <a:pPr algn="ctr"/>
-            <a:r>
-              <a:rPr sz="1600" b="0">
-                <a:solidFill>
-                  <a:srgbClr val="5A5470"/>
-                </a:solidFill>
-                <a:latin typeface="DIN Next LT W23"/>
-                <a:ea typeface="DIN Next LT W23"/>
-                <a:cs typeface="DIN Next LT W23"/>
-              </a:rPr>
-              <a:t>Labs: code/16- NLP</a:t>
-            </a:r>
-          </a:p>
-        </p:txBody>
-      </p:sp>
-      <p:sp>
-        <p:nvSpPr>
-          <p:cNvPr id="6" name="TextBox 5"/>
-          <p:cNvSpPr txBox="1"/>
-          <p:nvPr/>
-        </p:nvSpPr>
-        <p:spPr>
-          <a:xfrm>
-            <a:off x="548640" y="6126480"/>
-            <a:ext cx="5486400" cy="274320"/>
-          </a:xfrm>
-          <a:prstGeom prst="rect">
-            <a:avLst/>
-          </a:prstGeom>
-          <a:noFill/>
-        </p:spPr>
-        <p:txBody>
-          <a:bodyPr wrap="square" anchor="t">
-            <a:spAutoFit/>
-          </a:bodyPr>
-          <a:lstStyle/>
-          <a:p>
-            <a:pPr algn="l"/>
-            <a:r>
-              <a:rPr sz="1200" b="1">
-                <a:solidFill>
-                  <a:srgbClr val="5234B7"/>
-                </a:solidFill>
-                <a:latin typeface="DIN Next LT W23"/>
-                <a:ea typeface="DIN Next LT W23"/>
-                <a:cs typeface="DIN Next LT W23"/>
-              </a:rPr>
-              <a:t>ETRA</a:t>
-            </a:r>
-          </a:p>
-        </p:txBody>
-      </p:sp>
-      <p:sp>
-        <p:nvSpPr>
-          <p:cNvPr id="7" name="Rectangle 6"/>
-          <p:cNvSpPr/>
-          <p:nvPr/>
-        </p:nvSpPr>
-        <p:spPr>
-          <a:xfrm>
-            <a:off x="548640" y="6446520"/>
-            <a:ext cx="11064240" cy="10972"/>
-          </a:xfrm>
-          <a:prstGeom prst="rect">
-            <a:avLst/>
-          </a:prstGeom>
-          <a:solidFill>
-            <a:srgbClr val="5234B7"/>
-          </a:solidFill>
-          <a:ln>
-            <a:noFill/>
-          </a:ln>
-          <a:effectLst/>
-        </p:spPr>
-        <p:style>
-          <a:lnRef idx="1">
-            <a:schemeClr val="accent1"/>
-          </a:lnRef>
-          <a:fillRef idx="3">
-            <a:schemeClr val="accent1"/>
-          </a:fillRef>
-          <a:effectRef idx="2">
-            <a:schemeClr val="accent1"/>
-          </a:effectRef>
-          <a:fontRef idx="minor">
-            <a:schemeClr val="lt1"/>
-          </a:fontRef>
-        </p:style>
-        <p:txBody>
-          <a:bodyPr rtlCol="0" anchor="ctr"/>
-          <a:lstStyle/>
-          <a:p>
-            <a:pPr algn="ctr"/>
-          </a:p>
-        </p:txBody>
-      </p:sp>
-      <p:sp>
-        <p:nvSpPr>
-          <p:cNvPr id="8" name="TextBox 7"/>
-          <p:cNvSpPr txBox="1"/>
-          <p:nvPr/>
-        </p:nvSpPr>
-        <p:spPr>
-          <a:xfrm>
-            <a:off x="548640" y="6510528"/>
-            <a:ext cx="2743200" cy="256032"/>
-          </a:xfrm>
-          <a:prstGeom prst="rect">
-            <a:avLst/>
-          </a:prstGeom>
-          <a:noFill/>
-        </p:spPr>
-        <p:txBody>
-          <a:bodyPr wrap="square" anchor="t">
-            <a:spAutoFit/>
-          </a:bodyPr>
-          <a:lstStyle/>
-          <a:p>
-            <a:pPr algn="l"/>
-            <a:r>
-              <a:rPr sz="1100" b="1">
-                <a:solidFill>
-                  <a:srgbClr val="5234B7"/>
-                </a:solidFill>
-                <a:latin typeface="DIN Next LT W23"/>
-                <a:ea typeface="DIN Next LT W23"/>
-                <a:cs typeface="DIN Next LT W23"/>
-              </a:rPr>
-              <a:t>ETRA</a:t>
-            </a:r>
-          </a:p>
-        </p:txBody>
-      </p:sp>
-      <p:sp>
-        <p:nvSpPr>
-          <p:cNvPr id="9" name="TextBox 8"/>
-          <p:cNvSpPr txBox="1"/>
-          <p:nvPr/>
-        </p:nvSpPr>
-        <p:spPr>
-          <a:xfrm>
-            <a:off x="9601200" y="6510528"/>
-            <a:ext cx="2011680" cy="256032"/>
-          </a:xfrm>
-          <a:prstGeom prst="rect">
-            <a:avLst/>
-          </a:prstGeom>
-          <a:noFill/>
-        </p:spPr>
-        <p:txBody>
-          <a:bodyPr wrap="square" anchor="t">
-            <a:spAutoFit/>
-          </a:bodyPr>
-          <a:lstStyle/>
-          <a:p>
-            <a:pPr algn="r"/>
-            <a:r>
-              <a:rPr sz="1100" b="0">
-                <a:solidFill>
-                  <a:srgbClr val="5A5470"/>
-                </a:solidFill>
-                <a:latin typeface="DIN Next LT W23"/>
-                <a:ea typeface="DIN Next LT W23"/>
-                <a:cs typeface="DIN Next LT W23"/>
-              </a:rPr>
-              <a:t>54  /  54</a:t>
+              <a:t>53  /  53</a:t>
             </a:r>
           </a:p>
         </p:txBody>
@@ -36173,7 +35431,7 @@
                 <a:ea typeface="DIN Next LT W23"/>
                 <a:cs typeface="DIN Next LT W23"/>
               </a:rPr>
-              <a:t>06  /  54</a:t>
+              <a:t>06  /  53</a:t>
             </a:r>
           </a:p>
         </p:txBody>
@@ -36725,7 +35983,7 @@
                 <a:ea typeface="DIN Next LT W23"/>
                 <a:cs typeface="DIN Next LT W23"/>
               </a:rPr>
-              <a:t>07  /  54</a:t>
+              <a:t>07  /  53</a:t>
             </a:r>
           </a:p>
         </p:txBody>
@@ -37437,7 +36695,7 @@
                 <a:ea typeface="DIN Next LT W23"/>
                 <a:cs typeface="DIN Next LT W23"/>
               </a:rPr>
-              <a:t>08  /  54</a:t>
+              <a:t>08  /  53</a:t>
             </a:r>
           </a:p>
         </p:txBody>
@@ -38340,7 +37598,7 @@
                 <a:ea typeface="DIN Next LT W23"/>
                 <a:cs typeface="DIN Next LT W23"/>
               </a:rPr>
-              <a:t>09  /  54</a:t>
+              <a:t>09  /  53</a:t>
             </a:r>
           </a:p>
         </p:txBody>

--- a/web-presentation/pdf-exports/Week3-Session1-NLP.pptx
+++ b/web-presentation/pdf-exports/Week3-Session1-NLP.pptx
@@ -19249,8 +19249,8 @@
         </p:blipFill>
         <p:spPr>
           <a:xfrm>
-            <a:off x="2817121" y="2194560"/>
-            <a:ext cx="6435836" cy="4050791"/>
+            <a:off x="1882748" y="2194560"/>
+            <a:ext cx="8304582" cy="4050791"/>
           </a:xfrm>
           <a:prstGeom prst="rect">
             <a:avLst/>
@@ -27338,8 +27338,8 @@
         </p:blipFill>
         <p:spPr>
           <a:xfrm>
-            <a:off x="731520" y="2134305"/>
-            <a:ext cx="10607040" cy="3823830"/>
+            <a:off x="731520" y="2279485"/>
+            <a:ext cx="10607040" cy="3533470"/>
           </a:xfrm>
           <a:prstGeom prst="rect">
             <a:avLst/>
@@ -28533,8 +28533,8 @@
         </p:blipFill>
         <p:spPr>
           <a:xfrm>
-            <a:off x="731520" y="2036957"/>
-            <a:ext cx="10607040" cy="4018526"/>
+            <a:off x="1086219" y="1847088"/>
+            <a:ext cx="9897640" cy="4398264"/>
           </a:xfrm>
           <a:prstGeom prst="rect">
             <a:avLst/>
@@ -30787,8 +30787,8 @@
         </p:blipFill>
         <p:spPr>
           <a:xfrm>
-            <a:off x="731520" y="2036957"/>
-            <a:ext cx="10607040" cy="4018526"/>
+            <a:off x="1712421" y="1847088"/>
+            <a:ext cx="8645236" cy="4398264"/>
           </a:xfrm>
           <a:prstGeom prst="rect">
             <a:avLst/>
@@ -31224,8 +31224,8 @@
         </p:blipFill>
         <p:spPr>
           <a:xfrm>
-            <a:off x="2808138" y="2194560"/>
-            <a:ext cx="6453802" cy="4050791"/>
+            <a:off x="4009644" y="2194560"/>
+            <a:ext cx="4050791" cy="4050791"/>
           </a:xfrm>
           <a:prstGeom prst="rect">
             <a:avLst/>
@@ -32347,8 +32347,8 @@
         </p:blipFill>
         <p:spPr>
           <a:xfrm>
-            <a:off x="731520" y="2036957"/>
-            <a:ext cx="10607040" cy="4018526"/>
+            <a:off x="1712421" y="1847088"/>
+            <a:ext cx="8645236" cy="4398264"/>
           </a:xfrm>
           <a:prstGeom prst="rect">
             <a:avLst/>
@@ -33336,8 +33336,8 @@
         </p:blipFill>
         <p:spPr>
           <a:xfrm>
-            <a:off x="731520" y="2009699"/>
-            <a:ext cx="10607040" cy="4073041"/>
+            <a:off x="4542105" y="1847088"/>
+            <a:ext cx="2985869" cy="4398264"/>
           </a:xfrm>
           <a:prstGeom prst="rect">
             <a:avLst/>
@@ -35059,8 +35059,8 @@
         </p:blipFill>
         <p:spPr>
           <a:xfrm>
-            <a:off x="760491" y="2194560"/>
-            <a:ext cx="10549096" cy="4050791"/>
+            <a:off x="4660050" y="2194560"/>
+            <a:ext cx="2749978" cy="4050791"/>
           </a:xfrm>
           <a:prstGeom prst="rect">
             <a:avLst/>

--- a/web-presentation/pdf-exports/Week3-Session1-NLP.pptx
+++ b/web-presentation/pdf-exports/Week3-Session1-NLP.pptx
@@ -27338,8 +27338,8 @@
         </p:blipFill>
         <p:spPr>
           <a:xfrm>
-            <a:off x="731520" y="2279485"/>
-            <a:ext cx="10607040" cy="3533470"/>
+            <a:off x="731520" y="2278380"/>
+            <a:ext cx="10607040" cy="3535680"/>
           </a:xfrm>
           <a:prstGeom prst="rect">
             <a:avLst/>
@@ -28533,8 +28533,8 @@
         </p:blipFill>
         <p:spPr>
           <a:xfrm>
-            <a:off x="1086219" y="1847088"/>
-            <a:ext cx="9897640" cy="4398264"/>
+            <a:off x="1086993" y="1847088"/>
+            <a:ext cx="9896094" cy="4398264"/>
           </a:xfrm>
           <a:prstGeom prst="rect">
             <a:avLst/>
